--- a/launch/rs/design/detail-handoff/rs-insole-detail-v1.pptx
+++ b/launch/rs/design/detail-handoff/rs-insole-detail-v1.pptx
@@ -123,12 +123,12 @@
   <p:extLst>
     <p:ext uri="{521415D9-36F7-43E2-AB2F-B90AF26B5E84}">
       <p14:sectionLst xmlns:p14="http://schemas.microsoft.com/office/powerpoint/2010/main">
-        <p14:section name="개요" id="{db2676a6-19da-6fd7-be31-47bc031681af}">
+        <p14:section name="개요" id="{5d2aa1da-65b3-963f-3c5d-caf5a477051a}">
           <p14:sldIdLst>
             <p14:sldId id="256"/>
           </p14:sldIdLst>
         </p14:section>
-        <p14:section name="인솔" id="{303711bb-2412-f63e-8ac3-e8b1d075b924}">
+        <p14:section name="인솔" id="{6035f57d-2b50-e289-d47e-99f3b44bbec8}">
           <p14:sldIdLst>
             <p14:sldId id="257"/>
             <p14:sldId id="258"/>
@@ -1520,7 +1520,11 @@
           <a:p>
             <a:r>
               <a:rPr lang="en-US" dirty="0"/>
-              <a:t>인솔은 '다른 신발용'. 워킹화는 깔창이 없는 구조라 워킹화와 묶는 표현 금지(와디즈 가격안 원칙 4).</a:t>
+              <a:t>확정 후킹(대표 10/15): '오후 4시, 발이 먼저 퇴근하고 싶을 때.' — 효능 대신 상황 묘사.
+비주얼: 오후 햇빛 + 벽시계 4시 + 신발 뒤축을 살짝 빼는 발(얼굴 없음). 인솔은 ICUT 02 끝에서 처음 등장.
+숏폼 비트컷: 0.0s 시계 4시 → 0.5s 신발 뒤축 빼는 발 → 1.0s 신발 속 납작한 깔창 → 1.5s 아치가득 인솔 꺼내기.
+'피로·통증·지친 발 회복' 등 효능 단어 추가 금지.
+인솔은 '다른 신발용' — 워킹화와 묶는 표현 금지.</a:t>
             </a:r>
             <a:endParaRPr lang="en-US" dirty="0"/>
           </a:p>
@@ -2488,7 +2492,7 @@
                 <a:ea typeface="Malgun Gothic" pitchFamily="34" charset="-122"/>
                 <a:cs typeface="Malgun Gothic" pitchFamily="34" charset="-120"/>
               </a:rPr>
-              <a:t>아치 아래 빈 공간, 가득 채웠습니다.</a:t>
+              <a:t>오후 4시, 발이 먼저 퇴근하고 싶을 때.</a:t>
             </a:r>
             <a:endParaRPr lang="en-US" sz="1800" dirty="0"/>
           </a:p>
@@ -11927,7 +11931,7 @@
                 <a:ea typeface="Malgun Gothic" pitchFamily="34" charset="-122"/>
                 <a:cs typeface="Malgun Gothic" pitchFamily="34" charset="-120"/>
               </a:rPr>
-              <a:t>신던 신발은 그대로, 바닥만 새로.</a:t>
+              <a:t>오후 4시, 발이 먼저 퇴근하고 싶을 때.</a:t>
             </a:r>
             <a:endParaRPr lang="en-US" sz="1600" dirty="0"/>
           </a:p>
@@ -12080,7 +12084,7 @@
                 <a:ea typeface="Malgun Gothic" pitchFamily="34" charset="-122"/>
                 <a:cs typeface="Malgun Gothic" pitchFamily="34" charset="-120"/>
               </a:rPr>
-              <a:t>ICUT 01 후킹 카피 — 10안 (효능 표현 없이)</a:t>
+              <a:t>ICUT 01 후킹 카피 — 확정: 2번 (10/15)</a:t>
             </a:r>
             <a:endParaRPr lang="en-US" sz="2000" dirty="0"/>
           </a:p>
@@ -12400,13 +12404,13 @@
                       <a:r>
                         <a:rPr lang="en-US" sz="1200" dirty="0">
                           <a:solidFill>
-                            <a:srgbClr val="3D4A12"/>
+                            <a:srgbClr val="232323"/>
                           </a:solidFill>
                           <a:latin typeface="Malgun Gothic" pitchFamily="34" charset="0"/>
                           <a:ea typeface="Malgun Gothic" pitchFamily="34" charset="-122"/>
                           <a:cs typeface="Malgun Gothic" pitchFamily="34" charset="-120"/>
                         </a:rPr>
-                        <a:t>1 ★A</a:t>
+                        <a:t>1</a:t>
                       </a:r>
                       <a:endParaRPr lang="en-US" sz="1200" dirty="0">
                         <a:latin typeface="Malgun Gothic" charset="0"/>
@@ -12453,7 +12457,7 @@
                       <a:tailEnd type="none" w="med" len="med"/>
                     </a:lnB>
                     <a:solidFill>
-                      <a:srgbClr val="F4FBDF"/>
+                      <a:srgbClr val="FFFFFF"/>
                     </a:solidFill>
                   </a:tcPr>
                 </a:tc>
@@ -12521,7 +12525,7 @@
                       <a:tailEnd type="none" w="med" len="med"/>
                     </a:lnB>
                     <a:solidFill>
-                      <a:srgbClr val="F4FBDF"/>
+                      <a:srgbClr val="FFFFFF"/>
                     </a:solidFill>
                   </a:tcPr>
                 </a:tc>
@@ -12589,7 +12593,7 @@
                       <a:tailEnd type="none" w="med" len="med"/>
                     </a:lnB>
                     <a:solidFill>
-                      <a:srgbClr val="F4FBDF"/>
+                      <a:srgbClr val="FFFFFF"/>
                     </a:solidFill>
                   </a:tcPr>
                 </a:tc>
@@ -12610,7 +12614,7 @@
                           <a:ea typeface="Malgun Gothic" pitchFamily="34" charset="-122"/>
                           <a:cs typeface="Malgun Gothic" pitchFamily="34" charset="-120"/>
                         </a:rPr>
-                        <a:t>추천 — 제품명 '아치가득'과 직결</a:t>
+                        <a:t>ICUT 04 본문 헤드로 활용</a:t>
                       </a:r>
                       <a:endParaRPr lang="en-US" sz="1200" dirty="0">
                         <a:latin typeface="Malgun Gothic" charset="0"/>
@@ -12657,7 +12661,7 @@
                       <a:tailEnd type="none" w="med" len="med"/>
                     </a:lnB>
                     <a:solidFill>
-                      <a:srgbClr val="F4FBDF"/>
+                      <a:srgbClr val="FFFFFF"/>
                     </a:solidFill>
                   </a:tcPr>
                 </a:tc>
@@ -12680,7 +12684,7 @@
                           <a:ea typeface="Malgun Gothic" pitchFamily="34" charset="-122"/>
                           <a:cs typeface="Malgun Gothic" pitchFamily="34" charset="-120"/>
                         </a:rPr>
-                        <a:t>2 ★B</a:t>
+                        <a:t>2 ★</a:t>
                       </a:r>
                       <a:endParaRPr lang="en-US" sz="1200" dirty="0">
                         <a:latin typeface="Malgun Gothic" charset="0"/>
@@ -12884,7 +12888,7 @@
                           <a:ea typeface="Malgun Gothic" pitchFamily="34" charset="-122"/>
                           <a:cs typeface="Malgun Gothic" pitchFamily="34" charset="-120"/>
                         </a:rPr>
-                        <a:t>추천 — 상황 묘사 · 숏폼 첫 1초</a:t>
+                        <a:t>✅ 확정 (대표 10/15) — 히어로 · 썸네일 · 숏폼</a:t>
                       </a:r>
                       <a:endParaRPr lang="en-US" sz="1200" dirty="0">
                         <a:latin typeface="Malgun Gothic" charset="0"/>
@@ -15346,7 +15350,7 @@
                 <a:ea typeface="Malgun Gothic" pitchFamily="34" charset="-122"/>
                 <a:cs typeface="Malgun Gothic" pitchFamily="34" charset="-120"/>
               </a:rPr>
-              <a:t>ICUT 01 / 14   첫 화면 — 아치 아래 빈 공간, 가득</a:t>
+              <a:t>ICUT 01 / 14   첫 화면 — 오후 4시 (확정 10/15)</a:t>
             </a:r>
             <a:endParaRPr lang="en-US" sz="1600" dirty="0"/>
           </a:p>
@@ -15881,7 +15885,7 @@
                 <a:ea typeface="Malgun Gothic" pitchFamily="34" charset="-122"/>
                 <a:cs typeface="Malgun Gothic" pitchFamily="34" charset="-120"/>
               </a:rPr>
-              <a:t>아치 아래 빈 공간,</a:t>
+              <a:t>오후 4시,</a:t>
             </a:r>
             <a:endParaRPr lang="en-US" sz="1100" dirty="0"/>
           </a:p>
@@ -15898,7 +15902,7 @@
                 <a:ea typeface="Malgun Gothic" pitchFamily="34" charset="-122"/>
                 <a:cs typeface="Malgun Gothic" pitchFamily="34" charset="-120"/>
               </a:rPr>
-              <a:t>가득 채웠습니다.</a:t>
+              <a:t>발이 먼저 퇴근하고 싶을 때.</a:t>
             </a:r>
             <a:endParaRPr lang="en-US" sz="1100" dirty="0"/>
           </a:p>
@@ -15937,7 +15941,7 @@
                 <a:ea typeface="Malgun Gothic" pitchFamily="34" charset="-122"/>
                 <a:cs typeface="Malgun Gothic" pitchFamily="34" charset="-120"/>
               </a:rPr>
-              <a:t>신던 신발은 그대로, 바닥만 새로.</a:t>
+              <a:t>신던 신발 속 바닥만 바꿔 보세요</a:t>
             </a:r>
             <a:endParaRPr lang="en-US" sz="700" dirty="0"/>
           </a:p>
@@ -16003,7 +16007,7 @@
                 <a:ea typeface="Malgun Gothic" pitchFamily="34" charset="-122"/>
                 <a:cs typeface="Malgun Gothic" pitchFamily="34" charset="-120"/>
               </a:rPr>
-              <a:t>인솔 측면 렌더</a:t>
+              <a:t>벽시계 4시 + 오후 햇빛</a:t>
             </a:r>
             <a:endParaRPr lang="en-US" sz="800" dirty="0"/>
           </a:p>
@@ -16020,7 +16024,24 @@
                 <a:ea typeface="Malgun Gothic" pitchFamily="34" charset="-122"/>
                 <a:cs typeface="Malgun Gothic" pitchFamily="34" charset="-120"/>
               </a:rPr>
-              <a:t>(아치 곡선 · 뒤꿈치 컵 보이게)</a:t>
+              <a:t>신발 뒤축을 살짝 빼는 발</a:t>
+            </a:r>
+            <a:endParaRPr lang="en-US" sz="800" dirty="0"/>
+          </a:p>
+          <a:p>
+            <a:pPr algn="ctr" indent="0" marL="0">
+              <a:buNone/>
+            </a:pPr>
+            <a:r>
+              <a:rPr lang="en-US" sz="800" dirty="0">
+                <a:solidFill>
+                  <a:srgbClr val="FFFFFF"/>
+                </a:solidFill>
+                <a:latin typeface="Malgun Gothic" pitchFamily="34" charset="0"/>
+                <a:ea typeface="Malgun Gothic" pitchFamily="34" charset="-122"/>
+                <a:cs typeface="Malgun Gothic" pitchFamily="34" charset="-120"/>
+              </a:rPr>
+              <a:t>(얼굴 없음)</a:t>
             </a:r>
             <a:endParaRPr lang="en-US" sz="800" dirty="0"/>
           </a:p>
@@ -16125,7 +16146,7 @@
                 <a:ea typeface="Malgun Gothic" pitchFamily="34" charset="-122"/>
                 <a:cs typeface="Malgun Gothic" pitchFamily="34" charset="-120"/>
               </a:rPr>
-              <a:t>인솔 단독 플로팅 렌더 · 아치 곡선 측면</a:t>
+              <a:t>오후 4시 장면 · 인솔은 ICUT 02 끝에 등장</a:t>
             </a:r>
             <a:endParaRPr lang="en-US" sz="1000" dirty="0"/>
           </a:p>
@@ -16167,7 +16188,7 @@
                 <a:ea typeface="Malgun Gothic" pitchFamily="34" charset="-122"/>
                 <a:cs typeface="Malgun Gothic" pitchFamily="34" charset="-120"/>
               </a:rPr>
-              <a:t>아치 아래 빈 공간,</a:t>
+              <a:t>오후 4시,</a:t>
             </a:r>
             <a:endParaRPr lang="en-US" sz="1600" dirty="0"/>
           </a:p>
@@ -16187,7 +16208,7 @@
                 <a:ea typeface="Malgun Gothic" pitchFamily="34" charset="-122"/>
                 <a:cs typeface="Malgun Gothic" pitchFamily="34" charset="-120"/>
               </a:rPr>
-              <a:t>가득 채웠습니다.</a:t>
+              <a:t>발이 먼저 퇴근하고 싶을 때.</a:t>
             </a:r>
             <a:endParaRPr lang="en-US" sz="1600" dirty="0"/>
           </a:p>
@@ -16227,7 +16248,7 @@
                 <a:ea typeface="Malgun Gothic" pitchFamily="34" charset="-122"/>
                 <a:cs typeface="Malgun Gothic" pitchFamily="34" charset="-120"/>
               </a:rPr>
-              <a:t>신던 신발은 그대로, 바닥만 새로.</a:t>
+              <a:t>신던 신발 속 바닥만 바꿔 보세요.</a:t>
             </a:r>
             <a:endParaRPr lang="en-US" sz="1600" dirty="0"/>
           </a:p>
@@ -16257,55 +16278,6 @@
                 <a:cs typeface="Malgun Gothic" pitchFamily="34" charset="-120"/>
               </a:rPr>
               <a:t>RS 쿼드그립 아치가득 인솔</a:t>
-            </a:r>
-            <a:endParaRPr lang="en-US" sz="1600" dirty="0"/>
-          </a:p>
-          <a:p>
-            <a:pPr algn="ctr" indent="0" marL="0">
-              <a:lnSpc>
-                <a:spcPct val="125000"/>
-              </a:lnSpc>
-              <a:buNone/>
-            </a:pPr>
-            <a:endParaRPr lang="en-US" sz="1600" dirty="0"/>
-          </a:p>
-          <a:p>
-            <a:pPr algn="ctr" indent="0" marL="0">
-              <a:lnSpc>
-                <a:spcPct val="125000"/>
-              </a:lnSpc>
-              <a:buNone/>
-            </a:pPr>
-            <a:r>
-              <a:rPr lang="en-US" sz="1400" dirty="0">
-                <a:solidFill>
-                  <a:srgbClr val="232323"/>
-                </a:solidFill>
-                <a:latin typeface="Malgun Gothic" pitchFamily="34" charset="0"/>
-                <a:ea typeface="Malgun Gothic" pitchFamily="34" charset="-122"/>
-                <a:cs typeface="Malgun Gothic" pitchFamily="34" charset="-120"/>
-              </a:rPr>
-              <a:t>[B안] 오후 4시,</a:t>
-            </a:r>
-            <a:endParaRPr lang="en-US" sz="1600" dirty="0"/>
-          </a:p>
-          <a:p>
-            <a:pPr algn="ctr" indent="0" marL="0">
-              <a:lnSpc>
-                <a:spcPct val="125000"/>
-              </a:lnSpc>
-              <a:buNone/>
-            </a:pPr>
-            <a:r>
-              <a:rPr lang="en-US" sz="1400" dirty="0">
-                <a:solidFill>
-                  <a:srgbClr val="232323"/>
-                </a:solidFill>
-                <a:latin typeface="Malgun Gothic" pitchFamily="34" charset="0"/>
-                <a:ea typeface="Malgun Gothic" pitchFamily="34" charset="-122"/>
-                <a:cs typeface="Malgun Gothic" pitchFamily="34" charset="-120"/>
-              </a:rPr>
-              <a:t>발이 먼저 퇴근하고 싶을 때.</a:t>
             </a:r>
             <a:endParaRPr lang="en-US" sz="1600" dirty="0"/>
           </a:p>
@@ -16371,7 +16343,7 @@
                 <a:ea typeface="Malgun Gothic" pitchFamily="34" charset="-122"/>
                 <a:cs typeface="Malgun Gothic" pitchFamily="34" charset="-120"/>
               </a:rPr>
-              <a:t>⚠ A/B 택1 · 평발·교정·피로감소 금칙 (content/insole-detail-plan.md)</a:t>
+              <a:t>⚠ 확정(대표 10/15) · 평발·교정·피로감소 금칙</a:t>
             </a:r>
             <a:endParaRPr lang="en-US" sz="900" dirty="0"/>
           </a:p>
@@ -16508,7 +16480,7 @@
                 <a:ea typeface="Malgun Gothic" pitchFamily="34" charset="-122"/>
                 <a:cs typeface="Malgun Gothic" pitchFamily="34" charset="-120"/>
               </a:rPr>
-              <a:t>ICUT 02 / 14   공감 — 신발은 마음에 드는데</a:t>
+              <a:t>ICUT 02 / 14   공감 — 신발이 아니라, 바닥이 납작해서</a:t>
             </a:r>
             <a:endParaRPr lang="en-US" sz="1600" dirty="0"/>
           </a:p>
@@ -17043,7 +17015,7 @@
                 <a:ea typeface="Malgun Gothic" pitchFamily="34" charset="-122"/>
                 <a:cs typeface="Malgun Gothic" pitchFamily="34" charset="-120"/>
               </a:rPr>
-              <a:t>신발은 마음에 드는데,</a:t>
+              <a:t>신발은 멀쩡한데,</a:t>
             </a:r>
             <a:endParaRPr lang="en-US" sz="900" dirty="0"/>
           </a:p>
@@ -17060,7 +17032,7 @@
                 <a:ea typeface="Malgun Gothic" pitchFamily="34" charset="-122"/>
                 <a:cs typeface="Malgun Gothic" pitchFamily="34" charset="-120"/>
               </a:rPr>
-              <a:t>바닥이 아쉬울 때</a:t>
+              <a:t>바닥이 납작해서</a:t>
             </a:r>
             <a:endParaRPr lang="en-US" sz="900" dirty="0"/>
           </a:p>
@@ -17429,7 +17401,7 @@
                 <a:ea typeface="Malgun Gothic" pitchFamily="34" charset="-122"/>
                 <a:cs typeface="Malgun Gothic" pitchFamily="34" charset="-120"/>
               </a:rPr>
-              <a:t>신발은 마음에 드는데,</a:t>
+              <a:t>신발은 멀쩡한데,</a:t>
             </a:r>
             <a:endParaRPr lang="en-US" sz="1600" dirty="0"/>
           </a:p>
@@ -17449,7 +17421,7 @@
                 <a:ea typeface="Malgun Gothic" pitchFamily="34" charset="-122"/>
                 <a:cs typeface="Malgun Gothic" pitchFamily="34" charset="-120"/>
               </a:rPr>
-              <a:t>바닥이 아쉬울 때</a:t>
+              <a:t>바닥이 납작해서</a:t>
             </a:r>
             <a:endParaRPr lang="en-US" sz="1600" dirty="0"/>
           </a:p>
@@ -17530,6 +17502,35 @@
                 <a:cs typeface="Malgun Gothic" pitchFamily="34" charset="-120"/>
               </a:rPr>
               <a:t>새로 사기엔 아까운 운동화.</a:t>
+            </a:r>
+            <a:endParaRPr lang="en-US" sz="1600" dirty="0"/>
+          </a:p>
+          <a:p>
+            <a:pPr algn="ctr" indent="0" marL="0">
+              <a:lnSpc>
+                <a:spcPct val="125000"/>
+              </a:lnSpc>
+              <a:buNone/>
+            </a:pPr>
+            <a:endParaRPr lang="en-US" sz="1600" dirty="0"/>
+          </a:p>
+          <a:p>
+            <a:pPr algn="ctr" indent="0" marL="0">
+              <a:lnSpc>
+                <a:spcPct val="125000"/>
+              </a:lnSpc>
+              <a:buNone/>
+            </a:pPr>
+            <a:r>
+              <a:rPr lang="en-US" sz="1400" dirty="0">
+                <a:solidFill>
+                  <a:srgbClr val="232323"/>
+                </a:solidFill>
+                <a:latin typeface="Malgun Gothic" pitchFamily="34" charset="0"/>
+                <a:ea typeface="Malgun Gothic" pitchFamily="34" charset="-122"/>
+                <a:cs typeface="Malgun Gothic" pitchFamily="34" charset="-120"/>
+              </a:rPr>
+              <a:t>그래서, 바닥만 새로.</a:t>
             </a:r>
             <a:endParaRPr lang="en-US" sz="1600" dirty="0"/>
           </a:p>
@@ -19756,7 +19757,7 @@
                 <a:ea typeface="Malgun Gothic" pitchFamily="34" charset="-122"/>
                 <a:cs typeface="Malgun Gothic" pitchFamily="34" charset="-120"/>
               </a:rPr>
-              <a:t>아치 라인을 따라</a:t>
+              <a:t>아치 아래 빈 공간,</a:t>
             </a:r>
             <a:endParaRPr lang="en-US" sz="1600" dirty="0"/>
           </a:p>
@@ -19776,7 +19777,7 @@
                 <a:ea typeface="Malgun Gothic" pitchFamily="34" charset="-122"/>
                 <a:cs typeface="Malgun Gothic" pitchFamily="34" charset="-120"/>
               </a:rPr>
-              <a:t>가득</a:t>
+              <a:t>가득 채웠습니다.</a:t>
             </a:r>
             <a:endParaRPr lang="en-US" sz="1600" dirty="0"/>
           </a:p>

--- a/launch/rs/design/detail-handoff/rs-insole-detail-v1.pptx
+++ b/launch/rs/design/detail-handoff/rs-insole-detail-v1.pptx
@@ -22,9 +22,10 @@
     <p:sldId id="270" r:id="rId16"/>
     <p:sldId id="271" r:id="rId17"/>
     <p:sldId id="272" r:id="rId18"/>
+    <p:sldId id="273" r:id="rId19"/>
   </p:sldIdLst>
   <p:notesMasterIdLst>
-    <p:notesMasterId r:id="rId19"/>
+    <p:notesMasterId r:id="rId20"/>
   </p:notesMasterIdLst>
   <p:sldSz cx="12192000" cy="6858000"/>
   <p:notesSz cx="6858000" cy="12192000"/>
@@ -123,12 +124,12 @@
   <p:extLst>
     <p:ext uri="{521415D9-36F7-43E2-AB2F-B90AF26B5E84}">
       <p14:sectionLst xmlns:p14="http://schemas.microsoft.com/office/powerpoint/2010/main">
-        <p14:section name="개요" id="{5d2aa1da-65b3-963f-3c5d-caf5a477051a}">
+        <p14:section name="개요" id="{1ccef353-70d2-c7b2-39c1-54bf92202857}">
           <p14:sldIdLst>
             <p14:sldId id="256"/>
           </p14:sldIdLst>
         </p14:section>
-        <p14:section name="인솔" id="{6035f57d-2b50-e289-d47e-99f3b44bbec8}">
+        <p14:section name="인솔" id="{9c03f4ee-15a4-561a-2603-067a642f2728}">
           <p14:sldIdLst>
             <p14:sldId id="257"/>
             <p14:sldId id="258"/>
@@ -146,6 +147,7 @@
             <p14:sldId id="270"/>
             <p14:sldId id="271"/>
             <p14:sldId id="272"/>
+            <p14:sldId id="273"/>
           </p14:sldIdLst>
         </p14:section>
       </p14:sectionLst>
@@ -728,7 +730,9 @@
           <a:p>
             <a:r>
               <a:rPr lang="en-US" dirty="0"/>
-              <a:t/>
+              <a:t>대표 10/15: 아치가득 = 반굽(뒤꿈치~아치) 인솔. 기존 인솔 밑에 깔면 신발 재질에 따라 신을 때 흘러내려가는 현상을 막을 수 있다.
+표현: '흘러내림을 잡아 준다'는 착용감·핏 설명(의학 효능 아님) — 단 '100% 방지·완벽 고정' 같은 단정 금지, 하단 고지 필수.
+촬영: 슬립온·로퍼 1켤레로 BEFORE(뒤꿈치 들림)/AFTER 비교 GIF 3초 — 같은 신발·같은 발·같은 각도. 연출 과장 금지.</a:t>
             </a:r>
             <a:endParaRPr lang="en-US" dirty="0"/>
           </a:p>
@@ -816,7 +820,7 @@
           <a:p>
             <a:r>
               <a:rPr lang="en-US" dirty="0"/>
-              <a:t>expert/doctor-collab-plan.md §2-#2. 와디즈 스토리에도 같은 블록.</a:t>
+              <a:t>우드칩 배합 확인(대표 10/15). 재질 표기: 합성수지(E-실리폴리렌), 목분(우드칩).</a:t>
             </a:r>
             <a:endParaRPr lang="en-US" dirty="0"/>
           </a:p>
@@ -904,7 +908,9 @@
           <a:p>
             <a:r>
               <a:rPr lang="en-US" dirty="0"/>
-              <a:t/>
+              <a:t>대표 10/15: 원장 인솔 기능 관련 자문 추가, 첫 화면 노출 가능.
+자문 범위는 '형태·착용 방식'으로 한정 — 원장이 '피로가 줄어든다/평발에 좋다'고 말하는 구조는 의료기기 오인 + 계약 제6조 위반.
+인용문은 초안 — 원장 확정본으로 교체(임의 편집·발췌 금지). expert/doctor-collab-plan.md §2-#2.</a:t>
             </a:r>
             <a:endParaRPr lang="en-US" dirty="0"/>
           </a:p>
@@ -992,7 +998,7 @@
           <a:p>
             <a:r>
               <a:rPr lang="en-US" dirty="0"/>
-              <a:t/>
+              <a:t>반굽이라 재단 불필요(대표 확인 필요). 고시 취급주의의 '재단' 문구 삭제.</a:t>
             </a:r>
             <a:endParaRPr lang="en-US" dirty="0"/>
           </a:p>
@@ -1080,7 +1086,7 @@
           <a:p>
             <a:r>
               <a:rPr lang="en-US" dirty="0"/>
-              <a:t/>
+              <a:t>대표 10/15: M 15cm / L 17cm, 실제 사출 시 5% 편차. 상품정보고시 치수와 동일 표기.</a:t>
             </a:r>
             <a:endParaRPr lang="en-US" dirty="0"/>
           </a:p>
@@ -1298,6 +1304,94 @@
 </p:notes>
 </file>
 
+<file path=ppt/notesSlides/notesSlide18.xml><?xml version="1.0" encoding="utf-8"?>
+<p:notes xmlns:a="http://schemas.openxmlformats.org/drawingml/2006/main" xmlns:r="http://schemas.openxmlformats.org/officeDocument/2006/relationships" xmlns:p="http://schemas.openxmlformats.org/presentationml/2006/main">
+  <p:cSld>
+    <p:spTree>
+      <p:nvGrpSpPr>
+        <p:cNvPr id="1" name=""/>
+        <p:cNvGrpSpPr/>
+        <p:nvPr/>
+      </p:nvGrpSpPr>
+      <p:grpSpPr>
+        <a:xfrm>
+          <a:off x="0" y="0"/>
+          <a:ext cx="0" cy="0"/>
+          <a:chOff x="0" y="0"/>
+          <a:chExt cx="0" cy="0"/>
+        </a:xfrm>
+      </p:grpSpPr>
+      <p:sp>
+        <p:nvSpPr>
+          <p:cNvPr id="2" name="Slide Image Placeholder 1"/>
+          <p:cNvSpPr>
+            <a:spLocks noGrp="1" noRot="1" noChangeAspect="1"/>
+          </p:cNvSpPr>
+          <p:nvPr>
+            <p:ph type="sldImg"/>
+          </p:nvPr>
+        </p:nvSpPr>
+        <p:spPr/>
+      </p:sp>
+      <p:sp>
+        <p:nvSpPr>
+          <p:cNvPr id="3" name="Notes Placeholder 2"/>
+          <p:cNvSpPr>
+            <a:spLocks noGrp="1"/>
+          </p:cNvSpPr>
+          <p:nvPr>
+            <p:ph type="body" idx="1"/>
+          </p:nvPr>
+        </p:nvSpPr>
+        <p:spPr/>
+        <p:txBody>
+          <a:bodyPr/>
+          <a:lstStyle/>
+          <a:p>
+            <a:r>
+              <a:rPr lang="en-US" dirty="0"/>
+              <a:t/>
+            </a:r>
+            <a:endParaRPr lang="en-US" dirty="0"/>
+          </a:p>
+        </p:txBody>
+      </p:sp>
+      <p:sp>
+        <p:nvSpPr>
+          <p:cNvPr id="4" name="Slide Number Placeholder 3"/>
+          <p:cNvSpPr>
+            <a:spLocks noGrp="1"/>
+          </p:cNvSpPr>
+          <p:nvPr>
+            <p:ph type="sldNum" sz="quarter" idx="10"/>
+          </p:nvPr>
+        </p:nvSpPr>
+        <p:spPr/>
+        <p:txBody>
+          <a:bodyPr/>
+          <a:lstStyle/>
+          <a:p>
+            <a:fld id="{F7021451-1387-4CA6-816F-3879F97B5CBC}" type="slidenum">
+              <a:rPr lang="en-US"/>
+              <a:t>18</a:t>
+            </a:fld>
+            <a:endParaRPr lang="en-US"/>
+          </a:p>
+        </p:txBody>
+      </p:sp>
+    </p:spTree>
+    <p:extLst>
+      <p:ext uri="{BB962C8B-B14F-4D97-AF65-F5344CB8AC3E}">
+        <p14:creationId xmlns:p14="http://schemas.microsoft.com/office/powerpoint/2010/main" val="1024086991"/>
+      </p:ext>
+    </p:extLst>
+  </p:cSld>
+  <p:clrMapOvr>
+    <a:masterClrMapping/>
+  </p:clrMapOvr>
+</p:notes>
+</file>
+
 <file path=ppt/notesSlides/notesSlide2.xml><?xml version="1.0" encoding="utf-8"?>
 <p:notes xmlns:a="http://schemas.openxmlformats.org/drawingml/2006/main" xmlns:r="http://schemas.openxmlformats.org/officeDocument/2006/relationships" xmlns:p="http://schemas.openxmlformats.org/presentationml/2006/main">
   <p:cSld>
@@ -1521,9 +1615,9 @@
             <a:r>
               <a:rPr lang="en-US" dirty="0"/>
               <a:t>확정 후킹(대표 10/15): '오후 4시, 발이 먼저 퇴근하고 싶을 때.' — 효능 대신 상황 묘사.
+전문의 배지: 대표 10/15 첫 화면 노출 OK → 원장 서면 승인(계약 제7조) 후 게시. 배지 문구는 '설계 자문'으로 고정, '추천·인정·보증' 금지.
 비주얼: 오후 햇빛 + 벽시계 4시 + 신발 뒤축을 살짝 빼는 발(얼굴 없음). 인솔은 ICUT 02 끝에서 처음 등장.
 숏폼 비트컷: 0.0s 시계 4시 → 0.5s 신발 뒤축 빼는 발 → 1.0s 신발 속 납작한 깔창 → 1.5s 아치가득 인솔 꺼내기.
-'피로·통증·지친 발 회복' 등 효능 단어 추가 금지.
 인솔은 '다른 신발용' — 워킹화와 묶는 표현 금지.</a:t>
             </a:r>
             <a:endParaRPr lang="en-US" dirty="0"/>
@@ -1612,7 +1706,7 @@
           <a:p>
             <a:r>
               <a:rPr lang="en-US" dirty="0"/>
-              <a:t>'발 아픔·통증·평발' 등 의학 단어 금지. 상황 묘사만.</a:t>
+              <a:t>'발 아픔·통증·평발' 등 의학 단어 금지. 상황 묘사만. '헐거운 신발'은 ICUT 08(반굽·흘러내림)로 이어지는 복선.</a:t>
             </a:r>
             <a:endParaRPr lang="en-US" dirty="0"/>
           </a:p>
@@ -1876,7 +1970,7 @@
           <a:p>
             <a:r>
               <a:rPr lang="en-US" dirty="0"/>
-              <a:t>인솔 4점이 별도 패드인지, 형상(돌기)인지 확인 필요(상품정보고시 🔴 패드 재질). 미끄럼·고정력 효능 표현 금지.</a:t>
+              <a:t>반굽(15/17cm) 인솔에서 4점이 어디에 있는지 실물 사진으로 확인. 미끄럼·고정력 효능 표현 금지.</a:t>
             </a:r>
             <a:endParaRPr lang="en-US" dirty="0"/>
           </a:p>
@@ -2534,7 +2628,7 @@
                 <a:ea typeface="Malgun Gothic" pitchFamily="34" charset="-122"/>
                 <a:cs typeface="Malgun Gothic" pitchFamily="34" charset="-120"/>
               </a:rPr>
-              <a:t>21,500원 · M(신발 220~255) / L(260~280) · 그레이 / 모카무스 · 국내 생산</a:t>
+              <a:t>21,500원 · 반굽 M 15cm(신발 220~255) / L 17cm(260~280) · 그레이 / 모카무스 · 국내 생산</a:t>
             </a:r>
             <a:endParaRPr lang="en-US" sz="1200" dirty="0"/>
           </a:p>
@@ -2554,7 +2648,7 @@
                 <a:ea typeface="Malgun Gothic" pitchFamily="34" charset="-122"/>
                 <a:cs typeface="Malgun Gothic" pitchFamily="34" charset="-120"/>
               </a:rPr>
-              <a:t>14 CUT · 860px 세로형 · 스마트스토어 상세 = 와디즈 스토리 소스</a:t>
+              <a:t>15 CUT · 860px 세로형 · 스마트스토어 상세 = 와디즈 스토리 소스</a:t>
             </a:r>
             <a:endParaRPr lang="en-US" sz="1200" dirty="0"/>
           </a:p>
@@ -2711,7 +2805,7 @@
                 <a:ea typeface="Malgun Gothic" pitchFamily="34" charset="-122"/>
                 <a:cs typeface="Malgun Gothic" pitchFamily="34" charset="-120"/>
               </a:rPr>
-              <a:t>ICUT 07 / 14   POINT 04 · 통기 도트</a:t>
+              <a:t>ICUT 07 / 15   POINT 04 · 통기 도트</a:t>
             </a:r>
             <a:endParaRPr lang="en-US" sz="1600" dirty="0"/>
           </a:p>
@@ -3657,11 +3751,11 @@
             </a:avLst>
           </a:prstGeom>
           <a:solidFill>
-            <a:srgbClr val="7E9C7E"/>
+            <a:srgbClr val="3D4A12"/>
           </a:solidFill>
           <a:ln w="12700">
             <a:solidFill>
-              <a:srgbClr val="7E9C7E"/>
+              <a:srgbClr val="3D4A12"/>
             </a:solidFill>
             <a:prstDash val="solid"/>
           </a:ln>
@@ -3700,7 +3794,7 @@
                 <a:ea typeface="Malgun Gothic" pitchFamily="34" charset="-122"/>
                 <a:cs typeface="Malgun Gothic" pitchFamily="34" charset="-120"/>
               </a:rPr>
-              <a:t>신뢰</a:t>
+              <a:t>편안</a:t>
             </a:r>
             <a:endParaRPr lang="en-US" sz="1000" dirty="0"/>
           </a:p>
@@ -3739,7 +3833,7 @@
                 <a:ea typeface="Malgun Gothic" pitchFamily="34" charset="-122"/>
                 <a:cs typeface="Malgun Gothic" pitchFamily="34" charset="-120"/>
               </a:rPr>
-              <a:t>ICUT 08 / 14   소재 — 목공소에서 온 우드칩</a:t>
+              <a:t>ICUT 08 / 15   POINT 05 · 반굽 — 쓰던 깔창 밑에 한 장 더 (신규)</a:t>
             </a:r>
             <a:endParaRPr lang="en-US" sz="1600" dirty="0"/>
           </a:p>
@@ -4114,7 +4208,7 @@
                 <a:ea typeface="Malgun Gothic" pitchFamily="34" charset="-122"/>
                 <a:cs typeface="Malgun Gothic" pitchFamily="34" charset="-120"/>
               </a:rPr>
-              <a:t>스레드 팩</a:t>
+              <a:t>대표 코멘트</a:t>
             </a:r>
             <a:pPr indent="0" marL="0">
               <a:spcAft>
@@ -4131,7 +4225,7 @@
                 <a:ea typeface="Malgun Gothic" pitchFamily="34" charset="-122"/>
                 <a:cs typeface="Malgun Gothic" pitchFamily="34" charset="-120"/>
               </a:rPr>
-              <a:t>  새활용 서사</a:t>
+              <a:t>  반굽 길이</a:t>
             </a:r>
             <a:endParaRPr lang="en-US" sz="1100" dirty="0"/>
           </a:p>
@@ -4151,7 +4245,7 @@
                 <a:ea typeface="Malgun Gothic" pitchFamily="34" charset="-122"/>
                 <a:cs typeface="Malgun Gothic" pitchFamily="34" charset="-120"/>
               </a:rPr>
-              <a:t>버려지던 자투리 → 소재</a:t>
+              <a:t>기존 인솔 밑에 깔면 신발 재질에 따라 신을 때 흘러내리는 현상을 막는다</a:t>
             </a:r>
             <a:endParaRPr lang="en-US" sz="1100" dirty="0"/>
           </a:p>
@@ -4171,7 +4265,7 @@
                 <a:ea typeface="Malgun Gothic" pitchFamily="34" charset="-122"/>
                 <a:cs typeface="Malgun Gothic" pitchFamily="34" charset="-120"/>
               </a:rPr>
-              <a:t>→ 3단 그래픽</a:t>
+              <a:t>→ 겹침 단면도 + 전/후 GIF</a:t>
             </a:r>
             <a:endParaRPr lang="en-US" sz="1100" dirty="0"/>
           </a:p>
@@ -4210,7 +4304,7 @@
                 <a:ea typeface="Malgun Gothic" pitchFamily="34" charset="-122"/>
                 <a:cs typeface="Malgun Gothic" pitchFamily="34" charset="-120"/>
               </a:rPr>
-              <a:t>REF · 워킹화 CUT 18 From Road to Floor와 짝</a:t>
+              <a:t>REF · 대표 10/15 — 반굽 인솔 겹쳐 쓰기</a:t>
             </a:r>
             <a:endParaRPr lang="en-US" sz="1000" dirty="0"/>
           </a:p>
@@ -4243,14 +4337,41 @@
       </p:sp>
       <p:sp>
         <p:nvSpPr>
-          <p:cNvPr id="19" name="Text 17"/>
+          <p:cNvPr id="19" name="Shape 17"/>
+          <p:cNvSpPr/>
+          <p:nvPr/>
+        </p:nvSpPr>
+        <p:spPr>
+          <a:xfrm>
+            <a:off x="5458968" y="2075688"/>
+            <a:ext cx="731520" cy="182880"/>
+          </a:xfrm>
+          <a:prstGeom prst="roundRect">
+            <a:avLst>
+              <a:gd name="adj" fmla="val 15000"/>
+            </a:avLst>
+          </a:prstGeom>
+          <a:solidFill>
+            <a:srgbClr val="3D4A12"/>
+          </a:solidFill>
+          <a:ln w="12700">
+            <a:solidFill>
+              <a:srgbClr val="3D4A12"/>
+            </a:solidFill>
+            <a:prstDash val="solid"/>
+          </a:ln>
+        </p:spPr>
+      </p:sp>
+      <p:sp>
+        <p:nvSpPr>
+          <p:cNvPr id="20" name="Text 18"/>
           <p:cNvSpPr txBox="1"/>
           <p:nvPr/>
         </p:nvSpPr>
         <p:spPr>
           <a:xfrm>
-            <a:off x="4636008" y="2103120"/>
-            <a:ext cx="2377440" cy="320040"/>
+            <a:off x="5458968" y="2075688"/>
+            <a:ext cx="731520" cy="182880"/>
           </a:xfrm>
           <a:prstGeom prst="rect">
             <a:avLst/>
@@ -4266,6 +4387,45 @@
               <a:buNone/>
             </a:pPr>
             <a:r>
+              <a:rPr lang="en-US" sz="800" b="1" dirty="0">
+                <a:solidFill>
+                  <a:srgbClr val="FFFFFF"/>
+                </a:solidFill>
+                <a:latin typeface="Malgun Gothic" pitchFamily="34" charset="0"/>
+                <a:ea typeface="Malgun Gothic" pitchFamily="34" charset="-122"/>
+                <a:cs typeface="Malgun Gothic" pitchFamily="34" charset="-120"/>
+              </a:rPr>
+              <a:t>POINT 05</a:t>
+            </a:r>
+            <a:endParaRPr lang="en-US" sz="800" dirty="0"/>
+          </a:p>
+        </p:txBody>
+      </p:sp>
+      <p:sp>
+        <p:nvSpPr>
+          <p:cNvPr id="21" name="Text 19"/>
+          <p:cNvSpPr txBox="1"/>
+          <p:nvPr/>
+        </p:nvSpPr>
+        <p:spPr>
+          <a:xfrm>
+            <a:off x="4636008" y="2331720"/>
+            <a:ext cx="2377440" cy="411480"/>
+          </a:xfrm>
+          <a:prstGeom prst="rect">
+            <a:avLst/>
+          </a:prstGeom>
+          <a:noFill/>
+          <a:ln/>
+        </p:spPr>
+        <p:txBody>
+          <a:bodyPr wrap="square" lIns="0" tIns="0" rIns="0" bIns="0" rtlCol="0" anchor="ctr"/>
+          <a:lstStyle/>
+          <a:p>
+            <a:pPr algn="ctr" indent="0" marL="0">
+              <a:buNone/>
+            </a:pPr>
+            <a:r>
               <a:rPr lang="en-US" sz="900" b="1" dirty="0">
                 <a:solidFill>
                   <a:srgbClr val="232323"/>
@@ -4274,25 +4434,176 @@
                 <a:ea typeface="Malgun Gothic" pitchFamily="34" charset="-122"/>
                 <a:cs typeface="Malgun Gothic" pitchFamily="34" charset="-120"/>
               </a:rPr>
-              <a:t>목공소에서 온 우드칩</a:t>
+              <a:t>쓰던 깔창 밑에</a:t>
             </a:r>
             <a:endParaRPr lang="en-US" sz="900" dirty="0"/>
           </a:p>
-        </p:txBody>
-      </p:sp>
-      <p:sp>
-        <p:nvSpPr>
-          <p:cNvPr id="20" name="Shape 18"/>
+          <a:p>
+            <a:pPr algn="ctr" indent="0" marL="0">
+              <a:buNone/>
+            </a:pPr>
+            <a:r>
+              <a:rPr lang="en-US" sz="900" b="1" dirty="0">
+                <a:solidFill>
+                  <a:srgbClr val="232323"/>
+                </a:solidFill>
+                <a:latin typeface="Malgun Gothic" pitchFamily="34" charset="0"/>
+                <a:ea typeface="Malgun Gothic" pitchFamily="34" charset="-122"/>
+                <a:cs typeface="Malgun Gothic" pitchFamily="34" charset="-120"/>
+              </a:rPr>
+              <a:t>한 장 더</a:t>
+            </a:r>
+            <a:endParaRPr lang="en-US" sz="900" dirty="0"/>
+          </a:p>
+        </p:txBody>
+      </p:sp>
+      <p:sp>
+        <p:nvSpPr>
+          <p:cNvPr id="22" name="Shape 20"/>
           <p:cNvSpPr/>
           <p:nvPr/>
         </p:nvSpPr>
         <p:spPr>
           <a:xfrm>
-            <a:off x="4727448" y="2697480"/>
-            <a:ext cx="594360" cy="594360"/>
-          </a:xfrm>
-          <a:prstGeom prst="ellipse">
-            <a:avLst/>
+            <a:off x="4773168" y="2834640"/>
+            <a:ext cx="2103120" cy="274320"/>
+          </a:xfrm>
+          <a:prstGeom prst="roundRect">
+            <a:avLst>
+              <a:gd name="adj" fmla="val 10000"/>
+            </a:avLst>
+          </a:prstGeom>
+          <a:solidFill>
+            <a:srgbClr val="FFFFFF"/>
+          </a:solidFill>
+          <a:ln w="9525">
+            <a:solidFill>
+              <a:srgbClr val="D9D6CF"/>
+            </a:solidFill>
+            <a:prstDash val="solid"/>
+          </a:ln>
+        </p:spPr>
+      </p:sp>
+      <p:sp>
+        <p:nvSpPr>
+          <p:cNvPr id="23" name="Text 21"/>
+          <p:cNvSpPr txBox="1"/>
+          <p:nvPr/>
+        </p:nvSpPr>
+        <p:spPr>
+          <a:xfrm>
+            <a:off x="4809744" y="2834640"/>
+            <a:ext cx="2029968" cy="274320"/>
+          </a:xfrm>
+          <a:prstGeom prst="rect">
+            <a:avLst/>
+          </a:prstGeom>
+          <a:noFill/>
+          <a:ln/>
+        </p:spPr>
+        <p:txBody>
+          <a:bodyPr wrap="square" lIns="0" tIns="0" rIns="0" bIns="0" rtlCol="0" anchor="ctr"/>
+          <a:lstStyle/>
+          <a:p>
+            <a:pPr algn="ctr" indent="0" marL="0">
+              <a:buNone/>
+            </a:pPr>
+            <a:r>
+              <a:rPr lang="en-US" sz="700" dirty="0">
+                <a:solidFill>
+                  <a:srgbClr val="232323"/>
+                </a:solidFill>
+                <a:latin typeface="Malgun Gothic" pitchFamily="34" charset="0"/>
+                <a:ea typeface="Malgun Gothic" pitchFamily="34" charset="-122"/>
+                <a:cs typeface="Malgun Gothic" pitchFamily="34" charset="-120"/>
+              </a:rPr>
+              <a:t>① 쓰던 깔창 (위)</a:t>
+            </a:r>
+            <a:endParaRPr lang="en-US" sz="700" dirty="0"/>
+          </a:p>
+        </p:txBody>
+      </p:sp>
+      <p:sp>
+        <p:nvSpPr>
+          <p:cNvPr id="24" name="Shape 22"/>
+          <p:cNvSpPr/>
+          <p:nvPr/>
+        </p:nvSpPr>
+        <p:spPr>
+          <a:xfrm>
+            <a:off x="4773168" y="3136392"/>
+            <a:ext cx="1188720" cy="274320"/>
+          </a:xfrm>
+          <a:prstGeom prst="roundRect">
+            <a:avLst>
+              <a:gd name="adj" fmla="val 10000"/>
+            </a:avLst>
+          </a:prstGeom>
+          <a:solidFill>
+            <a:srgbClr val="C6F432"/>
+          </a:solidFill>
+          <a:ln w="12700">
+            <a:solidFill>
+              <a:srgbClr val="C6F432"/>
+            </a:solidFill>
+            <a:prstDash val="solid"/>
+          </a:ln>
+        </p:spPr>
+      </p:sp>
+      <p:sp>
+        <p:nvSpPr>
+          <p:cNvPr id="25" name="Text 23"/>
+          <p:cNvSpPr txBox="1"/>
+          <p:nvPr/>
+        </p:nvSpPr>
+        <p:spPr>
+          <a:xfrm>
+            <a:off x="4809744" y="3136392"/>
+            <a:ext cx="1115568" cy="274320"/>
+          </a:xfrm>
+          <a:prstGeom prst="rect">
+            <a:avLst/>
+          </a:prstGeom>
+          <a:noFill/>
+          <a:ln/>
+        </p:spPr>
+        <p:txBody>
+          <a:bodyPr wrap="square" lIns="0" tIns="0" rIns="0" bIns="0" rtlCol="0" anchor="ctr"/>
+          <a:lstStyle/>
+          <a:p>
+            <a:pPr algn="ctr" indent="0" marL="0">
+              <a:buNone/>
+            </a:pPr>
+            <a:r>
+              <a:rPr lang="en-US" sz="600" b="1" dirty="0">
+                <a:solidFill>
+                  <a:srgbClr val="232323"/>
+                </a:solidFill>
+                <a:latin typeface="Malgun Gothic" pitchFamily="34" charset="0"/>
+                <a:ea typeface="Malgun Gothic" pitchFamily="34" charset="-122"/>
+                <a:cs typeface="Malgun Gothic" pitchFamily="34" charset="-120"/>
+              </a:rPr>
+              <a:t>② 아치가득 반굽 (아래)</a:t>
+            </a:r>
+            <a:endParaRPr lang="en-US" sz="600" dirty="0"/>
+          </a:p>
+        </p:txBody>
+      </p:sp>
+      <p:sp>
+        <p:nvSpPr>
+          <p:cNvPr id="26" name="Shape 24"/>
+          <p:cNvSpPr/>
+          <p:nvPr/>
+        </p:nvSpPr>
+        <p:spPr>
+          <a:xfrm>
+            <a:off x="4773168" y="3438144"/>
+            <a:ext cx="2103120" cy="228600"/>
+          </a:xfrm>
+          <a:prstGeom prst="roundRect">
+            <a:avLst>
+              <a:gd name="adj" fmla="val 12000"/>
+            </a:avLst>
           </a:prstGeom>
           <a:solidFill>
             <a:srgbClr val="D8D2C6"/>
@@ -4307,14 +4618,14 @@
       </p:sp>
       <p:sp>
         <p:nvSpPr>
-          <p:cNvPr id="21" name="Text 19"/>
+          <p:cNvPr id="27" name="Text 25"/>
           <p:cNvSpPr txBox="1"/>
           <p:nvPr/>
         </p:nvSpPr>
         <p:spPr>
           <a:xfrm>
-            <a:off x="4727448" y="2697480"/>
-            <a:ext cx="594360" cy="594360"/>
+            <a:off x="4809744" y="3438144"/>
+            <a:ext cx="2029968" cy="228600"/>
           </a:xfrm>
           <a:prstGeom prst="rect">
             <a:avLst/>
@@ -4330,57 +4641,42 @@
               <a:buNone/>
             </a:pPr>
             <a:r>
-              <a:rPr lang="en-US" sz="700" b="1" dirty="0">
-                <a:solidFill>
-                  <a:srgbClr val="232323"/>
-                </a:solidFill>
-                <a:latin typeface="Malgun Gothic" pitchFamily="34" charset="0"/>
-                <a:ea typeface="Malgun Gothic" pitchFamily="34" charset="-122"/>
-                <a:cs typeface="Malgun Gothic" pitchFamily="34" charset="-120"/>
-              </a:rPr>
-              <a:t>목공</a:t>
+              <a:rPr lang="en-US" sz="700" dirty="0">
+                <a:solidFill>
+                  <a:srgbClr val="232323"/>
+                </a:solidFill>
+                <a:latin typeface="Malgun Gothic" pitchFamily="34" charset="0"/>
+                <a:ea typeface="Malgun Gothic" pitchFamily="34" charset="-122"/>
+                <a:cs typeface="Malgun Gothic" pitchFamily="34" charset="-120"/>
+              </a:rPr>
+              <a:t>신발 바닥</a:t>
             </a:r>
             <a:endParaRPr lang="en-US" sz="700" dirty="0"/>
           </a:p>
-          <a:p>
-            <a:pPr algn="ctr" indent="0" marL="0">
-              <a:buNone/>
-            </a:pPr>
-            <a:r>
-              <a:rPr lang="en-US" sz="700" b="1" dirty="0">
-                <a:solidFill>
-                  <a:srgbClr val="232323"/>
-                </a:solidFill>
-                <a:latin typeface="Malgun Gothic" pitchFamily="34" charset="0"/>
-                <a:ea typeface="Malgun Gothic" pitchFamily="34" charset="-122"/>
-                <a:cs typeface="Malgun Gothic" pitchFamily="34" charset="-120"/>
-              </a:rPr>
-              <a:t>자투리</a:t>
-            </a:r>
-            <a:endParaRPr lang="en-US" sz="700" dirty="0"/>
-          </a:p>
-        </p:txBody>
-      </p:sp>
-      <p:sp>
-        <p:nvSpPr>
-          <p:cNvPr id="22" name="Shape 20"/>
+        </p:txBody>
+      </p:sp>
+      <p:sp>
+        <p:nvSpPr>
+          <p:cNvPr id="28" name="Shape 26"/>
           <p:cNvSpPr/>
           <p:nvPr/>
         </p:nvSpPr>
         <p:spPr>
           <a:xfrm>
-            <a:off x="5532120" y="2697480"/>
-            <a:ext cx="594360" cy="594360"/>
-          </a:xfrm>
-          <a:prstGeom prst="ellipse">
-            <a:avLst/>
+            <a:off x="4681728" y="3840480"/>
+            <a:ext cx="1097280" cy="914400"/>
+          </a:xfrm>
+          <a:prstGeom prst="roundRect">
+            <a:avLst>
+              <a:gd name="adj" fmla="val 3000"/>
+            </a:avLst>
           </a:prstGeom>
           <a:solidFill>
-            <a:srgbClr val="D8D2C6"/>
+            <a:srgbClr val="3A3A3A"/>
           </a:solidFill>
           <a:ln w="12700">
             <a:solidFill>
-              <a:srgbClr val="D8D2C6"/>
+              <a:srgbClr val="3A3A3A"/>
             </a:solidFill>
             <a:prstDash val="solid"/>
           </a:ln>
@@ -4388,14 +4684,14 @@
       </p:sp>
       <p:sp>
         <p:nvSpPr>
-          <p:cNvPr id="23" name="Text 21"/>
+          <p:cNvPr id="29" name="Text 27"/>
           <p:cNvSpPr txBox="1"/>
           <p:nvPr/>
         </p:nvSpPr>
         <p:spPr>
           <a:xfrm>
-            <a:off x="5532120" y="2697480"/>
-            <a:ext cx="594360" cy="594360"/>
+            <a:off x="4718304" y="3840480"/>
+            <a:ext cx="1024128" cy="914400"/>
           </a:xfrm>
           <a:prstGeom prst="rect">
             <a:avLst/>
@@ -4411,40 +4707,76 @@
               <a:buNone/>
             </a:pPr>
             <a:r>
-              <a:rPr lang="en-US" sz="700" b="1" dirty="0">
-                <a:solidFill>
-                  <a:srgbClr val="232323"/>
-                </a:solidFill>
-                <a:latin typeface="Malgun Gothic" pitchFamily="34" charset="0"/>
-                <a:ea typeface="Malgun Gothic" pitchFamily="34" charset="-122"/>
-                <a:cs typeface="Malgun Gothic" pitchFamily="34" charset="-120"/>
-              </a:rPr>
-              <a:t>우드칩</a:t>
+              <a:rPr lang="en-US" sz="700" dirty="0">
+                <a:solidFill>
+                  <a:srgbClr val="FFFFFF"/>
+                </a:solidFill>
+                <a:latin typeface="Malgun Gothic" pitchFamily="34" charset="0"/>
+                <a:ea typeface="Malgun Gothic" pitchFamily="34" charset="-122"/>
+                <a:cs typeface="Malgun Gothic" pitchFamily="34" charset="-120"/>
+              </a:rPr>
+              <a:t>BEFORE</a:t>
             </a:r>
             <a:endParaRPr lang="en-US" sz="700" dirty="0"/>
           </a:p>
-        </p:txBody>
-      </p:sp>
-      <p:sp>
-        <p:nvSpPr>
-          <p:cNvPr id="24" name="Shape 22"/>
+          <a:p>
+            <a:pPr algn="ctr" indent="0" marL="0">
+              <a:buNone/>
+            </a:pPr>
+            <a:r>
+              <a:rPr lang="en-US" sz="700" dirty="0">
+                <a:solidFill>
+                  <a:srgbClr val="FFFFFF"/>
+                </a:solidFill>
+                <a:latin typeface="Malgun Gothic" pitchFamily="34" charset="0"/>
+                <a:ea typeface="Malgun Gothic" pitchFamily="34" charset="-122"/>
+                <a:cs typeface="Malgun Gothic" pitchFamily="34" charset="-120"/>
+              </a:rPr>
+              <a:t>뒤꿈치가</a:t>
+            </a:r>
+            <a:endParaRPr lang="en-US" sz="700" dirty="0"/>
+          </a:p>
+          <a:p>
+            <a:pPr algn="ctr" indent="0" marL="0">
+              <a:buNone/>
+            </a:pPr>
+            <a:r>
+              <a:rPr lang="en-US" sz="700" dirty="0">
+                <a:solidFill>
+                  <a:srgbClr val="FFFFFF"/>
+                </a:solidFill>
+                <a:latin typeface="Malgun Gothic" pitchFamily="34" charset="0"/>
+                <a:ea typeface="Malgun Gothic" pitchFamily="34" charset="-122"/>
+                <a:cs typeface="Malgun Gothic" pitchFamily="34" charset="-120"/>
+              </a:rPr>
+              <a:t>헐겁게 빠짐</a:t>
+            </a:r>
+            <a:endParaRPr lang="en-US" sz="700" dirty="0"/>
+          </a:p>
+        </p:txBody>
+      </p:sp>
+      <p:sp>
+        <p:nvSpPr>
+          <p:cNvPr id="30" name="Shape 28"/>
           <p:cNvSpPr/>
           <p:nvPr/>
         </p:nvSpPr>
         <p:spPr>
           <a:xfrm>
-            <a:off x="6327648" y="2697480"/>
-            <a:ext cx="594360" cy="594360"/>
-          </a:xfrm>
-          <a:prstGeom prst="ellipse">
-            <a:avLst/>
+            <a:off x="5870448" y="3840480"/>
+            <a:ext cx="1097280" cy="914400"/>
+          </a:xfrm>
+          <a:prstGeom prst="roundRect">
+            <a:avLst>
+              <a:gd name="adj" fmla="val 3000"/>
+            </a:avLst>
           </a:prstGeom>
           <a:solidFill>
-            <a:srgbClr val="C6F432"/>
+            <a:srgbClr val="3D4A12"/>
           </a:solidFill>
           <a:ln w="12700">
             <a:solidFill>
-              <a:srgbClr val="C6F432"/>
+              <a:srgbClr val="3D4A12"/>
             </a:solidFill>
             <a:prstDash val="solid"/>
           </a:ln>
@@ -4452,14 +4784,14 @@
       </p:sp>
       <p:sp>
         <p:nvSpPr>
-          <p:cNvPr id="25" name="Text 23"/>
+          <p:cNvPr id="31" name="Text 29"/>
           <p:cNvSpPr txBox="1"/>
           <p:nvPr/>
         </p:nvSpPr>
         <p:spPr>
           <a:xfrm>
-            <a:off x="6327648" y="2697480"/>
-            <a:ext cx="594360" cy="594360"/>
+            <a:off x="5907024" y="3840480"/>
+            <a:ext cx="1024128" cy="914400"/>
           </a:xfrm>
           <a:prstGeom prst="rect">
             <a:avLst/>
@@ -4475,30 +4807,64 @@
               <a:buNone/>
             </a:pPr>
             <a:r>
-              <a:rPr lang="en-US" sz="700" b="1" dirty="0">
-                <a:solidFill>
-                  <a:srgbClr val="232323"/>
-                </a:solidFill>
-                <a:latin typeface="Malgun Gothic" pitchFamily="34" charset="0"/>
-                <a:ea typeface="Malgun Gothic" pitchFamily="34" charset="-122"/>
-                <a:cs typeface="Malgun Gothic" pitchFamily="34" charset="-120"/>
-              </a:rPr>
-              <a:t>인솔</a:t>
+              <a:rPr lang="en-US" sz="700" dirty="0">
+                <a:solidFill>
+                  <a:srgbClr val="FFFFFF"/>
+                </a:solidFill>
+                <a:latin typeface="Malgun Gothic" pitchFamily="34" charset="0"/>
+                <a:ea typeface="Malgun Gothic" pitchFamily="34" charset="-122"/>
+                <a:cs typeface="Malgun Gothic" pitchFamily="34" charset="-120"/>
+              </a:rPr>
+              <a:t>AFTER</a:t>
             </a:r>
             <a:endParaRPr lang="en-US" sz="700" dirty="0"/>
           </a:p>
-        </p:txBody>
-      </p:sp>
-      <p:sp>
-        <p:nvSpPr>
-          <p:cNvPr id="26" name="Text 24"/>
+          <a:p>
+            <a:pPr algn="ctr" indent="0" marL="0">
+              <a:buNone/>
+            </a:pPr>
+            <a:r>
+              <a:rPr lang="en-US" sz="700" dirty="0">
+                <a:solidFill>
+                  <a:srgbClr val="FFFFFF"/>
+                </a:solidFill>
+                <a:latin typeface="Malgun Gothic" pitchFamily="34" charset="0"/>
+                <a:ea typeface="Malgun Gothic" pitchFamily="34" charset="-122"/>
+                <a:cs typeface="Malgun Gothic" pitchFamily="34" charset="-120"/>
+              </a:rPr>
+              <a:t>빈 공간이</a:t>
+            </a:r>
+            <a:endParaRPr lang="en-US" sz="700" dirty="0"/>
+          </a:p>
+          <a:p>
+            <a:pPr algn="ctr" indent="0" marL="0">
+              <a:buNone/>
+            </a:pPr>
+            <a:r>
+              <a:rPr lang="en-US" sz="700" dirty="0">
+                <a:solidFill>
+                  <a:srgbClr val="FFFFFF"/>
+                </a:solidFill>
+                <a:latin typeface="Malgun Gothic" pitchFamily="34" charset="0"/>
+                <a:ea typeface="Malgun Gothic" pitchFamily="34" charset="-122"/>
+                <a:cs typeface="Malgun Gothic" pitchFamily="34" charset="-120"/>
+              </a:rPr>
+              <a:t>채워짐</a:t>
+            </a:r>
+            <a:endParaRPr lang="en-US" sz="700" dirty="0"/>
+          </a:p>
+        </p:txBody>
+      </p:sp>
+      <p:sp>
+        <p:nvSpPr>
+          <p:cNvPr id="32" name="Text 30"/>
           <p:cNvSpPr txBox="1"/>
           <p:nvPr/>
         </p:nvSpPr>
         <p:spPr>
           <a:xfrm>
-            <a:off x="4636008" y="3611880"/>
-            <a:ext cx="2377440" cy="548640"/>
+            <a:off x="4636008" y="4846320"/>
+            <a:ext cx="2377440" cy="320040"/>
           </a:xfrm>
           <a:prstGeom prst="rect">
             <a:avLst/>
@@ -4514,47 +4880,30 @@
               <a:buNone/>
             </a:pPr>
             <a:r>
-              <a:rPr lang="en-US" sz="800" dirty="0">
-                <a:solidFill>
-                  <a:srgbClr val="232323"/>
-                </a:solidFill>
-                <a:latin typeface="Malgun Gothic" pitchFamily="34" charset="0"/>
-                <a:ea typeface="Malgun Gothic" pitchFamily="34" charset="-122"/>
-                <a:cs typeface="Malgun Gothic" pitchFamily="34" charset="-120"/>
-              </a:rPr>
-              <a:t>E-실리폴리렌에</a:t>
-            </a:r>
-            <a:endParaRPr lang="en-US" sz="800" dirty="0"/>
-          </a:p>
-          <a:p>
-            <a:pPr algn="ctr" indent="0" marL="0">
-              <a:buNone/>
-            </a:pPr>
-            <a:r>
-              <a:rPr lang="en-US" sz="800" dirty="0">
-                <a:solidFill>
-                  <a:srgbClr val="232323"/>
-                </a:solidFill>
-                <a:latin typeface="Malgun Gothic" pitchFamily="34" charset="0"/>
-                <a:ea typeface="Malgun Gothic" pitchFamily="34" charset="-122"/>
-                <a:cs typeface="Malgun Gothic" pitchFamily="34" charset="-120"/>
-              </a:rPr>
-              <a:t>목공소 자투리 우드칩을 배합</a:t>
-            </a:r>
-            <a:endParaRPr lang="en-US" sz="800" dirty="0"/>
-          </a:p>
-        </p:txBody>
-      </p:sp>
-      <p:sp>
-        <p:nvSpPr>
-          <p:cNvPr id="27" name="Text 25"/>
+              <a:rPr lang="en-US" sz="700" dirty="0">
+                <a:solidFill>
+                  <a:srgbClr val="8A8A8A"/>
+                </a:solidFill>
+                <a:latin typeface="Malgun Gothic" pitchFamily="34" charset="0"/>
+                <a:ea typeface="Malgun Gothic" pitchFamily="34" charset="-122"/>
+                <a:cs typeface="Malgun Gothic" pitchFamily="34" charset="-120"/>
+              </a:rPr>
+              <a:t>M 15cm · L 17cm 반굽</a:t>
+            </a:r>
+            <a:endParaRPr lang="en-US" sz="700" dirty="0"/>
+          </a:p>
+        </p:txBody>
+      </p:sp>
+      <p:sp>
+        <p:nvSpPr>
+          <p:cNvPr id="33" name="Text 31"/>
           <p:cNvSpPr txBox="1"/>
           <p:nvPr/>
         </p:nvSpPr>
         <p:spPr>
           <a:xfrm>
-            <a:off x="4636008" y="4343400"/>
-            <a:ext cx="2377440" cy="457200"/>
+            <a:off x="4178808" y="5687568"/>
+            <a:ext cx="3291840" cy="457200"/>
           </a:xfrm>
           <a:prstGeom prst="rect">
             <a:avLst/>
@@ -4563,14 +4912,14 @@
           <a:ln/>
         </p:spPr>
         <p:txBody>
-          <a:bodyPr wrap="square" lIns="0" tIns="0" rIns="0" bIns="0" rtlCol="0" anchor="ctr"/>
-          <a:lstStyle/>
-          <a:p>
-            <a:pPr algn="ctr" indent="0" marL="0">
-              <a:buNone/>
-            </a:pPr>
-            <a:r>
-              <a:rPr lang="en-US" sz="700" dirty="0">
+          <a:bodyPr wrap="square" lIns="0" tIns="0" rIns="0" bIns="0" rtlCol="0" anchor="t"/>
+          <a:lstStyle/>
+          <a:p>
+            <a:pPr algn="ctr" indent="0" marL="0">
+              <a:buNone/>
+            </a:pPr>
+            <a:r>
+              <a:rPr lang="en-US" sz="1000" dirty="0">
                 <a:solidFill>
                   <a:srgbClr val="8A8A8A"/>
                 </a:solidFill>
@@ -4578,63 +4927,7 @@
                 <a:ea typeface="Malgun Gothic" pitchFamily="34" charset="-122"/>
                 <a:cs typeface="Malgun Gothic" pitchFamily="34" charset="-120"/>
               </a:rPr>
-              <a:t>환경부 새활용 산업 육성</a:t>
-            </a:r>
-            <a:endParaRPr lang="en-US" sz="700" dirty="0"/>
-          </a:p>
-          <a:p>
-            <a:pPr algn="ctr" indent="0" marL="0">
-              <a:buNone/>
-            </a:pPr>
-            <a:r>
-              <a:rPr lang="en-US" sz="700" dirty="0">
-                <a:solidFill>
-                  <a:srgbClr val="8A8A8A"/>
-                </a:solidFill>
-                <a:latin typeface="Malgun Gothic" pitchFamily="34" charset="0"/>
-                <a:ea typeface="Malgun Gothic" pitchFamily="34" charset="-122"/>
-                <a:cs typeface="Malgun Gothic" pitchFamily="34" charset="-120"/>
-              </a:rPr>
-              <a:t>지원사업 수행 기업</a:t>
-            </a:r>
-            <a:endParaRPr lang="en-US" sz="700" dirty="0"/>
-          </a:p>
-        </p:txBody>
-      </p:sp>
-      <p:sp>
-        <p:nvSpPr>
-          <p:cNvPr id="28" name="Text 26"/>
-          <p:cNvSpPr txBox="1"/>
-          <p:nvPr/>
-        </p:nvSpPr>
-        <p:spPr>
-          <a:xfrm>
-            <a:off x="4178808" y="5687568"/>
-            <a:ext cx="3291840" cy="457200"/>
-          </a:xfrm>
-          <a:prstGeom prst="rect">
-            <a:avLst/>
-          </a:prstGeom>
-          <a:noFill/>
-          <a:ln/>
-        </p:spPr>
-        <p:txBody>
-          <a:bodyPr wrap="square" lIns="0" tIns="0" rIns="0" bIns="0" rtlCol="0" anchor="t"/>
-          <a:lstStyle/>
-          <a:p>
-            <a:pPr algn="ctr" indent="0" marL="0">
-              <a:buNone/>
-            </a:pPr>
-            <a:r>
-              <a:rPr lang="en-US" sz="1000" dirty="0">
-                <a:solidFill>
-                  <a:srgbClr val="8A8A8A"/>
-                </a:solidFill>
-                <a:latin typeface="Malgun Gothic" pitchFamily="34" charset="0"/>
-                <a:ea typeface="Malgun Gothic" pitchFamily="34" charset="-122"/>
-                <a:cs typeface="Malgun Gothic" pitchFamily="34" charset="-120"/>
-              </a:rPr>
-              <a:t>자투리 → 우드칩 → 인솔 3단</a:t>
+              <a:t>겹침 단면도 (신발 · 기존 깔창 · 아치가득) + 뒤꿈치 GIF</a:t>
             </a:r>
             <a:endParaRPr lang="en-US" sz="1000" dirty="0"/>
           </a:p>
@@ -4642,7 +4935,7 @@
       </p:sp>
       <p:sp>
         <p:nvSpPr>
-          <p:cNvPr id="29" name="Text 27"/>
+          <p:cNvPr id="34" name="Text 32"/>
           <p:cNvSpPr txBox="1"/>
           <p:nvPr/>
         </p:nvSpPr>
@@ -4676,7 +4969,7 @@
                 <a:ea typeface="Malgun Gothic" pitchFamily="34" charset="-122"/>
                 <a:cs typeface="Malgun Gothic" pitchFamily="34" charset="-120"/>
               </a:rPr>
-              <a:t>목공소에서 온</a:t>
+              <a:t>쓰던 깔창 밑에</a:t>
             </a:r>
             <a:endParaRPr lang="en-US" sz="1600" dirty="0"/>
           </a:p>
@@ -4696,7 +4989,7 @@
                 <a:ea typeface="Malgun Gothic" pitchFamily="34" charset="-122"/>
                 <a:cs typeface="Malgun Gothic" pitchFamily="34" charset="-120"/>
               </a:rPr>
-              <a:t>우드칩</a:t>
+              <a:t>한 장 더</a:t>
             </a:r>
             <a:endParaRPr lang="en-US" sz="1600" dirty="0"/>
           </a:p>
@@ -4736,7 +5029,7 @@
                 <a:ea typeface="Malgun Gothic" pitchFamily="34" charset="-122"/>
                 <a:cs typeface="Malgun Gothic" pitchFamily="34" charset="-120"/>
               </a:rPr>
-              <a:t>E-실리폴리렌에</a:t>
+              <a:t>뒤꿈치부터 아치까지 오는 반굽 길이라</a:t>
             </a:r>
             <a:endParaRPr lang="en-US" sz="1600" dirty="0"/>
           </a:p>
@@ -4756,7 +5049,7 @@
                 <a:ea typeface="Malgun Gothic" pitchFamily="34" charset="-122"/>
                 <a:cs typeface="Malgun Gothic" pitchFamily="34" charset="-120"/>
               </a:rPr>
-              <a:t>목공소 자투리 우드칩을</a:t>
+              <a:t>지금 쓰는 깔창 밑에 겹쳐 깔 수 있습니다.</a:t>
             </a:r>
             <a:endParaRPr lang="en-US" sz="1600" dirty="0"/>
           </a:p>
@@ -4767,6 +5060,15 @@
               </a:lnSpc>
               <a:buNone/>
             </a:pPr>
+            <a:endParaRPr lang="en-US" sz="1600" dirty="0"/>
+          </a:p>
+          <a:p>
+            <a:pPr algn="ctr" indent="0" marL="0">
+              <a:lnSpc>
+                <a:spcPct val="125000"/>
+              </a:lnSpc>
+              <a:buNone/>
+            </a:pPr>
             <a:r>
               <a:rPr lang="en-US" sz="1400" dirty="0">
                 <a:solidFill>
@@ -4776,15 +5078,55 @@
                 <a:ea typeface="Malgun Gothic" pitchFamily="34" charset="-122"/>
                 <a:cs typeface="Malgun Gothic" pitchFamily="34" charset="-120"/>
               </a:rPr>
-              <a:t>배합했습니다.</a:t>
+              <a:t>신발 속 빈 공간이 채워져</a:t>
             </a:r>
             <a:endParaRPr lang="en-US" sz="1600" dirty="0"/>
           </a:p>
-        </p:txBody>
-      </p:sp>
-      <p:sp>
-        <p:nvSpPr>
-          <p:cNvPr id="30" name="Shape 28"/>
+          <a:p>
+            <a:pPr algn="ctr" indent="0" marL="0">
+              <a:lnSpc>
+                <a:spcPct val="125000"/>
+              </a:lnSpc>
+              <a:buNone/>
+            </a:pPr>
+            <a:r>
+              <a:rPr lang="en-US" sz="1400" dirty="0">
+                <a:solidFill>
+                  <a:srgbClr val="232323"/>
+                </a:solidFill>
+                <a:latin typeface="Malgun Gothic" pitchFamily="34" charset="0"/>
+                <a:ea typeface="Malgun Gothic" pitchFamily="34" charset="-122"/>
+                <a:cs typeface="Malgun Gothic" pitchFamily="34" charset="-120"/>
+              </a:rPr>
+              <a:t>신을 때 신발이 헐겁게 흘러내리는</a:t>
+            </a:r>
+            <a:endParaRPr lang="en-US" sz="1600" dirty="0"/>
+          </a:p>
+          <a:p>
+            <a:pPr algn="ctr" indent="0" marL="0">
+              <a:lnSpc>
+                <a:spcPct val="125000"/>
+              </a:lnSpc>
+              <a:buNone/>
+            </a:pPr>
+            <a:r>
+              <a:rPr lang="en-US" sz="1400" dirty="0">
+                <a:solidFill>
+                  <a:srgbClr val="232323"/>
+                </a:solidFill>
+                <a:latin typeface="Malgun Gothic" pitchFamily="34" charset="0"/>
+                <a:ea typeface="Malgun Gothic" pitchFamily="34" charset="-122"/>
+                <a:cs typeface="Malgun Gothic" pitchFamily="34" charset="-120"/>
+              </a:rPr>
+              <a:t>느낌을 잡아 줍니다.</a:t>
+            </a:r>
+            <a:endParaRPr lang="en-US" sz="1600" dirty="0"/>
+          </a:p>
+        </p:txBody>
+      </p:sp>
+      <p:sp>
+        <p:nvSpPr>
+          <p:cNvPr id="35" name="Shape 33"/>
           <p:cNvSpPr/>
           <p:nvPr/>
         </p:nvSpPr>
@@ -4811,7 +5153,7 @@
       </p:sp>
       <p:sp>
         <p:nvSpPr>
-          <p:cNvPr id="31" name="Text 29"/>
+          <p:cNvPr id="36" name="Text 34"/>
           <p:cNvSpPr txBox="1"/>
           <p:nvPr/>
         </p:nvSpPr>
@@ -4842,7 +5184,7 @@
                 <a:ea typeface="Malgun Gothic" pitchFamily="34" charset="-122"/>
                 <a:cs typeface="Malgun Gothic" pitchFamily="34" charset="-120"/>
               </a:rPr>
-              <a:t>⚠ '환경부 인증·무공해' ✗</a:t>
+              <a:t>⚠ 하단 고지: 신발 형태·재질에 따라 착용감이 다를 수 있습니다</a:t>
             </a:r>
             <a:endParaRPr lang="en-US" sz="900" dirty="0"/>
           </a:p>
@@ -4979,7 +5321,7 @@
                 <a:ea typeface="Malgun Gothic" pitchFamily="34" charset="-122"/>
                 <a:cs typeface="Malgun Gothic" pitchFamily="34" charset="-120"/>
               </a:rPr>
-              <a:t>ICUT 09 / 14   정형외과 전문의 설계 자문 (신규)</a:t>
+              <a:t>ICUT 09 / 15   소재 — 목공소에서 온 우드칩</a:t>
             </a:r>
             <a:endParaRPr lang="en-US" sz="1600" dirty="0"/>
           </a:p>
@@ -5354,7 +5696,7 @@
                 <a:ea typeface="Malgun Gothic" pitchFamily="34" charset="-122"/>
                 <a:cs typeface="Malgun Gothic" pitchFamily="34" charset="-120"/>
               </a:rPr>
-              <a:t>원장 촬영 D3</a:t>
+              <a:t>스레드 팩</a:t>
             </a:r>
             <a:pPr indent="0" marL="0">
               <a:spcAft>
@@ -5371,7 +5713,7 @@
                 <a:ea typeface="Malgun Gothic" pitchFamily="34" charset="-122"/>
                 <a:cs typeface="Malgun Gothic" pitchFamily="34" charset="-120"/>
               </a:rPr>
-              <a:t>  족부 모형 + 인솔</a:t>
+              <a:t>  새활용 서사</a:t>
             </a:r>
             <a:endParaRPr lang="en-US" sz="1100" dirty="0"/>
           </a:p>
@@ -5391,7 +5733,7 @@
                 <a:ea typeface="Malgun Gothic" pitchFamily="34" charset="-122"/>
                 <a:cs typeface="Malgun Gothic" pitchFamily="34" charset="-120"/>
               </a:rPr>
-              <a:t>모형 옆에 인솔을 대어 봄</a:t>
+              <a:t>버려지던 자투리 → 소재</a:t>
             </a:r>
             <a:endParaRPr lang="en-US" sz="1100" dirty="0"/>
           </a:p>
@@ -5411,7 +5753,7 @@
                 <a:ea typeface="Malgun Gothic" pitchFamily="34" charset="-122"/>
                 <a:cs typeface="Malgun Gothic" pitchFamily="34" charset="-120"/>
               </a:rPr>
-              <a:t>→ X-ray ✗</a:t>
+              <a:t>→ 3단 그래픽</a:t>
             </a:r>
             <a:endParaRPr lang="en-US" sz="1100" dirty="0"/>
           </a:p>
@@ -5450,7 +5792,7 @@
                 <a:ea typeface="Malgun Gothic" pitchFamily="34" charset="-122"/>
                 <a:cs typeface="Malgun Gothic" pitchFamily="34" charset="-120"/>
               </a:rPr>
-              <a:t>REF · 워킹화 08+와 같은 형식</a:t>
+              <a:t>REF · 워킹화 CUT 18 From Road to Floor와 짝</a:t>
             </a:r>
             <a:endParaRPr lang="en-US" sz="1000" dirty="0"/>
           </a:p>
@@ -5483,19 +5825,56 @@
       </p:sp>
       <p:sp>
         <p:nvSpPr>
-          <p:cNvPr id="19" name="Shape 17"/>
+          <p:cNvPr id="19" name="Text 17"/>
+          <p:cNvSpPr txBox="1"/>
+          <p:nvPr/>
+        </p:nvSpPr>
+        <p:spPr>
+          <a:xfrm>
+            <a:off x="4636008" y="2103120"/>
+            <a:ext cx="2377440" cy="320040"/>
+          </a:xfrm>
+          <a:prstGeom prst="rect">
+            <a:avLst/>
+          </a:prstGeom>
+          <a:noFill/>
+          <a:ln/>
+        </p:spPr>
+        <p:txBody>
+          <a:bodyPr wrap="square" lIns="0" tIns="0" rIns="0" bIns="0" rtlCol="0" anchor="ctr"/>
+          <a:lstStyle/>
+          <a:p>
+            <a:pPr algn="ctr" indent="0" marL="0">
+              <a:buNone/>
+            </a:pPr>
+            <a:r>
+              <a:rPr lang="en-US" sz="900" b="1" dirty="0">
+                <a:solidFill>
+                  <a:srgbClr val="232323"/>
+                </a:solidFill>
+                <a:latin typeface="Malgun Gothic" pitchFamily="34" charset="0"/>
+                <a:ea typeface="Malgun Gothic" pitchFamily="34" charset="-122"/>
+                <a:cs typeface="Malgun Gothic" pitchFamily="34" charset="-120"/>
+              </a:rPr>
+              <a:t>목공소에서 온 우드칩</a:t>
+            </a:r>
+            <a:endParaRPr lang="en-US" sz="900" dirty="0"/>
+          </a:p>
+        </p:txBody>
+      </p:sp>
+      <p:sp>
+        <p:nvSpPr>
+          <p:cNvPr id="20" name="Shape 18"/>
           <p:cNvSpPr/>
           <p:nvPr/>
         </p:nvSpPr>
         <p:spPr>
           <a:xfrm>
-            <a:off x="4681728" y="2148840"/>
-            <a:ext cx="2286000" cy="1463040"/>
-          </a:xfrm>
-          <a:prstGeom prst="roundRect">
-            <a:avLst>
-              <a:gd name="adj" fmla="val 1875"/>
-            </a:avLst>
+            <a:off x="4727448" y="2697480"/>
+            <a:ext cx="594360" cy="594360"/>
+          </a:xfrm>
+          <a:prstGeom prst="ellipse">
+            <a:avLst/>
           </a:prstGeom>
           <a:solidFill>
             <a:srgbClr val="D8D2C6"/>
@@ -5510,14 +5889,14 @@
       </p:sp>
       <p:sp>
         <p:nvSpPr>
-          <p:cNvPr id="20" name="Text 18"/>
+          <p:cNvPr id="21" name="Text 19"/>
           <p:cNvSpPr txBox="1"/>
           <p:nvPr/>
         </p:nvSpPr>
         <p:spPr>
           <a:xfrm>
-            <a:off x="4718304" y="2148840"/>
-            <a:ext cx="2212848" cy="1463040"/>
+            <a:off x="4727448" y="2697480"/>
+            <a:ext cx="594360" cy="594360"/>
           </a:xfrm>
           <a:prstGeom prst="rect">
             <a:avLst/>
@@ -5533,47 +5912,72 @@
               <a:buNone/>
             </a:pPr>
             <a:r>
-              <a:rPr lang="en-US" sz="800" dirty="0">
-                <a:solidFill>
-                  <a:srgbClr val="232323"/>
-                </a:solidFill>
-                <a:latin typeface="Malgun Gothic" pitchFamily="34" charset="0"/>
-                <a:ea typeface="Malgun Gothic" pitchFamily="34" charset="-122"/>
-                <a:cs typeface="Malgun Gothic" pitchFamily="34" charset="-120"/>
-              </a:rPr>
-              <a:t>D3 족부 모형 옆</a:t>
-            </a:r>
-            <a:endParaRPr lang="en-US" sz="800" dirty="0"/>
-          </a:p>
-          <a:p>
-            <a:pPr algn="ctr" indent="0" marL="0">
-              <a:buNone/>
-            </a:pPr>
-            <a:r>
-              <a:rPr lang="en-US" sz="800" dirty="0">
-                <a:solidFill>
-                  <a:srgbClr val="232323"/>
-                </a:solidFill>
-                <a:latin typeface="Malgun Gothic" pitchFamily="34" charset="0"/>
-                <a:ea typeface="Malgun Gothic" pitchFamily="34" charset="-122"/>
-                <a:cs typeface="Malgun Gothic" pitchFamily="34" charset="-120"/>
-              </a:rPr>
-              <a:t>아치가득 인솔</a:t>
-            </a:r>
-            <a:endParaRPr lang="en-US" sz="800" dirty="0"/>
-          </a:p>
-        </p:txBody>
-      </p:sp>
-      <p:sp>
-        <p:nvSpPr>
-          <p:cNvPr id="21" name="Text 19"/>
+              <a:rPr lang="en-US" sz="700" b="1" dirty="0">
+                <a:solidFill>
+                  <a:srgbClr val="232323"/>
+                </a:solidFill>
+                <a:latin typeface="Malgun Gothic" pitchFamily="34" charset="0"/>
+                <a:ea typeface="Malgun Gothic" pitchFamily="34" charset="-122"/>
+                <a:cs typeface="Malgun Gothic" pitchFamily="34" charset="-120"/>
+              </a:rPr>
+              <a:t>목공</a:t>
+            </a:r>
+            <a:endParaRPr lang="en-US" sz="700" dirty="0"/>
+          </a:p>
+          <a:p>
+            <a:pPr algn="ctr" indent="0" marL="0">
+              <a:buNone/>
+            </a:pPr>
+            <a:r>
+              <a:rPr lang="en-US" sz="700" b="1" dirty="0">
+                <a:solidFill>
+                  <a:srgbClr val="232323"/>
+                </a:solidFill>
+                <a:latin typeface="Malgun Gothic" pitchFamily="34" charset="0"/>
+                <a:ea typeface="Malgun Gothic" pitchFamily="34" charset="-122"/>
+                <a:cs typeface="Malgun Gothic" pitchFamily="34" charset="-120"/>
+              </a:rPr>
+              <a:t>자투리</a:t>
+            </a:r>
+            <a:endParaRPr lang="en-US" sz="700" dirty="0"/>
+          </a:p>
+        </p:txBody>
+      </p:sp>
+      <p:sp>
+        <p:nvSpPr>
+          <p:cNvPr id="22" name="Shape 20"/>
+          <p:cNvSpPr/>
+          <p:nvPr/>
+        </p:nvSpPr>
+        <p:spPr>
+          <a:xfrm>
+            <a:off x="5532120" y="2697480"/>
+            <a:ext cx="594360" cy="594360"/>
+          </a:xfrm>
+          <a:prstGeom prst="ellipse">
+            <a:avLst/>
+          </a:prstGeom>
+          <a:solidFill>
+            <a:srgbClr val="D8D2C6"/>
+          </a:solidFill>
+          <a:ln w="12700">
+            <a:solidFill>
+              <a:srgbClr val="D8D2C6"/>
+            </a:solidFill>
+            <a:prstDash val="solid"/>
+          </a:ln>
+        </p:spPr>
+      </p:sp>
+      <p:sp>
+        <p:nvSpPr>
+          <p:cNvPr id="23" name="Text 21"/>
           <p:cNvSpPr txBox="1"/>
           <p:nvPr/>
         </p:nvSpPr>
         <p:spPr>
           <a:xfrm>
-            <a:off x="4636008" y="3749040"/>
-            <a:ext cx="2377440" cy="548640"/>
+            <a:off x="5532120" y="2697480"/>
+            <a:ext cx="594360" cy="594360"/>
           </a:xfrm>
           <a:prstGeom prst="rect">
             <a:avLst/>
@@ -5589,64 +5993,55 @@
               <a:buNone/>
             </a:pPr>
             <a:r>
-              <a:rPr lang="en-US" sz="800" b="1" dirty="0">
-                <a:solidFill>
-                  <a:srgbClr val="232323"/>
-                </a:solidFill>
-                <a:latin typeface="Malgun Gothic" pitchFamily="34" charset="0"/>
-                <a:ea typeface="Malgun Gothic" pitchFamily="34" charset="-122"/>
-                <a:cs typeface="Malgun Gothic" pitchFamily="34" charset="-120"/>
-              </a:rPr>
-              <a:t>"아치 라인을 따라 채운 형태와</a:t>
-            </a:r>
-            <a:endParaRPr lang="en-US" sz="800" dirty="0"/>
-          </a:p>
-          <a:p>
-            <a:pPr algn="ctr" indent="0" marL="0">
-              <a:buNone/>
-            </a:pPr>
-            <a:r>
-              <a:rPr lang="en-US" sz="800" b="1" dirty="0">
-                <a:solidFill>
-                  <a:srgbClr val="232323"/>
-                </a:solidFill>
-                <a:latin typeface="Malgun Gothic" pitchFamily="34" charset="0"/>
-                <a:ea typeface="Malgun Gothic" pitchFamily="34" charset="-122"/>
-                <a:cs typeface="Malgun Gothic" pitchFamily="34" charset="-120"/>
-              </a:rPr>
-              <a:t>뒤꿈치 컵 깊이를 착용해 보고</a:t>
-            </a:r>
-            <a:endParaRPr lang="en-US" sz="800" dirty="0"/>
-          </a:p>
-          <a:p>
-            <a:pPr algn="ctr" indent="0" marL="0">
-              <a:buNone/>
-            </a:pPr>
-            <a:r>
-              <a:rPr lang="en-US" sz="800" b="1" dirty="0">
-                <a:solidFill>
-                  <a:srgbClr val="232323"/>
-                </a:solidFill>
-                <a:latin typeface="Malgun Gothic" pitchFamily="34" charset="0"/>
-                <a:ea typeface="Malgun Gothic" pitchFamily="34" charset="-122"/>
-                <a:cs typeface="Malgun Gothic" pitchFamily="34" charset="-120"/>
-              </a:rPr>
-              <a:t>의견을 드렸습니다."</a:t>
-            </a:r>
-            <a:endParaRPr lang="en-US" sz="800" dirty="0"/>
-          </a:p>
-        </p:txBody>
-      </p:sp>
-      <p:sp>
-        <p:nvSpPr>
-          <p:cNvPr id="22" name="Text 20"/>
+              <a:rPr lang="en-US" sz="700" b="1" dirty="0">
+                <a:solidFill>
+                  <a:srgbClr val="232323"/>
+                </a:solidFill>
+                <a:latin typeface="Malgun Gothic" pitchFamily="34" charset="0"/>
+                <a:ea typeface="Malgun Gothic" pitchFamily="34" charset="-122"/>
+                <a:cs typeface="Malgun Gothic" pitchFamily="34" charset="-120"/>
+              </a:rPr>
+              <a:t>우드칩</a:t>
+            </a:r>
+            <a:endParaRPr lang="en-US" sz="700" dirty="0"/>
+          </a:p>
+        </p:txBody>
+      </p:sp>
+      <p:sp>
+        <p:nvSpPr>
+          <p:cNvPr id="24" name="Shape 22"/>
+          <p:cNvSpPr/>
+          <p:nvPr/>
+        </p:nvSpPr>
+        <p:spPr>
+          <a:xfrm>
+            <a:off x="6327648" y="2697480"/>
+            <a:ext cx="594360" cy="594360"/>
+          </a:xfrm>
+          <a:prstGeom prst="ellipse">
+            <a:avLst/>
+          </a:prstGeom>
+          <a:solidFill>
+            <a:srgbClr val="C6F432"/>
+          </a:solidFill>
+          <a:ln w="12700">
+            <a:solidFill>
+              <a:srgbClr val="C6F432"/>
+            </a:solidFill>
+            <a:prstDash val="solid"/>
+          </a:ln>
+        </p:spPr>
+      </p:sp>
+      <p:sp>
+        <p:nvSpPr>
+          <p:cNvPr id="25" name="Text 23"/>
           <p:cNvSpPr txBox="1"/>
           <p:nvPr/>
         </p:nvSpPr>
         <p:spPr>
           <a:xfrm>
-            <a:off x="4636008" y="4389120"/>
-            <a:ext cx="2377440" cy="228600"/>
+            <a:off x="6327648" y="2697480"/>
+            <a:ext cx="594360" cy="594360"/>
           </a:xfrm>
           <a:prstGeom prst="rect">
             <a:avLst/>
@@ -5662,15 +6057,15 @@
               <a:buNone/>
             </a:pPr>
             <a:r>
-              <a:rPr lang="en-US" sz="700" dirty="0">
-                <a:solidFill>
-                  <a:srgbClr val="232323"/>
-                </a:solidFill>
-                <a:latin typeface="Malgun Gothic" pitchFamily="34" charset="0"/>
-                <a:ea typeface="Malgun Gothic" pitchFamily="34" charset="-122"/>
-                <a:cs typeface="Malgun Gothic" pitchFamily="34" charset="-120"/>
-              </a:rPr>
-              <a:t>— 정형외과 전문의 이문훈</a:t>
+              <a:rPr lang="en-US" sz="700" b="1" dirty="0">
+                <a:solidFill>
+                  <a:srgbClr val="232323"/>
+                </a:solidFill>
+                <a:latin typeface="Malgun Gothic" pitchFamily="34" charset="0"/>
+                <a:ea typeface="Malgun Gothic" pitchFamily="34" charset="-122"/>
+                <a:cs typeface="Malgun Gothic" pitchFamily="34" charset="-120"/>
+              </a:rPr>
+              <a:t>인솔</a:t>
             </a:r>
             <a:endParaRPr lang="en-US" sz="700" dirty="0"/>
           </a:p>
@@ -5678,14 +6073,14 @@
       </p:sp>
       <p:sp>
         <p:nvSpPr>
-          <p:cNvPr id="23" name="Text 21"/>
+          <p:cNvPr id="26" name="Text 24"/>
           <p:cNvSpPr txBox="1"/>
           <p:nvPr/>
         </p:nvSpPr>
         <p:spPr>
           <a:xfrm>
-            <a:off x="4636008" y="4663440"/>
-            <a:ext cx="2377440" cy="320040"/>
+            <a:off x="4636008" y="3611880"/>
+            <a:ext cx="2377440" cy="548640"/>
           </a:xfrm>
           <a:prstGeom prst="rect">
             <a:avLst/>
@@ -5701,7 +6096,63 @@
               <a:buNone/>
             </a:pPr>
             <a:r>
-              <a:rPr lang="en-US" sz="600" dirty="0">
+              <a:rPr lang="en-US" sz="800" dirty="0">
+                <a:solidFill>
+                  <a:srgbClr val="232323"/>
+                </a:solidFill>
+                <a:latin typeface="Malgun Gothic" pitchFamily="34" charset="0"/>
+                <a:ea typeface="Malgun Gothic" pitchFamily="34" charset="-122"/>
+                <a:cs typeface="Malgun Gothic" pitchFamily="34" charset="-120"/>
+              </a:rPr>
+              <a:t>E-실리폴리렌에</a:t>
+            </a:r>
+            <a:endParaRPr lang="en-US" sz="800" dirty="0"/>
+          </a:p>
+          <a:p>
+            <a:pPr algn="ctr" indent="0" marL="0">
+              <a:buNone/>
+            </a:pPr>
+            <a:r>
+              <a:rPr lang="en-US" sz="800" dirty="0">
+                <a:solidFill>
+                  <a:srgbClr val="232323"/>
+                </a:solidFill>
+                <a:latin typeface="Malgun Gothic" pitchFamily="34" charset="0"/>
+                <a:ea typeface="Malgun Gothic" pitchFamily="34" charset="-122"/>
+                <a:cs typeface="Malgun Gothic" pitchFamily="34" charset="-120"/>
+              </a:rPr>
+              <a:t>목공소 자투리 우드칩을 배합</a:t>
+            </a:r>
+            <a:endParaRPr lang="en-US" sz="800" dirty="0"/>
+          </a:p>
+        </p:txBody>
+      </p:sp>
+      <p:sp>
+        <p:nvSpPr>
+          <p:cNvPr id="27" name="Text 25"/>
+          <p:cNvSpPr txBox="1"/>
+          <p:nvPr/>
+        </p:nvSpPr>
+        <p:spPr>
+          <a:xfrm>
+            <a:off x="4636008" y="4343400"/>
+            <a:ext cx="2377440" cy="457200"/>
+          </a:xfrm>
+          <a:prstGeom prst="rect">
+            <a:avLst/>
+          </a:prstGeom>
+          <a:noFill/>
+          <a:ln/>
+        </p:spPr>
+        <p:txBody>
+          <a:bodyPr wrap="square" lIns="0" tIns="0" rIns="0" bIns="0" rtlCol="0" anchor="ctr"/>
+          <a:lstStyle/>
+          <a:p>
+            <a:pPr algn="ctr" indent="0" marL="0">
+              <a:buNone/>
+            </a:pPr>
+            <a:r>
+              <a:rPr lang="en-US" sz="700" dirty="0">
                 <a:solidFill>
                   <a:srgbClr val="8A8A8A"/>
                 </a:solidFill>
@@ -5709,15 +6160,32 @@
                 <a:ea typeface="Malgun Gothic" pitchFamily="34" charset="-122"/>
                 <a:cs typeface="Malgun Gothic" pitchFamily="34" charset="-120"/>
               </a:rPr>
-              <a:t>자문료를 받았습니다 (대가 표기)</a:t>
-            </a:r>
-            <a:endParaRPr lang="en-US" sz="600" dirty="0"/>
-          </a:p>
-        </p:txBody>
-      </p:sp>
-      <p:sp>
-        <p:nvSpPr>
-          <p:cNvPr id="24" name="Text 22"/>
+              <a:t>환경부 새활용 산업 육성</a:t>
+            </a:r>
+            <a:endParaRPr lang="en-US" sz="700" dirty="0"/>
+          </a:p>
+          <a:p>
+            <a:pPr algn="ctr" indent="0" marL="0">
+              <a:buNone/>
+            </a:pPr>
+            <a:r>
+              <a:rPr lang="en-US" sz="700" dirty="0">
+                <a:solidFill>
+                  <a:srgbClr val="8A8A8A"/>
+                </a:solidFill>
+                <a:latin typeface="Malgun Gothic" pitchFamily="34" charset="0"/>
+                <a:ea typeface="Malgun Gothic" pitchFamily="34" charset="-122"/>
+                <a:cs typeface="Malgun Gothic" pitchFamily="34" charset="-120"/>
+              </a:rPr>
+              <a:t>지원사업 수행 기업</a:t>
+            </a:r>
+            <a:endParaRPr lang="en-US" sz="700" dirty="0"/>
+          </a:p>
+        </p:txBody>
+      </p:sp>
+      <p:sp>
+        <p:nvSpPr>
+          <p:cNvPr id="28" name="Text 26"/>
           <p:cNvSpPr txBox="1"/>
           <p:nvPr/>
         </p:nvSpPr>
@@ -5748,7 +6216,7 @@
                 <a:ea typeface="Malgun Gothic" pitchFamily="34" charset="-122"/>
                 <a:cs typeface="Malgun Gothic" pitchFamily="34" charset="-120"/>
               </a:rPr>
-              <a:t>D3 컷 + 인용 1문장 + 대가 표기</a:t>
+              <a:t>자투리 → 우드칩 → 인솔 3단</a:t>
             </a:r>
             <a:endParaRPr lang="en-US" sz="1000" dirty="0"/>
           </a:p>
@@ -5756,7 +6224,7 @@
       </p:sp>
       <p:sp>
         <p:nvSpPr>
-          <p:cNvPr id="25" name="Text 23"/>
+          <p:cNvPr id="29" name="Text 27"/>
           <p:cNvSpPr txBox="1"/>
           <p:nvPr/>
         </p:nvSpPr>
@@ -5790,7 +6258,7 @@
                 <a:ea typeface="Malgun Gothic" pitchFamily="34" charset="-122"/>
                 <a:cs typeface="Malgun Gothic" pitchFamily="34" charset="-120"/>
               </a:rPr>
-              <a:t>정형외과 전문의가</a:t>
+              <a:t>목공소에서 온</a:t>
             </a:r>
             <a:endParaRPr lang="en-US" sz="1600" dirty="0"/>
           </a:p>
@@ -5810,7 +6278,7 @@
                 <a:ea typeface="Malgun Gothic" pitchFamily="34" charset="-122"/>
                 <a:cs typeface="Malgun Gothic" pitchFamily="34" charset="-120"/>
               </a:rPr>
-              <a:t>직접 신어 봤습니다</a:t>
+              <a:t>우드칩</a:t>
             </a:r>
             <a:endParaRPr lang="en-US" sz="1600" dirty="0"/>
           </a:p>
@@ -5850,7 +6318,7 @@
                 <a:ea typeface="Malgun Gothic" pitchFamily="34" charset="-122"/>
                 <a:cs typeface="Malgun Gothic" pitchFamily="34" charset="-120"/>
               </a:rPr>
-              <a:t>"아치 라인을 따라 채운 형태와</a:t>
+              <a:t>E-실리폴리렌에</a:t>
             </a:r>
             <a:endParaRPr lang="en-US" sz="1600" dirty="0"/>
           </a:p>
@@ -5870,7 +6338,7 @@
                 <a:ea typeface="Malgun Gothic" pitchFamily="34" charset="-122"/>
                 <a:cs typeface="Malgun Gothic" pitchFamily="34" charset="-120"/>
               </a:rPr>
-              <a:t>뒤꿈치 컵 깊이를</a:t>
+              <a:t>목공소 자투리 우드칩을</a:t>
             </a:r>
             <a:endParaRPr lang="en-US" sz="1600" dirty="0"/>
           </a:p>
@@ -5890,35 +6358,15 @@
                 <a:ea typeface="Malgun Gothic" pitchFamily="34" charset="-122"/>
                 <a:cs typeface="Malgun Gothic" pitchFamily="34" charset="-120"/>
               </a:rPr>
-              <a:t>착용해 보고 의견을 드렸습니다."</a:t>
+              <a:t>배합했습니다.</a:t>
             </a:r>
             <a:endParaRPr lang="en-US" sz="1600" dirty="0"/>
           </a:p>
-          <a:p>
-            <a:pPr algn="ctr" indent="0" marL="0">
-              <a:lnSpc>
-                <a:spcPct val="125000"/>
-              </a:lnSpc>
-              <a:buNone/>
-            </a:pPr>
-            <a:r>
-              <a:rPr lang="en-US" sz="1400" dirty="0">
-                <a:solidFill>
-                  <a:srgbClr val="232323"/>
-                </a:solidFill>
-                <a:latin typeface="Malgun Gothic" pitchFamily="34" charset="0"/>
-                <a:ea typeface="Malgun Gothic" pitchFamily="34" charset="-122"/>
-                <a:cs typeface="Malgun Gothic" pitchFamily="34" charset="-120"/>
-              </a:rPr>
-              <a:t>— 정형외과 전문의 이문훈</a:t>
-            </a:r>
-            <a:endParaRPr lang="en-US" sz="1600" dirty="0"/>
-          </a:p>
-        </p:txBody>
-      </p:sp>
-      <p:sp>
-        <p:nvSpPr>
-          <p:cNvPr id="26" name="Shape 24"/>
+        </p:txBody>
+      </p:sp>
+      <p:sp>
+        <p:nvSpPr>
+          <p:cNvPr id="30" name="Shape 28"/>
           <p:cNvSpPr/>
           <p:nvPr/>
         </p:nvSpPr>
@@ -5945,7 +6393,7 @@
       </p:sp>
       <p:sp>
         <p:nvSpPr>
-          <p:cNvPr id="27" name="Text 25"/>
+          <p:cNvPr id="31" name="Text 29"/>
           <p:cNvSpPr txBox="1"/>
           <p:nvPr/>
         </p:nvSpPr>
@@ -5976,7 +6424,7 @@
                 <a:ea typeface="Malgun Gothic" pitchFamily="34" charset="-122"/>
                 <a:cs typeface="Malgun Gothic" pitchFamily="34" charset="-120"/>
               </a:rPr>
-              <a:t>⚠ 원장 검수본만 · 효능 문구 같은 화면 ✗</a:t>
+              <a:t>⚠ '환경부 인증·무공해' ✗</a:t>
             </a:r>
             <a:endParaRPr lang="en-US" sz="900" dirty="0"/>
           </a:p>
@@ -6031,11 +6479,11 @@
             </a:avLst>
           </a:prstGeom>
           <a:solidFill>
-            <a:srgbClr val="232323"/>
+            <a:srgbClr val="7E9C7E"/>
           </a:solidFill>
           <a:ln w="12700">
             <a:solidFill>
-              <a:srgbClr val="232323"/>
+              <a:srgbClr val="7E9C7E"/>
             </a:solidFill>
             <a:prstDash val="solid"/>
           </a:ln>
@@ -6074,7 +6522,7 @@
                 <a:ea typeface="Malgun Gothic" pitchFamily="34" charset="-122"/>
                 <a:cs typeface="Malgun Gothic" pitchFamily="34" charset="-120"/>
               </a:rPr>
-              <a:t>제품</a:t>
+              <a:t>신뢰</a:t>
             </a:r>
             <a:endParaRPr lang="en-US" sz="1000" dirty="0"/>
           </a:p>
@@ -6113,7 +6561,7 @@
                 <a:ea typeface="Malgun Gothic" pitchFamily="34" charset="-122"/>
                 <a:cs typeface="Malgun Gothic" pitchFamily="34" charset="-120"/>
               </a:rPr>
-              <a:t>ICUT 10 / 14   이렇게 넣으세요</a:t>
+              <a:t>ICUT 10 / 15   정형외과 전문의 설계 자문 — 인솔 형태·착용 방식</a:t>
             </a:r>
             <a:endParaRPr lang="en-US" sz="1600" dirty="0"/>
           </a:p>
@@ -6488,7 +6936,7 @@
                 <a:ea typeface="Malgun Gothic" pitchFamily="34" charset="-122"/>
                 <a:cs typeface="Malgun Gothic" pitchFamily="34" charset="-120"/>
               </a:rPr>
-              <a:t>인솔 일반</a:t>
+              <a:t>원장 촬영 D3</a:t>
             </a:r>
             <a:pPr indent="0" marL="0">
               <a:spcAft>
@@ -6505,7 +6953,7 @@
                 <a:ea typeface="Malgun Gothic" pitchFamily="34" charset="-122"/>
                 <a:cs typeface="Malgun Gothic" pitchFamily="34" charset="-120"/>
               </a:rPr>
-              <a:t>  사용 3스텝</a:t>
+              <a:t>  족부 모형 + 인솔</a:t>
             </a:r>
             <a:endParaRPr lang="en-US" sz="1100" dirty="0"/>
           </a:p>
@@ -6525,7 +6973,7 @@
                 <a:ea typeface="Malgun Gothic" pitchFamily="34" charset="-122"/>
                 <a:cs typeface="Malgun Gothic" pitchFamily="34" charset="-120"/>
               </a:rPr>
-              <a:t>기존 깔창 빼기 → 대보기 → 넣기</a:t>
+              <a:t>모형 옆에 반굽 인솔을 대어 봄</a:t>
             </a:r>
             <a:endParaRPr lang="en-US" sz="1100" dirty="0"/>
           </a:p>
@@ -6545,7 +6993,7 @@
                 <a:ea typeface="Malgun Gothic" pitchFamily="34" charset="-122"/>
                 <a:cs typeface="Malgun Gothic" pitchFamily="34" charset="-120"/>
               </a:rPr>
-              <a:t>→ 재단 가능 여부 확인 후</a:t>
+              <a:t>→ X-ray ✗</a:t>
             </a:r>
             <a:endParaRPr lang="en-US" sz="1100" dirty="0"/>
           </a:p>
@@ -6584,7 +7032,7 @@
                 <a:ea typeface="Malgun Gothic" pitchFamily="34" charset="-122"/>
                 <a:cs typeface="Malgun Gothic" pitchFamily="34" charset="-120"/>
               </a:rPr>
-              <a:t>REF · Clove/르무통 사용 안내</a:t>
+              <a:t>REF · 워킹화 08+와 같은 형식</a:t>
             </a:r>
             <a:endParaRPr lang="en-US" sz="1000" dirty="0"/>
           </a:p>
@@ -6623,255 +7071,12 @@
         </p:nvSpPr>
         <p:spPr>
           <a:xfrm>
-            <a:off x="4727448" y="2331720"/>
-            <a:ext cx="594360" cy="594360"/>
-          </a:xfrm>
-          <a:prstGeom prst="ellipse">
-            <a:avLst/>
-          </a:prstGeom>
-          <a:solidFill>
-            <a:srgbClr val="C6F432"/>
-          </a:solidFill>
-          <a:ln w="12700">
-            <a:solidFill>
-              <a:srgbClr val="C6F432"/>
-            </a:solidFill>
-            <a:prstDash val="solid"/>
-          </a:ln>
-        </p:spPr>
-      </p:sp>
-      <p:sp>
-        <p:nvSpPr>
-          <p:cNvPr id="20" name="Text 18"/>
-          <p:cNvSpPr txBox="1"/>
-          <p:nvPr/>
-        </p:nvSpPr>
-        <p:spPr>
-          <a:xfrm>
-            <a:off x="4727448" y="2331720"/>
-            <a:ext cx="594360" cy="594360"/>
-          </a:xfrm>
-          <a:prstGeom prst="rect">
-            <a:avLst/>
-          </a:prstGeom>
-          <a:noFill/>
-          <a:ln/>
-        </p:spPr>
-        <p:txBody>
-          <a:bodyPr wrap="square" lIns="0" tIns="0" rIns="0" bIns="0" rtlCol="0" anchor="ctr"/>
-          <a:lstStyle/>
-          <a:p>
-            <a:pPr algn="ctr" indent="0" marL="0">
-              <a:buNone/>
-            </a:pPr>
-            <a:r>
-              <a:rPr lang="en-US" sz="700" b="1" dirty="0">
-                <a:solidFill>
-                  <a:srgbClr val="232323"/>
-                </a:solidFill>
-                <a:latin typeface="Malgun Gothic" pitchFamily="34" charset="0"/>
-                <a:ea typeface="Malgun Gothic" pitchFamily="34" charset="-122"/>
-                <a:cs typeface="Malgun Gothic" pitchFamily="34" charset="-120"/>
-              </a:rPr>
-              <a:t>1</a:t>
-            </a:r>
-            <a:endParaRPr lang="en-US" sz="700" dirty="0"/>
-          </a:p>
-          <a:p>
-            <a:pPr algn="ctr" indent="0" marL="0">
-              <a:buNone/>
-            </a:pPr>
-            <a:r>
-              <a:rPr lang="en-US" sz="700" b="1" dirty="0">
-                <a:solidFill>
-                  <a:srgbClr val="232323"/>
-                </a:solidFill>
-                <a:latin typeface="Malgun Gothic" pitchFamily="34" charset="0"/>
-                <a:ea typeface="Malgun Gothic" pitchFamily="34" charset="-122"/>
-                <a:cs typeface="Malgun Gothic" pitchFamily="34" charset="-120"/>
-              </a:rPr>
-              <a:t>빼기</a:t>
-            </a:r>
-            <a:endParaRPr lang="en-US" sz="700" dirty="0"/>
-          </a:p>
-        </p:txBody>
-      </p:sp>
-      <p:sp>
-        <p:nvSpPr>
-          <p:cNvPr id="21" name="Shape 19"/>
-          <p:cNvSpPr/>
-          <p:nvPr/>
-        </p:nvSpPr>
-        <p:spPr>
-          <a:xfrm>
-            <a:off x="5532120" y="2331720"/>
-            <a:ext cx="594360" cy="594360"/>
-          </a:xfrm>
-          <a:prstGeom prst="ellipse">
-            <a:avLst/>
-          </a:prstGeom>
-          <a:solidFill>
-            <a:srgbClr val="C6F432"/>
-          </a:solidFill>
-          <a:ln w="12700">
-            <a:solidFill>
-              <a:srgbClr val="C6F432"/>
-            </a:solidFill>
-            <a:prstDash val="solid"/>
-          </a:ln>
-        </p:spPr>
-      </p:sp>
-      <p:sp>
-        <p:nvSpPr>
-          <p:cNvPr id="22" name="Text 20"/>
-          <p:cNvSpPr txBox="1"/>
-          <p:nvPr/>
-        </p:nvSpPr>
-        <p:spPr>
-          <a:xfrm>
-            <a:off x="5532120" y="2331720"/>
-            <a:ext cx="594360" cy="594360"/>
-          </a:xfrm>
-          <a:prstGeom prst="rect">
-            <a:avLst/>
-          </a:prstGeom>
-          <a:noFill/>
-          <a:ln/>
-        </p:spPr>
-        <p:txBody>
-          <a:bodyPr wrap="square" lIns="0" tIns="0" rIns="0" bIns="0" rtlCol="0" anchor="ctr"/>
-          <a:lstStyle/>
-          <a:p>
-            <a:pPr algn="ctr" indent="0" marL="0">
-              <a:buNone/>
-            </a:pPr>
-            <a:r>
-              <a:rPr lang="en-US" sz="700" b="1" dirty="0">
-                <a:solidFill>
-                  <a:srgbClr val="232323"/>
-                </a:solidFill>
-                <a:latin typeface="Malgun Gothic" pitchFamily="34" charset="0"/>
-                <a:ea typeface="Malgun Gothic" pitchFamily="34" charset="-122"/>
-                <a:cs typeface="Malgun Gothic" pitchFamily="34" charset="-120"/>
-              </a:rPr>
-              <a:t>2</a:t>
-            </a:r>
-            <a:endParaRPr lang="en-US" sz="700" dirty="0"/>
-          </a:p>
-          <a:p>
-            <a:pPr algn="ctr" indent="0" marL="0">
-              <a:buNone/>
-            </a:pPr>
-            <a:r>
-              <a:rPr lang="en-US" sz="700" b="1" dirty="0">
-                <a:solidFill>
-                  <a:srgbClr val="232323"/>
-                </a:solidFill>
-                <a:latin typeface="Malgun Gothic" pitchFamily="34" charset="0"/>
-                <a:ea typeface="Malgun Gothic" pitchFamily="34" charset="-122"/>
-                <a:cs typeface="Malgun Gothic" pitchFamily="34" charset="-120"/>
-              </a:rPr>
-              <a:t>대보기</a:t>
-            </a:r>
-            <a:endParaRPr lang="en-US" sz="700" dirty="0"/>
-          </a:p>
-        </p:txBody>
-      </p:sp>
-      <p:sp>
-        <p:nvSpPr>
-          <p:cNvPr id="23" name="Shape 21"/>
-          <p:cNvSpPr/>
-          <p:nvPr/>
-        </p:nvSpPr>
-        <p:spPr>
-          <a:xfrm>
-            <a:off x="6327648" y="2331720"/>
-            <a:ext cx="594360" cy="594360"/>
-          </a:xfrm>
-          <a:prstGeom prst="ellipse">
-            <a:avLst/>
-          </a:prstGeom>
-          <a:solidFill>
-            <a:srgbClr val="C6F432"/>
-          </a:solidFill>
-          <a:ln w="12700">
-            <a:solidFill>
-              <a:srgbClr val="C6F432"/>
-            </a:solidFill>
-            <a:prstDash val="solid"/>
-          </a:ln>
-        </p:spPr>
-      </p:sp>
-      <p:sp>
-        <p:nvSpPr>
-          <p:cNvPr id="24" name="Text 22"/>
-          <p:cNvSpPr txBox="1"/>
-          <p:nvPr/>
-        </p:nvSpPr>
-        <p:spPr>
-          <a:xfrm>
-            <a:off x="6327648" y="2331720"/>
-            <a:ext cx="594360" cy="594360"/>
-          </a:xfrm>
-          <a:prstGeom prst="rect">
-            <a:avLst/>
-          </a:prstGeom>
-          <a:noFill/>
-          <a:ln/>
-        </p:spPr>
-        <p:txBody>
-          <a:bodyPr wrap="square" lIns="0" tIns="0" rIns="0" bIns="0" rtlCol="0" anchor="ctr"/>
-          <a:lstStyle/>
-          <a:p>
-            <a:pPr algn="ctr" indent="0" marL="0">
-              <a:buNone/>
-            </a:pPr>
-            <a:r>
-              <a:rPr lang="en-US" sz="700" b="1" dirty="0">
-                <a:solidFill>
-                  <a:srgbClr val="232323"/>
-                </a:solidFill>
-                <a:latin typeface="Malgun Gothic" pitchFamily="34" charset="0"/>
-                <a:ea typeface="Malgun Gothic" pitchFamily="34" charset="-122"/>
-                <a:cs typeface="Malgun Gothic" pitchFamily="34" charset="-120"/>
-              </a:rPr>
-              <a:t>3</a:t>
-            </a:r>
-            <a:endParaRPr lang="en-US" sz="700" dirty="0"/>
-          </a:p>
-          <a:p>
-            <a:pPr algn="ctr" indent="0" marL="0">
-              <a:buNone/>
-            </a:pPr>
-            <a:r>
-              <a:rPr lang="en-US" sz="700" b="1" dirty="0">
-                <a:solidFill>
-                  <a:srgbClr val="232323"/>
-                </a:solidFill>
-                <a:latin typeface="Malgun Gothic" pitchFamily="34" charset="0"/>
-                <a:ea typeface="Malgun Gothic" pitchFamily="34" charset="-122"/>
-                <a:cs typeface="Malgun Gothic" pitchFamily="34" charset="-120"/>
-              </a:rPr>
-              <a:t>넣기</a:t>
-            </a:r>
-            <a:endParaRPr lang="en-US" sz="700" dirty="0"/>
-          </a:p>
-        </p:txBody>
-      </p:sp>
-      <p:sp>
-        <p:nvSpPr>
-          <p:cNvPr id="25" name="Shape 23"/>
-          <p:cNvSpPr/>
-          <p:nvPr/>
-        </p:nvSpPr>
-        <p:spPr>
-          <a:xfrm>
-            <a:off x="4681728" y="3154680"/>
-            <a:ext cx="2286000" cy="1280160"/>
+            <a:off x="4681728" y="2103120"/>
+            <a:ext cx="2286000" cy="1051560"/>
           </a:xfrm>
           <a:prstGeom prst="roundRect">
             <a:avLst>
-              <a:gd name="adj" fmla="val 2143"/>
+              <a:gd name="adj" fmla="val 2609"/>
             </a:avLst>
           </a:prstGeom>
           <a:solidFill>
@@ -6887,14 +7092,229 @@
       </p:sp>
       <p:sp>
         <p:nvSpPr>
+          <p:cNvPr id="20" name="Text 18"/>
+          <p:cNvSpPr txBox="1"/>
+          <p:nvPr/>
+        </p:nvSpPr>
+        <p:spPr>
+          <a:xfrm>
+            <a:off x="4718304" y="2103120"/>
+            <a:ext cx="2212848" cy="1051560"/>
+          </a:xfrm>
+          <a:prstGeom prst="rect">
+            <a:avLst/>
+          </a:prstGeom>
+          <a:noFill/>
+          <a:ln/>
+        </p:spPr>
+        <p:txBody>
+          <a:bodyPr wrap="square" lIns="0" tIns="0" rIns="0" bIns="0" rtlCol="0" anchor="ctr"/>
+          <a:lstStyle/>
+          <a:p>
+            <a:pPr algn="ctr" indent="0" marL="0">
+              <a:buNone/>
+            </a:pPr>
+            <a:r>
+              <a:rPr lang="en-US" sz="800" dirty="0">
+                <a:solidFill>
+                  <a:srgbClr val="232323"/>
+                </a:solidFill>
+                <a:latin typeface="Malgun Gothic" pitchFamily="34" charset="0"/>
+                <a:ea typeface="Malgun Gothic" pitchFamily="34" charset="-122"/>
+                <a:cs typeface="Malgun Gothic" pitchFamily="34" charset="-120"/>
+              </a:rPr>
+              <a:t>D3 족부 모형 옆</a:t>
+            </a:r>
+            <a:endParaRPr lang="en-US" sz="800" dirty="0"/>
+          </a:p>
+          <a:p>
+            <a:pPr algn="ctr" indent="0" marL="0">
+              <a:buNone/>
+            </a:pPr>
+            <a:r>
+              <a:rPr lang="en-US" sz="800" dirty="0">
+                <a:solidFill>
+                  <a:srgbClr val="232323"/>
+                </a:solidFill>
+                <a:latin typeface="Malgun Gothic" pitchFamily="34" charset="0"/>
+                <a:ea typeface="Malgun Gothic" pitchFamily="34" charset="-122"/>
+                <a:cs typeface="Malgun Gothic" pitchFamily="34" charset="-120"/>
+              </a:rPr>
+              <a:t>반굽 아치가득 인솔</a:t>
+            </a:r>
+            <a:endParaRPr lang="en-US" sz="800" dirty="0"/>
+          </a:p>
+        </p:txBody>
+      </p:sp>
+      <p:sp>
+        <p:nvSpPr>
+          <p:cNvPr id="21" name="Shape 19"/>
+          <p:cNvSpPr/>
+          <p:nvPr/>
+        </p:nvSpPr>
+        <p:spPr>
+          <a:xfrm>
+            <a:off x="4681728" y="3227832"/>
+            <a:ext cx="2286000" cy="237744"/>
+          </a:xfrm>
+          <a:prstGeom prst="roundRect">
+            <a:avLst>
+              <a:gd name="adj" fmla="val 11538"/>
+            </a:avLst>
+          </a:prstGeom>
+          <a:solidFill>
+            <a:srgbClr val="FFFFFF"/>
+          </a:solidFill>
+          <a:ln w="9525">
+            <a:solidFill>
+              <a:srgbClr val="D9D6CF"/>
+            </a:solidFill>
+            <a:prstDash val="solid"/>
+          </a:ln>
+        </p:spPr>
+      </p:sp>
+      <p:sp>
+        <p:nvSpPr>
+          <p:cNvPr id="22" name="Text 20"/>
+          <p:cNvSpPr txBox="1"/>
+          <p:nvPr/>
+        </p:nvSpPr>
+        <p:spPr>
+          <a:xfrm>
+            <a:off x="4718304" y="3227832"/>
+            <a:ext cx="2212848" cy="237744"/>
+          </a:xfrm>
+          <a:prstGeom prst="rect">
+            <a:avLst/>
+          </a:prstGeom>
+          <a:noFill/>
+          <a:ln/>
+        </p:spPr>
+        <p:txBody>
+          <a:bodyPr wrap="square" lIns="0" tIns="0" rIns="0" bIns="0" rtlCol="0" anchor="ctr"/>
+          <a:lstStyle/>
+          <a:p>
+            <a:pPr algn="l" indent="0" marL="0">
+              <a:buNone/>
+            </a:pPr>
+            <a:r>
+              <a:rPr lang="en-US" sz="700" dirty="0">
+                <a:solidFill>
+                  <a:srgbClr val="232323"/>
+                </a:solidFill>
+                <a:latin typeface="Malgun Gothic" pitchFamily="34" charset="0"/>
+                <a:ea typeface="Malgun Gothic" pitchFamily="34" charset="-122"/>
+                <a:cs typeface="Malgun Gothic" pitchFamily="34" charset="-120"/>
+              </a:rPr>
+              <a:t>① 아치 라인을 채우는 형태</a:t>
+            </a:r>
+            <a:endParaRPr lang="en-US" sz="700" dirty="0"/>
+          </a:p>
+        </p:txBody>
+      </p:sp>
+      <p:sp>
+        <p:nvSpPr>
+          <p:cNvPr id="23" name="Shape 21"/>
+          <p:cNvSpPr/>
+          <p:nvPr/>
+        </p:nvSpPr>
+        <p:spPr>
+          <a:xfrm>
+            <a:off x="4681728" y="3502152"/>
+            <a:ext cx="2286000" cy="237744"/>
+          </a:xfrm>
+          <a:prstGeom prst="roundRect">
+            <a:avLst>
+              <a:gd name="adj" fmla="val 11538"/>
+            </a:avLst>
+          </a:prstGeom>
+          <a:solidFill>
+            <a:srgbClr val="FFFFFF"/>
+          </a:solidFill>
+          <a:ln w="9525">
+            <a:solidFill>
+              <a:srgbClr val="D9D6CF"/>
+            </a:solidFill>
+            <a:prstDash val="solid"/>
+          </a:ln>
+        </p:spPr>
+      </p:sp>
+      <p:sp>
+        <p:nvSpPr>
+          <p:cNvPr id="24" name="Text 22"/>
+          <p:cNvSpPr txBox="1"/>
+          <p:nvPr/>
+        </p:nvSpPr>
+        <p:spPr>
+          <a:xfrm>
+            <a:off x="4718304" y="3502152"/>
+            <a:ext cx="2212848" cy="237744"/>
+          </a:xfrm>
+          <a:prstGeom prst="rect">
+            <a:avLst/>
+          </a:prstGeom>
+          <a:noFill/>
+          <a:ln/>
+        </p:spPr>
+        <p:txBody>
+          <a:bodyPr wrap="square" lIns="0" tIns="0" rIns="0" bIns="0" rtlCol="0" anchor="ctr"/>
+          <a:lstStyle/>
+          <a:p>
+            <a:pPr algn="l" indent="0" marL="0">
+              <a:buNone/>
+            </a:pPr>
+            <a:r>
+              <a:rPr lang="en-US" sz="700" dirty="0">
+                <a:solidFill>
+                  <a:srgbClr val="232323"/>
+                </a:solidFill>
+                <a:latin typeface="Malgun Gothic" pitchFamily="34" charset="0"/>
+                <a:ea typeface="Malgun Gothic" pitchFamily="34" charset="-122"/>
+                <a:cs typeface="Malgun Gothic" pitchFamily="34" charset="-120"/>
+              </a:rPr>
+              <a:t>② 뒤꿈치 컵 깊이</a:t>
+            </a:r>
+            <a:endParaRPr lang="en-US" sz="700" dirty="0"/>
+          </a:p>
+        </p:txBody>
+      </p:sp>
+      <p:sp>
+        <p:nvSpPr>
+          <p:cNvPr id="25" name="Shape 23"/>
+          <p:cNvSpPr/>
+          <p:nvPr/>
+        </p:nvSpPr>
+        <p:spPr>
+          <a:xfrm>
+            <a:off x="4681728" y="3776472"/>
+            <a:ext cx="2286000" cy="237744"/>
+          </a:xfrm>
+          <a:prstGeom prst="roundRect">
+            <a:avLst>
+              <a:gd name="adj" fmla="val 11538"/>
+            </a:avLst>
+          </a:prstGeom>
+          <a:solidFill>
+            <a:srgbClr val="FFFFFF"/>
+          </a:solidFill>
+          <a:ln w="9525">
+            <a:solidFill>
+              <a:srgbClr val="D9D6CF"/>
+            </a:solidFill>
+            <a:prstDash val="solid"/>
+          </a:ln>
+        </p:spPr>
+      </p:sp>
+      <p:sp>
+        <p:nvSpPr>
           <p:cNvPr id="26" name="Text 24"/>
           <p:cNvSpPr txBox="1"/>
           <p:nvPr/>
         </p:nvSpPr>
         <p:spPr>
           <a:xfrm>
-            <a:off x="4718304" y="3154680"/>
-            <a:ext cx="2212848" cy="1280160"/>
+            <a:off x="4718304" y="3776472"/>
+            <a:ext cx="2212848" cy="237744"/>
           </a:xfrm>
           <a:prstGeom prst="rect">
             <a:avLst/>
@@ -6906,38 +7326,21 @@
           <a:bodyPr wrap="square" lIns="0" tIns="0" rIns="0" bIns="0" rtlCol="0" anchor="ctr"/>
           <a:lstStyle/>
           <a:p>
-            <a:pPr algn="ctr" indent="0" marL="0">
-              <a:buNone/>
-            </a:pPr>
-            <a:r>
-              <a:rPr lang="en-US" sz="800" dirty="0">
-                <a:solidFill>
-                  <a:srgbClr val="232323"/>
-                </a:solidFill>
-                <a:latin typeface="Malgun Gothic" pitchFamily="34" charset="0"/>
-                <a:ea typeface="Malgun Gothic" pitchFamily="34" charset="-122"/>
-                <a:cs typeface="Malgun Gothic" pitchFamily="34" charset="-120"/>
-              </a:rPr>
-              <a:t>기존 깔창 위에 겹쳐</a:t>
-            </a:r>
-            <a:endParaRPr lang="en-US" sz="800" dirty="0"/>
-          </a:p>
-          <a:p>
-            <a:pPr algn="ctr" indent="0" marL="0">
-              <a:buNone/>
-            </a:pPr>
-            <a:r>
-              <a:rPr lang="en-US" sz="800" dirty="0">
-                <a:solidFill>
-                  <a:srgbClr val="232323"/>
-                </a:solidFill>
-                <a:latin typeface="Malgun Gothic" pitchFamily="34" charset="0"/>
-                <a:ea typeface="Malgun Gothic" pitchFamily="34" charset="-122"/>
-                <a:cs typeface="Malgun Gothic" pitchFamily="34" charset="-120"/>
-              </a:rPr>
-              <a:t>길이 비교 사진</a:t>
-            </a:r>
-            <a:endParaRPr lang="en-US" sz="800" dirty="0"/>
+            <a:pPr algn="l" indent="0" marL="0">
+              <a:buNone/>
+            </a:pPr>
+            <a:r>
+              <a:rPr lang="en-US" sz="700" dirty="0">
+                <a:solidFill>
+                  <a:srgbClr val="232323"/>
+                </a:solidFill>
+                <a:latin typeface="Malgun Gothic" pitchFamily="34" charset="0"/>
+                <a:ea typeface="Malgun Gothic" pitchFamily="34" charset="-122"/>
+                <a:cs typeface="Malgun Gothic" pitchFamily="34" charset="-120"/>
+              </a:rPr>
+              <a:t>③ 반굽 길이 · 깔창 밑 겹쳐 쓰는 방식</a:t>
+            </a:r>
+            <a:endParaRPr lang="en-US" sz="700" dirty="0"/>
           </a:p>
         </p:txBody>
       </p:sp>
@@ -6949,8 +7352,8 @@
         </p:nvSpPr>
         <p:spPr>
           <a:xfrm>
-            <a:off x="4636008" y="4572000"/>
-            <a:ext cx="2377440" cy="411480"/>
+            <a:off x="4636008" y="4087368"/>
+            <a:ext cx="2377440" cy="594360"/>
           </a:xfrm>
           <a:prstGeom prst="rect">
             <a:avLst/>
@@ -6966,15 +7369,49 @@
               <a:buNone/>
             </a:pPr>
             <a:r>
-              <a:rPr lang="en-US" sz="700" dirty="0">
-                <a:solidFill>
-                  <a:srgbClr val="8A8A8A"/>
-                </a:solidFill>
-                <a:latin typeface="Malgun Gothic" pitchFamily="34" charset="0"/>
-                <a:ea typeface="Malgun Gothic" pitchFamily="34" charset="-122"/>
-                <a:cs typeface="Malgun Gothic" pitchFamily="34" charset="-120"/>
-              </a:rPr>
-              <a:t>[재단 가능 시] 앞부분을 조금씩 잘라 맞추세요</a:t>
+              <a:rPr lang="en-US" sz="700" b="1" dirty="0">
+                <a:solidFill>
+                  <a:srgbClr val="232323"/>
+                </a:solidFill>
+                <a:latin typeface="Malgun Gothic" pitchFamily="34" charset="0"/>
+                <a:ea typeface="Malgun Gothic" pitchFamily="34" charset="-122"/>
+                <a:cs typeface="Malgun Gothic" pitchFamily="34" charset="-120"/>
+              </a:rPr>
+              <a:t>"아치 라인을 채우는 형태와 뒤꿈치 컵 깊이,</a:t>
+            </a:r>
+            <a:endParaRPr lang="en-US" sz="700" dirty="0"/>
+          </a:p>
+          <a:p>
+            <a:pPr algn="ctr" indent="0" marL="0">
+              <a:buNone/>
+            </a:pPr>
+            <a:r>
+              <a:rPr lang="en-US" sz="700" b="1" dirty="0">
+                <a:solidFill>
+                  <a:srgbClr val="232323"/>
+                </a:solidFill>
+                <a:latin typeface="Malgun Gothic" pitchFamily="34" charset="0"/>
+                <a:ea typeface="Malgun Gothic" pitchFamily="34" charset="-122"/>
+                <a:cs typeface="Malgun Gothic" pitchFamily="34" charset="-120"/>
+              </a:rPr>
+              <a:t>기존 깔창 밑에 겹쳐 쓰는 방식을</a:t>
+            </a:r>
+            <a:endParaRPr lang="en-US" sz="700" dirty="0"/>
+          </a:p>
+          <a:p>
+            <a:pPr algn="ctr" indent="0" marL="0">
+              <a:buNone/>
+            </a:pPr>
+            <a:r>
+              <a:rPr lang="en-US" sz="700" b="1" dirty="0">
+                <a:solidFill>
+                  <a:srgbClr val="232323"/>
+                </a:solidFill>
+                <a:latin typeface="Malgun Gothic" pitchFamily="34" charset="0"/>
+                <a:ea typeface="Malgun Gothic" pitchFamily="34" charset="-122"/>
+                <a:cs typeface="Malgun Gothic" pitchFamily="34" charset="-120"/>
+              </a:rPr>
+              <a:t>직접 착용해 보고 의견을 드렸습니다."</a:t>
             </a:r>
             <a:endParaRPr lang="en-US" sz="700" dirty="0"/>
           </a:p>
@@ -6988,6 +7425,84 @@
         </p:nvSpPr>
         <p:spPr>
           <a:xfrm>
+            <a:off x="4636008" y="4709160"/>
+            <a:ext cx="2377440" cy="201168"/>
+          </a:xfrm>
+          <a:prstGeom prst="rect">
+            <a:avLst/>
+          </a:prstGeom>
+          <a:noFill/>
+          <a:ln/>
+        </p:spPr>
+        <p:txBody>
+          <a:bodyPr wrap="square" lIns="0" tIns="0" rIns="0" bIns="0" rtlCol="0" anchor="ctr"/>
+          <a:lstStyle/>
+          <a:p>
+            <a:pPr algn="ctr" indent="0" marL="0">
+              <a:buNone/>
+            </a:pPr>
+            <a:r>
+              <a:rPr lang="en-US" sz="700" dirty="0">
+                <a:solidFill>
+                  <a:srgbClr val="232323"/>
+                </a:solidFill>
+                <a:latin typeface="Malgun Gothic" pitchFamily="34" charset="0"/>
+                <a:ea typeface="Malgun Gothic" pitchFamily="34" charset="-122"/>
+                <a:cs typeface="Malgun Gothic" pitchFamily="34" charset="-120"/>
+              </a:rPr>
+              <a:t>— 정형외과 전문의 이문훈</a:t>
+            </a:r>
+            <a:endParaRPr lang="en-US" sz="700" dirty="0"/>
+          </a:p>
+        </p:txBody>
+      </p:sp>
+      <p:sp>
+        <p:nvSpPr>
+          <p:cNvPr id="29" name="Text 27"/>
+          <p:cNvSpPr txBox="1"/>
+          <p:nvPr/>
+        </p:nvSpPr>
+        <p:spPr>
+          <a:xfrm>
+            <a:off x="4636008" y="4937760"/>
+            <a:ext cx="2377440" cy="274320"/>
+          </a:xfrm>
+          <a:prstGeom prst="rect">
+            <a:avLst/>
+          </a:prstGeom>
+          <a:noFill/>
+          <a:ln/>
+        </p:spPr>
+        <p:txBody>
+          <a:bodyPr wrap="square" lIns="0" tIns="0" rIns="0" bIns="0" rtlCol="0" anchor="ctr"/>
+          <a:lstStyle/>
+          <a:p>
+            <a:pPr algn="ctr" indent="0" marL="0">
+              <a:buNone/>
+            </a:pPr>
+            <a:r>
+              <a:rPr lang="en-US" sz="500" dirty="0">
+                <a:solidFill>
+                  <a:srgbClr val="8A8A8A"/>
+                </a:solidFill>
+                <a:latin typeface="Malgun Gothic" pitchFamily="34" charset="0"/>
+                <a:ea typeface="Malgun Gothic" pitchFamily="34" charset="-122"/>
+                <a:cs typeface="Malgun Gothic" pitchFamily="34" charset="-120"/>
+              </a:rPr>
+              <a:t>이문훈 원장은 ㈜알앤디메이커스 제품 설계 자문에 참여하고 자문료를 받았습니다.</a:t>
+            </a:r>
+            <a:endParaRPr lang="en-US" sz="500" dirty="0"/>
+          </a:p>
+        </p:txBody>
+      </p:sp>
+      <p:sp>
+        <p:nvSpPr>
+          <p:cNvPr id="30" name="Text 28"/>
+          <p:cNvSpPr txBox="1"/>
+          <p:nvPr/>
+        </p:nvSpPr>
+        <p:spPr>
+          <a:xfrm>
             <a:off x="4178808" y="5687568"/>
             <a:ext cx="3291840" cy="457200"/>
           </a:xfrm>
@@ -7013,7 +7528,7 @@
                 <a:ea typeface="Malgun Gothic" pitchFamily="34" charset="-122"/>
                 <a:cs typeface="Malgun Gothic" pitchFamily="34" charset="-120"/>
               </a:rPr>
-              <a:t>3스텝 사진</a:t>
+              <a:t>D3 컷 + 자문 포인트 3 + 인용 + 대가 표기</a:t>
             </a:r>
             <a:endParaRPr lang="en-US" sz="1000" dirty="0"/>
           </a:p>
@@ -7021,7 +7536,7 @@
       </p:sp>
       <p:sp>
         <p:nvSpPr>
-          <p:cNvPr id="29" name="Text 27"/>
+          <p:cNvPr id="31" name="Text 29"/>
           <p:cNvSpPr txBox="1"/>
           <p:nvPr/>
         </p:nvSpPr>
@@ -7055,7 +7570,7 @@
                 <a:ea typeface="Malgun Gothic" pitchFamily="34" charset="-122"/>
                 <a:cs typeface="Malgun Gothic" pitchFamily="34" charset="-120"/>
               </a:rPr>
-              <a:t>이렇게 넣으세요</a:t>
+              <a:t>정형외과 전문의가</a:t>
             </a:r>
             <a:endParaRPr lang="en-US" sz="1600" dirty="0"/>
           </a:p>
@@ -7067,15 +7582,15 @@
               <a:buNone/>
             </a:pPr>
             <a:r>
-              <a:rPr lang="en-US" sz="800" dirty="0">
-                <a:solidFill>
-                  <a:srgbClr val="232323"/>
-                </a:solidFill>
-                <a:latin typeface="Malgun Gothic" pitchFamily="34" charset="0"/>
-                <a:ea typeface="Malgun Gothic" pitchFamily="34" charset="-122"/>
-                <a:cs typeface="Malgun Gothic" pitchFamily="34" charset="-120"/>
-              </a:rPr>
-              <a:t> </a:t>
+              <a:rPr lang="en-US" sz="1600" b="1" dirty="0">
+                <a:solidFill>
+                  <a:srgbClr val="232323"/>
+                </a:solidFill>
+                <a:latin typeface="Malgun Gothic" pitchFamily="34" charset="0"/>
+                <a:ea typeface="Malgun Gothic" pitchFamily="34" charset="-122"/>
+                <a:cs typeface="Malgun Gothic" pitchFamily="34" charset="-120"/>
+              </a:rPr>
+              <a:t>직접 신어 보고</a:t>
             </a:r>
             <a:endParaRPr lang="en-US" sz="1600" dirty="0"/>
           </a:p>
@@ -7087,15 +7602,15 @@
               <a:buNone/>
             </a:pPr>
             <a:r>
-              <a:rPr lang="en-US" sz="1400" dirty="0">
-                <a:solidFill>
-                  <a:srgbClr val="232323"/>
-                </a:solidFill>
-                <a:latin typeface="Malgun Gothic" pitchFamily="34" charset="0"/>
-                <a:ea typeface="Malgun Gothic" pitchFamily="34" charset="-122"/>
-                <a:cs typeface="Malgun Gothic" pitchFamily="34" charset="-120"/>
-              </a:rPr>
-              <a:t>1 기존 깔창을 빼고</a:t>
+              <a:rPr lang="en-US" sz="1600" b="1" dirty="0">
+                <a:solidFill>
+                  <a:srgbClr val="232323"/>
+                </a:solidFill>
+                <a:latin typeface="Malgun Gothic" pitchFamily="34" charset="0"/>
+                <a:ea typeface="Malgun Gothic" pitchFamily="34" charset="-122"/>
+                <a:cs typeface="Malgun Gothic" pitchFamily="34" charset="-120"/>
+              </a:rPr>
+              <a:t>의견을 주었습니다</a:t>
             </a:r>
             <a:endParaRPr lang="en-US" sz="1600" dirty="0"/>
           </a:p>
@@ -7107,15 +7622,15 @@
               <a:buNone/>
             </a:pPr>
             <a:r>
-              <a:rPr lang="en-US" sz="1400" dirty="0">
-                <a:solidFill>
-                  <a:srgbClr val="232323"/>
-                </a:solidFill>
-                <a:latin typeface="Malgun Gothic" pitchFamily="34" charset="0"/>
-                <a:ea typeface="Malgun Gothic" pitchFamily="34" charset="-122"/>
-                <a:cs typeface="Malgun Gothic" pitchFamily="34" charset="-120"/>
-              </a:rPr>
-              <a:t>2 길이를 대보고</a:t>
+              <a:rPr lang="en-US" sz="800" dirty="0">
+                <a:solidFill>
+                  <a:srgbClr val="232323"/>
+                </a:solidFill>
+                <a:latin typeface="Malgun Gothic" pitchFamily="34" charset="0"/>
+                <a:ea typeface="Malgun Gothic" pitchFamily="34" charset="-122"/>
+                <a:cs typeface="Malgun Gothic" pitchFamily="34" charset="-120"/>
+              </a:rPr>
+              <a:t> </a:t>
             </a:r>
             <a:endParaRPr lang="en-US" sz="1600" dirty="0"/>
           </a:p>
@@ -7135,15 +7650,84 @@
                 <a:ea typeface="Malgun Gothic" pitchFamily="34" charset="-122"/>
                 <a:cs typeface="Malgun Gothic" pitchFamily="34" charset="-120"/>
               </a:rPr>
-              <a:t>3 신발 속에 넣으면 끝</a:t>
+              <a:t>아치 라인을 채우는 형태</a:t>
             </a:r>
             <a:endParaRPr lang="en-US" sz="1600" dirty="0"/>
           </a:p>
-        </p:txBody>
-      </p:sp>
-      <p:sp>
-        <p:nvSpPr>
-          <p:cNvPr id="30" name="Shape 28"/>
+          <a:p>
+            <a:pPr algn="ctr" indent="0" marL="0">
+              <a:lnSpc>
+                <a:spcPct val="125000"/>
+              </a:lnSpc>
+              <a:buNone/>
+            </a:pPr>
+            <a:r>
+              <a:rPr lang="en-US" sz="1400" dirty="0">
+                <a:solidFill>
+                  <a:srgbClr val="232323"/>
+                </a:solidFill>
+                <a:latin typeface="Malgun Gothic" pitchFamily="34" charset="0"/>
+                <a:ea typeface="Malgun Gothic" pitchFamily="34" charset="-122"/>
+                <a:cs typeface="Malgun Gothic" pitchFamily="34" charset="-120"/>
+              </a:rPr>
+              <a:t>뒤꿈치 컵 깊이</a:t>
+            </a:r>
+            <a:endParaRPr lang="en-US" sz="1600" dirty="0"/>
+          </a:p>
+          <a:p>
+            <a:pPr algn="ctr" indent="0" marL="0">
+              <a:lnSpc>
+                <a:spcPct val="125000"/>
+              </a:lnSpc>
+              <a:buNone/>
+            </a:pPr>
+            <a:r>
+              <a:rPr lang="en-US" sz="1400" dirty="0">
+                <a:solidFill>
+                  <a:srgbClr val="232323"/>
+                </a:solidFill>
+                <a:latin typeface="Malgun Gothic" pitchFamily="34" charset="0"/>
+                <a:ea typeface="Malgun Gothic" pitchFamily="34" charset="-122"/>
+                <a:cs typeface="Malgun Gothic" pitchFamily="34" charset="-120"/>
+              </a:rPr>
+              <a:t>깔창 밑에 겹쳐 쓰는 방식</a:t>
+            </a:r>
+            <a:endParaRPr lang="en-US" sz="1600" dirty="0"/>
+          </a:p>
+          <a:p>
+            <a:pPr algn="ctr" indent="0" marL="0">
+              <a:lnSpc>
+                <a:spcPct val="125000"/>
+              </a:lnSpc>
+              <a:buNone/>
+            </a:pPr>
+            <a:endParaRPr lang="en-US" sz="1600" dirty="0"/>
+          </a:p>
+          <a:p>
+            <a:pPr algn="ctr" indent="0" marL="0">
+              <a:lnSpc>
+                <a:spcPct val="125000"/>
+              </a:lnSpc>
+              <a:buNone/>
+            </a:pPr>
+            <a:r>
+              <a:rPr lang="en-US" sz="1400" dirty="0">
+                <a:solidFill>
+                  <a:srgbClr val="232323"/>
+                </a:solidFill>
+                <a:latin typeface="Malgun Gothic" pitchFamily="34" charset="0"/>
+                <a:ea typeface="Malgun Gothic" pitchFamily="34" charset="-122"/>
+                <a:cs typeface="Malgun Gothic" pitchFamily="34" charset="-120"/>
+              </a:rPr>
+              <a:t>— 정형외과 전문의 이문훈</a:t>
+            </a:r>
+            <a:endParaRPr lang="en-US" sz="1600" dirty="0"/>
+          </a:p>
+        </p:txBody>
+      </p:sp>
+      <p:sp>
+        <p:nvSpPr>
+          <p:cNvPr id="32" name="Shape 30"/>
           <p:cNvSpPr/>
           <p:nvPr/>
         </p:nvSpPr>
@@ -7170,7 +7754,7 @@
       </p:sp>
       <p:sp>
         <p:nvSpPr>
-          <p:cNvPr id="31" name="Text 29"/>
+          <p:cNvPr id="33" name="Text 31"/>
           <p:cNvSpPr txBox="1"/>
           <p:nvPr/>
         </p:nvSpPr>
@@ -7201,7 +7785,7 @@
                 <a:ea typeface="Malgun Gothic" pitchFamily="34" charset="-122"/>
                 <a:cs typeface="Malgun Gothic" pitchFamily="34" charset="-120"/>
               </a:rPr>
-              <a:t>⚠ 🔒 재단 가능 여부 확인 (고시 취급주의 ⑤와 일치)</a:t>
+              <a:t>⚠ 자문 = 형태·착용 방식 · 효능(피로·교정·평발) ✗ · 원장 검수본만</a:t>
             </a:r>
             <a:endParaRPr lang="en-US" sz="900" dirty="0"/>
           </a:p>
@@ -7256,11 +7840,11 @@
             </a:avLst>
           </a:prstGeom>
           <a:solidFill>
-            <a:srgbClr val="0D0D0D"/>
+            <a:srgbClr val="232323"/>
           </a:solidFill>
           <a:ln w="12700">
             <a:solidFill>
-              <a:srgbClr val="0D0D0D"/>
+              <a:srgbClr val="232323"/>
             </a:solidFill>
             <a:prstDash val="solid"/>
           </a:ln>
@@ -7299,7 +7883,7 @@
                 <a:ea typeface="Malgun Gothic" pitchFamily="34" charset="-122"/>
                 <a:cs typeface="Malgun Gothic" pitchFamily="34" charset="-120"/>
               </a:rPr>
-              <a:t>구매</a:t>
+              <a:t>제품</a:t>
             </a:r>
             <a:endParaRPr lang="en-US" sz="1000" dirty="0"/>
           </a:p>
@@ -7338,7 +7922,7 @@
                 <a:ea typeface="Malgun Gothic" pitchFamily="34" charset="-122"/>
                 <a:cs typeface="Malgun Gothic" pitchFamily="34" charset="-120"/>
               </a:rPr>
-              <a:t>ICUT 11 / 14   사이즈 M · L 🔒</a:t>
+              <a:t>ICUT 11 / 15   이렇게 쓰세요 — 깔창 밑에</a:t>
             </a:r>
             <a:endParaRPr lang="en-US" sz="1600" dirty="0"/>
           </a:p>
@@ -7713,7 +8297,7 @@
                 <a:ea typeface="Malgun Gothic" pitchFamily="34" charset="-122"/>
                 <a:cs typeface="Malgun Gothic" pitchFamily="34" charset="-120"/>
               </a:rPr>
-              <a:t>슈니엘</a:t>
+              <a:t>반굽 인솔</a:t>
             </a:r>
             <a:pPr indent="0" marL="0">
               <a:spcAft>
@@ -7730,7 +8314,7 @@
                 <a:ea typeface="Malgun Gothic" pitchFamily="34" charset="-122"/>
                 <a:cs typeface="Malgun Gothic" pitchFamily="34" charset="-120"/>
               </a:rPr>
-              <a:t>  사이즈표</a:t>
+              <a:t>  겹쳐 쓰기</a:t>
             </a:r>
             <a:endParaRPr lang="en-US" sz="1100" dirty="0"/>
           </a:p>
@@ -7750,7 +8334,7 @@
                 <a:ea typeface="Malgun Gothic" pitchFamily="34" charset="-122"/>
                 <a:cs typeface="Malgun Gothic" pitchFamily="34" charset="-120"/>
               </a:rPr>
-              <a:t>발길이 범위 표</a:t>
+              <a:t>쓰던 깔창 들기 → 밑에 깔기 → 다시 덮기</a:t>
             </a:r>
             <a:endParaRPr lang="en-US" sz="1100" dirty="0"/>
           </a:p>
@@ -7770,7 +8354,7 @@
                 <a:ea typeface="Malgun Gothic" pitchFamily="34" charset="-122"/>
                 <a:cs typeface="Malgun Gothic" pitchFamily="34" charset="-120"/>
               </a:rPr>
-              <a:t>→ M/L 2칸 표</a:t>
+              <a:t>→ 재단 불필요</a:t>
             </a:r>
             <a:endParaRPr lang="en-US" sz="1100" dirty="0"/>
           </a:p>
@@ -7809,7 +8393,7 @@
                 <a:ea typeface="Malgun Gothic" pitchFamily="34" charset="-122"/>
                 <a:cs typeface="Malgun Gothic" pitchFamily="34" charset="-120"/>
               </a:rPr>
-              <a:t>REF · 슈니엘 #23 FAQ</a:t>
+              <a:t>REF · 사용 3스텝</a:t>
             </a:r>
             <a:endParaRPr lang="en-US" sz="1000" dirty="0"/>
           </a:p>
@@ -7848,13 +8432,11 @@
         </p:nvSpPr>
         <p:spPr>
           <a:xfrm>
-            <a:off x="4681728" y="2240280"/>
-            <a:ext cx="1097280" cy="1097280"/>
-          </a:xfrm>
-          <a:prstGeom prst="roundRect">
-            <a:avLst>
-              <a:gd name="adj" fmla="val 2500"/>
-            </a:avLst>
+            <a:off x="4727448" y="2240280"/>
+            <a:ext cx="594360" cy="594360"/>
+          </a:xfrm>
+          <a:prstGeom prst="ellipse">
+            <a:avLst/>
           </a:prstGeom>
           <a:solidFill>
             <a:srgbClr val="C6F432"/>
@@ -7875,8 +8457,8 @@
         </p:nvSpPr>
         <p:spPr>
           <a:xfrm>
-            <a:off x="4718304" y="2240280"/>
-            <a:ext cx="1024128" cy="1097280"/>
+            <a:off x="4727448" y="2240280"/>
+            <a:ext cx="594360" cy="594360"/>
           </a:xfrm>
           <a:prstGeom prst="rect">
             <a:avLst/>
@@ -7892,34 +8474,51 @@
               <a:buNone/>
             </a:pPr>
             <a:r>
-              <a:rPr lang="en-US" sz="800" b="1" dirty="0">
-                <a:solidFill>
-                  <a:srgbClr val="232323"/>
-                </a:solidFill>
-                <a:latin typeface="Malgun Gothic" pitchFamily="34" charset="0"/>
-                <a:ea typeface="Malgun Gothic" pitchFamily="34" charset="-122"/>
-                <a:cs typeface="Malgun Gothic" pitchFamily="34" charset="-120"/>
-              </a:rPr>
-              <a:t>M</a:t>
-            </a:r>
-            <a:endParaRPr lang="en-US" sz="800" dirty="0"/>
-          </a:p>
-          <a:p>
-            <a:pPr algn="ctr" indent="0" marL="0">
-              <a:buNone/>
-            </a:pPr>
-            <a:r>
-              <a:rPr lang="en-US" sz="800" b="1" dirty="0">
-                <a:solidFill>
-                  <a:srgbClr val="232323"/>
-                </a:solidFill>
-                <a:latin typeface="Malgun Gothic" pitchFamily="34" charset="0"/>
-                <a:ea typeface="Malgun Gothic" pitchFamily="34" charset="-122"/>
-                <a:cs typeface="Malgun Gothic" pitchFamily="34" charset="-120"/>
-              </a:rPr>
-              <a:t>[○○○~○○○mm]</a:t>
-            </a:r>
-            <a:endParaRPr lang="en-US" sz="800" dirty="0"/>
+              <a:rPr lang="en-US" sz="600" b="1" dirty="0">
+                <a:solidFill>
+                  <a:srgbClr val="232323"/>
+                </a:solidFill>
+                <a:latin typeface="Malgun Gothic" pitchFamily="34" charset="0"/>
+                <a:ea typeface="Malgun Gothic" pitchFamily="34" charset="-122"/>
+                <a:cs typeface="Malgun Gothic" pitchFamily="34" charset="-120"/>
+              </a:rPr>
+              <a:t>1</a:t>
+            </a:r>
+            <a:endParaRPr lang="en-US" sz="600" dirty="0"/>
+          </a:p>
+          <a:p>
+            <a:pPr algn="ctr" indent="0" marL="0">
+              <a:buNone/>
+            </a:pPr>
+            <a:r>
+              <a:rPr lang="en-US" sz="600" b="1" dirty="0">
+                <a:solidFill>
+                  <a:srgbClr val="232323"/>
+                </a:solidFill>
+                <a:latin typeface="Malgun Gothic" pitchFamily="34" charset="0"/>
+                <a:ea typeface="Malgun Gothic" pitchFamily="34" charset="-122"/>
+                <a:cs typeface="Malgun Gothic" pitchFamily="34" charset="-120"/>
+              </a:rPr>
+              <a:t>깔창</a:t>
+            </a:r>
+            <a:endParaRPr lang="en-US" sz="600" dirty="0"/>
+          </a:p>
+          <a:p>
+            <a:pPr algn="ctr" indent="0" marL="0">
+              <a:buNone/>
+            </a:pPr>
+            <a:r>
+              <a:rPr lang="en-US" sz="600" b="1" dirty="0">
+                <a:solidFill>
+                  <a:srgbClr val="232323"/>
+                </a:solidFill>
+                <a:latin typeface="Malgun Gothic" pitchFamily="34" charset="0"/>
+                <a:ea typeface="Malgun Gothic" pitchFamily="34" charset="-122"/>
+                <a:cs typeface="Malgun Gothic" pitchFamily="34" charset="-120"/>
+              </a:rPr>
+              <a:t>들기</a:t>
+            </a:r>
+            <a:endParaRPr lang="en-US" sz="600" dirty="0"/>
           </a:p>
         </p:txBody>
       </p:sp>
@@ -7931,13 +8530,11 @@
         </p:nvSpPr>
         <p:spPr>
           <a:xfrm>
-            <a:off x="5870448" y="2240280"/>
-            <a:ext cx="1097280" cy="1097280"/>
-          </a:xfrm>
-          <a:prstGeom prst="roundRect">
-            <a:avLst>
-              <a:gd name="adj" fmla="val 2500"/>
-            </a:avLst>
+            <a:off x="5532120" y="2240280"/>
+            <a:ext cx="594360" cy="594360"/>
+          </a:xfrm>
+          <a:prstGeom prst="ellipse">
+            <a:avLst/>
           </a:prstGeom>
           <a:solidFill>
             <a:srgbClr val="C6F432"/>
@@ -7958,8 +8555,8 @@
         </p:nvSpPr>
         <p:spPr>
           <a:xfrm>
-            <a:off x="5907024" y="2240280"/>
-            <a:ext cx="1024128" cy="1097280"/>
+            <a:off x="5532120" y="2240280"/>
+            <a:ext cx="594360" cy="594360"/>
           </a:xfrm>
           <a:prstGeom prst="rect">
             <a:avLst/>
@@ -7975,34 +8572,51 @@
               <a:buNone/>
             </a:pPr>
             <a:r>
-              <a:rPr lang="en-US" sz="800" b="1" dirty="0">
-                <a:solidFill>
-                  <a:srgbClr val="232323"/>
-                </a:solidFill>
-                <a:latin typeface="Malgun Gothic" pitchFamily="34" charset="0"/>
-                <a:ea typeface="Malgun Gothic" pitchFamily="34" charset="-122"/>
-                <a:cs typeface="Malgun Gothic" pitchFamily="34" charset="-120"/>
-              </a:rPr>
-              <a:t>L</a:t>
-            </a:r>
-            <a:endParaRPr lang="en-US" sz="800" dirty="0"/>
-          </a:p>
-          <a:p>
-            <a:pPr algn="ctr" indent="0" marL="0">
-              <a:buNone/>
-            </a:pPr>
-            <a:r>
-              <a:rPr lang="en-US" sz="800" b="1" dirty="0">
-                <a:solidFill>
-                  <a:srgbClr val="232323"/>
-                </a:solidFill>
-                <a:latin typeface="Malgun Gothic" pitchFamily="34" charset="0"/>
-                <a:ea typeface="Malgun Gothic" pitchFamily="34" charset="-122"/>
-                <a:cs typeface="Malgun Gothic" pitchFamily="34" charset="-120"/>
-              </a:rPr>
-              <a:t>[○○○~○○○mm]</a:t>
-            </a:r>
-            <a:endParaRPr lang="en-US" sz="800" dirty="0"/>
+              <a:rPr lang="en-US" sz="600" b="1" dirty="0">
+                <a:solidFill>
+                  <a:srgbClr val="232323"/>
+                </a:solidFill>
+                <a:latin typeface="Malgun Gothic" pitchFamily="34" charset="0"/>
+                <a:ea typeface="Malgun Gothic" pitchFamily="34" charset="-122"/>
+                <a:cs typeface="Malgun Gothic" pitchFamily="34" charset="-120"/>
+              </a:rPr>
+              <a:t>2</a:t>
+            </a:r>
+            <a:endParaRPr lang="en-US" sz="600" dirty="0"/>
+          </a:p>
+          <a:p>
+            <a:pPr algn="ctr" indent="0" marL="0">
+              <a:buNone/>
+            </a:pPr>
+            <a:r>
+              <a:rPr lang="en-US" sz="600" b="1" dirty="0">
+                <a:solidFill>
+                  <a:srgbClr val="232323"/>
+                </a:solidFill>
+                <a:latin typeface="Malgun Gothic" pitchFamily="34" charset="0"/>
+                <a:ea typeface="Malgun Gothic" pitchFamily="34" charset="-122"/>
+                <a:cs typeface="Malgun Gothic" pitchFamily="34" charset="-120"/>
+              </a:rPr>
+              <a:t>뒤꿈치에</a:t>
+            </a:r>
+            <a:endParaRPr lang="en-US" sz="600" dirty="0"/>
+          </a:p>
+          <a:p>
+            <a:pPr algn="ctr" indent="0" marL="0">
+              <a:buNone/>
+            </a:pPr>
+            <a:r>
+              <a:rPr lang="en-US" sz="600" b="1" dirty="0">
+                <a:solidFill>
+                  <a:srgbClr val="232323"/>
+                </a:solidFill>
+                <a:latin typeface="Malgun Gothic" pitchFamily="34" charset="0"/>
+                <a:ea typeface="Malgun Gothic" pitchFamily="34" charset="-122"/>
+                <a:cs typeface="Malgun Gothic" pitchFamily="34" charset="-120"/>
+              </a:rPr>
+              <a:t>맞춰 깔기</a:t>
+            </a:r>
+            <a:endParaRPr lang="en-US" sz="600" dirty="0"/>
           </a:p>
         </p:txBody>
       </p:sp>
@@ -8014,20 +8628,18 @@
         </p:nvSpPr>
         <p:spPr>
           <a:xfrm>
-            <a:off x="4681728" y="3520440"/>
-            <a:ext cx="2286000" cy="384048"/>
-          </a:xfrm>
-          <a:prstGeom prst="roundRect">
-            <a:avLst>
-              <a:gd name="adj" fmla="val 7143"/>
-            </a:avLst>
+            <a:off x="6327648" y="2240280"/>
+            <a:ext cx="594360" cy="594360"/>
+          </a:xfrm>
+          <a:prstGeom prst="ellipse">
+            <a:avLst/>
           </a:prstGeom>
           <a:solidFill>
-            <a:srgbClr val="FFFFFF"/>
+            <a:srgbClr val="C6F432"/>
           </a:solidFill>
-          <a:ln w="9525">
+          <a:ln w="12700">
             <a:solidFill>
-              <a:srgbClr val="D9D6CF"/>
+              <a:srgbClr val="C6F432"/>
             </a:solidFill>
             <a:prstDash val="solid"/>
           </a:ln>
@@ -8041,8 +8653,8 @@
         </p:nvSpPr>
         <p:spPr>
           <a:xfrm>
-            <a:off x="4718304" y="3520440"/>
-            <a:ext cx="2212848" cy="384048"/>
+            <a:off x="6327648" y="2240280"/>
+            <a:ext cx="594360" cy="594360"/>
           </a:xfrm>
           <a:prstGeom prst="rect">
             <a:avLst/>
@@ -8054,21 +8666,55 @@
           <a:bodyPr wrap="square" lIns="0" tIns="0" rIns="0" bIns="0" rtlCol="0" anchor="ctr"/>
           <a:lstStyle/>
           <a:p>
-            <a:pPr algn="l" indent="0" marL="0">
-              <a:buNone/>
-            </a:pPr>
-            <a:r>
-              <a:rPr lang="en-US" sz="800" dirty="0">
-                <a:solidFill>
-                  <a:srgbClr val="232323"/>
-                </a:solidFill>
-                <a:latin typeface="Malgun Gothic" pitchFamily="34" charset="0"/>
-                <a:ea typeface="Malgun Gothic" pitchFamily="34" charset="-122"/>
-                <a:cs typeface="Malgun Gothic" pitchFamily="34" charset="-120"/>
-              </a:rPr>
-              <a:t>Q 사이즈가 애매하면?</a:t>
-            </a:r>
-            <a:endParaRPr lang="en-US" sz="800" dirty="0"/>
+            <a:pPr algn="ctr" indent="0" marL="0">
+              <a:buNone/>
+            </a:pPr>
+            <a:r>
+              <a:rPr lang="en-US" sz="600" b="1" dirty="0">
+                <a:solidFill>
+                  <a:srgbClr val="232323"/>
+                </a:solidFill>
+                <a:latin typeface="Malgun Gothic" pitchFamily="34" charset="0"/>
+                <a:ea typeface="Malgun Gothic" pitchFamily="34" charset="-122"/>
+                <a:cs typeface="Malgun Gothic" pitchFamily="34" charset="-120"/>
+              </a:rPr>
+              <a:t>3</a:t>
+            </a:r>
+            <a:endParaRPr lang="en-US" sz="600" dirty="0"/>
+          </a:p>
+          <a:p>
+            <a:pPr algn="ctr" indent="0" marL="0">
+              <a:buNone/>
+            </a:pPr>
+            <a:r>
+              <a:rPr lang="en-US" sz="600" b="1" dirty="0">
+                <a:solidFill>
+                  <a:srgbClr val="232323"/>
+                </a:solidFill>
+                <a:latin typeface="Malgun Gothic" pitchFamily="34" charset="0"/>
+                <a:ea typeface="Malgun Gothic" pitchFamily="34" charset="-122"/>
+                <a:cs typeface="Malgun Gothic" pitchFamily="34" charset="-120"/>
+              </a:rPr>
+              <a:t>깔창</a:t>
+            </a:r>
+            <a:endParaRPr lang="en-US" sz="600" dirty="0"/>
+          </a:p>
+          <a:p>
+            <a:pPr algn="ctr" indent="0" marL="0">
+              <a:buNone/>
+            </a:pPr>
+            <a:r>
+              <a:rPr lang="en-US" sz="600" b="1" dirty="0">
+                <a:solidFill>
+                  <a:srgbClr val="232323"/>
+                </a:solidFill>
+                <a:latin typeface="Malgun Gothic" pitchFamily="34" charset="0"/>
+                <a:ea typeface="Malgun Gothic" pitchFamily="34" charset="-122"/>
+                <a:cs typeface="Malgun Gothic" pitchFamily="34" charset="-120"/>
+              </a:rPr>
+              <a:t>덮기</a:t>
+            </a:r>
+            <a:endParaRPr lang="en-US" sz="600" dirty="0"/>
           </a:p>
         </p:txBody>
       </p:sp>
@@ -8080,20 +8726,20 @@
         </p:nvSpPr>
         <p:spPr>
           <a:xfrm>
-            <a:off x="4681728" y="3995928"/>
-            <a:ext cx="2286000" cy="384048"/>
+            <a:off x="4681728" y="3017520"/>
+            <a:ext cx="2286000" cy="1280160"/>
           </a:xfrm>
           <a:prstGeom prst="roundRect">
             <a:avLst>
-              <a:gd name="adj" fmla="val 7143"/>
+              <a:gd name="adj" fmla="val 2143"/>
             </a:avLst>
           </a:prstGeom>
           <a:solidFill>
-            <a:srgbClr val="FFFFFF"/>
+            <a:srgbClr val="D8D2C6"/>
           </a:solidFill>
-          <a:ln w="9525">
+          <a:ln w="12700">
             <a:solidFill>
-              <a:srgbClr val="D9D6CF"/>
+              <a:srgbClr val="D8D2C6"/>
             </a:solidFill>
             <a:prstDash val="solid"/>
           </a:ln>
@@ -8107,8 +8753,8 @@
         </p:nvSpPr>
         <p:spPr>
           <a:xfrm>
-            <a:off x="4718304" y="3995928"/>
-            <a:ext cx="2212848" cy="384048"/>
+            <a:off x="4718304" y="3017520"/>
+            <a:ext cx="2212848" cy="1280160"/>
           </a:xfrm>
           <a:prstGeom prst="rect">
             <a:avLst/>
@@ -8120,7 +8766,7 @@
           <a:bodyPr wrap="square" lIns="0" tIns="0" rIns="0" bIns="0" rtlCol="0" anchor="ctr"/>
           <a:lstStyle/>
           <a:p>
-            <a:pPr algn="l" indent="0" marL="0">
+            <a:pPr algn="ctr" indent="0" marL="0">
               <a:buNone/>
             </a:pPr>
             <a:r>
@@ -8132,7 +8778,24 @@
                 <a:ea typeface="Malgun Gothic" pitchFamily="34" charset="-122"/>
                 <a:cs typeface="Malgun Gothic" pitchFamily="34" charset="-120"/>
               </a:rPr>
-              <a:t>Q 물로 씻어도 되나요?</a:t>
+              <a:t>신발 속 단면 사진</a:t>
+            </a:r>
+            <a:endParaRPr lang="en-US" sz="800" dirty="0"/>
+          </a:p>
+          <a:p>
+            <a:pPr algn="ctr" indent="0" marL="0">
+              <a:buNone/>
+            </a:pPr>
+            <a:r>
+              <a:rPr lang="en-US" sz="800" dirty="0">
+                <a:solidFill>
+                  <a:srgbClr val="232323"/>
+                </a:solidFill>
+                <a:latin typeface="Malgun Gothic" pitchFamily="34" charset="0"/>
+                <a:ea typeface="Malgun Gothic" pitchFamily="34" charset="-122"/>
+                <a:cs typeface="Malgun Gothic" pitchFamily="34" charset="-120"/>
+              </a:rPr>
+              <a:t>(뒤꿈치 끝에 맞춘 반굽)</a:t>
             </a:r>
             <a:endParaRPr lang="en-US" sz="800" dirty="0"/>
           </a:p>
@@ -8146,6 +8809,62 @@
         </p:nvSpPr>
         <p:spPr>
           <a:xfrm>
+            <a:off x="4636008" y="4434840"/>
+            <a:ext cx="2377440" cy="502920"/>
+          </a:xfrm>
+          <a:prstGeom prst="rect">
+            <a:avLst/>
+          </a:prstGeom>
+          <a:noFill/>
+          <a:ln/>
+        </p:spPr>
+        <p:txBody>
+          <a:bodyPr wrap="square" lIns="0" tIns="0" rIns="0" bIns="0" rtlCol="0" anchor="ctr"/>
+          <a:lstStyle/>
+          <a:p>
+            <a:pPr algn="ctr" indent="0" marL="0">
+              <a:buNone/>
+            </a:pPr>
+            <a:r>
+              <a:rPr lang="en-US" sz="700" dirty="0">
+                <a:solidFill>
+                  <a:srgbClr val="8A8A8A"/>
+                </a:solidFill>
+                <a:latin typeface="Malgun Gothic" pitchFamily="34" charset="0"/>
+                <a:ea typeface="Malgun Gothic" pitchFamily="34" charset="-122"/>
+                <a:cs typeface="Malgun Gothic" pitchFamily="34" charset="-120"/>
+              </a:rPr>
+              <a:t>깔창이 없는 신발엔</a:t>
+            </a:r>
+            <a:endParaRPr lang="en-US" sz="700" dirty="0"/>
+          </a:p>
+          <a:p>
+            <a:pPr algn="ctr" indent="0" marL="0">
+              <a:buNone/>
+            </a:pPr>
+            <a:r>
+              <a:rPr lang="en-US" sz="700" dirty="0">
+                <a:solidFill>
+                  <a:srgbClr val="8A8A8A"/>
+                </a:solidFill>
+                <a:latin typeface="Malgun Gothic" pitchFamily="34" charset="0"/>
+                <a:ea typeface="Malgun Gothic" pitchFamily="34" charset="-122"/>
+                <a:cs typeface="Malgun Gothic" pitchFamily="34" charset="-120"/>
+              </a:rPr>
+              <a:t>아치가득만 단독으로 넣어도 됩니다</a:t>
+            </a:r>
+            <a:endParaRPr lang="en-US" sz="700" dirty="0"/>
+          </a:p>
+        </p:txBody>
+      </p:sp>
+      <p:sp>
+        <p:nvSpPr>
+          <p:cNvPr id="28" name="Text 26"/>
+          <p:cNvSpPr txBox="1"/>
+          <p:nvPr/>
+        </p:nvSpPr>
+        <p:spPr>
+          <a:xfrm>
             <a:off x="4178808" y="5687568"/>
             <a:ext cx="3291840" cy="457200"/>
           </a:xfrm>
@@ -8171,7 +8890,7 @@
                 <a:ea typeface="Malgun Gothic" pitchFamily="34" charset="-122"/>
                 <a:cs typeface="Malgun Gothic" pitchFamily="34" charset="-120"/>
               </a:rPr>
-              <a:t>M/L 대응 발길이 표</a:t>
+              <a:t>3스텝 사진 + 단독 사용 안내</a:t>
             </a:r>
             <a:endParaRPr lang="en-US" sz="1000" dirty="0"/>
           </a:p>
@@ -8179,7 +8898,7 @@
       </p:sp>
       <p:sp>
         <p:nvSpPr>
-          <p:cNvPr id="28" name="Text 26"/>
+          <p:cNvPr id="29" name="Text 27"/>
           <p:cNvSpPr txBox="1"/>
           <p:nvPr/>
         </p:nvSpPr>
@@ -8213,7 +8932,7 @@
                 <a:ea typeface="Malgun Gothic" pitchFamily="34" charset="-122"/>
                 <a:cs typeface="Malgun Gothic" pitchFamily="34" charset="-120"/>
               </a:rPr>
-              <a:t>M · L</a:t>
+              <a:t>쓰던 깔창 밑에</a:t>
             </a:r>
             <a:endParaRPr lang="en-US" sz="1600" dirty="0"/>
           </a:p>
@@ -8225,15 +8944,15 @@
               <a:buNone/>
             </a:pPr>
             <a:r>
-              <a:rPr lang="en-US" sz="800" dirty="0">
-                <a:solidFill>
-                  <a:srgbClr val="232323"/>
-                </a:solidFill>
-                <a:latin typeface="Malgun Gothic" pitchFamily="34" charset="0"/>
-                <a:ea typeface="Malgun Gothic" pitchFamily="34" charset="-122"/>
-                <a:cs typeface="Malgun Gothic" pitchFamily="34" charset="-120"/>
-              </a:rPr>
-              <a:t> </a:t>
+              <a:rPr lang="en-US" sz="1600" b="1" dirty="0">
+                <a:solidFill>
+                  <a:srgbClr val="232323"/>
+                </a:solidFill>
+                <a:latin typeface="Malgun Gothic" pitchFamily="34" charset="0"/>
+                <a:ea typeface="Malgun Gothic" pitchFamily="34" charset="-122"/>
+                <a:cs typeface="Malgun Gothic" pitchFamily="34" charset="-120"/>
+              </a:rPr>
+              <a:t>깔기만 하세요</a:t>
             </a:r>
             <a:endParaRPr lang="en-US" sz="1600" dirty="0"/>
           </a:p>
@@ -8245,15 +8964,15 @@
               <a:buNone/>
             </a:pPr>
             <a:r>
-              <a:rPr lang="en-US" sz="1400" dirty="0">
-                <a:solidFill>
-                  <a:srgbClr val="232323"/>
-                </a:solidFill>
-                <a:latin typeface="Malgun Gothic" pitchFamily="34" charset="0"/>
-                <a:ea typeface="Malgun Gothic" pitchFamily="34" charset="-122"/>
-                <a:cs typeface="Malgun Gothic" pitchFamily="34" charset="-120"/>
-              </a:rPr>
-              <a:t>M [○○○~○○○mm]</a:t>
+              <a:rPr lang="en-US" sz="800" dirty="0">
+                <a:solidFill>
+                  <a:srgbClr val="232323"/>
+                </a:solidFill>
+                <a:latin typeface="Malgun Gothic" pitchFamily="34" charset="0"/>
+                <a:ea typeface="Malgun Gothic" pitchFamily="34" charset="-122"/>
+                <a:cs typeface="Malgun Gothic" pitchFamily="34" charset="-120"/>
+              </a:rPr>
+              <a:t> </a:t>
             </a:r>
             <a:endParaRPr lang="en-US" sz="1600" dirty="0"/>
           </a:p>
@@ -8273,7 +8992,7 @@
                 <a:ea typeface="Malgun Gothic" pitchFamily="34" charset="-122"/>
                 <a:cs typeface="Malgun Gothic" pitchFamily="34" charset="-120"/>
               </a:rPr>
-              <a:t>L [○○○~○○○mm]</a:t>
+              <a:t>1 쓰던 깔창을 들고</a:t>
             </a:r>
             <a:endParaRPr lang="en-US" sz="1600" dirty="0"/>
           </a:p>
@@ -8284,6 +9003,17 @@
               </a:lnSpc>
               <a:buNone/>
             </a:pPr>
+            <a:r>
+              <a:rPr lang="en-US" sz="1400" dirty="0">
+                <a:solidFill>
+                  <a:srgbClr val="232323"/>
+                </a:solidFill>
+                <a:latin typeface="Malgun Gothic" pitchFamily="34" charset="0"/>
+                <a:ea typeface="Malgun Gothic" pitchFamily="34" charset="-122"/>
+                <a:cs typeface="Malgun Gothic" pitchFamily="34" charset="-120"/>
+              </a:rPr>
+              <a:t>2 뒤꿈치 끝에 맞춰 깔고</a:t>
+            </a:r>
             <a:endParaRPr lang="en-US" sz="1600" dirty="0"/>
           </a:p>
           <a:p>
@@ -8302,15 +9032,44 @@
                 <a:ea typeface="Malgun Gothic" pitchFamily="34" charset="-122"/>
                 <a:cs typeface="Malgun Gothic" pitchFamily="34" charset="-120"/>
               </a:rPr>
-              <a:t>사이즈가 애매하면 [안내]</a:t>
+              <a:t>3 깔창을 다시 덮으면 끝.</a:t>
             </a:r>
             <a:endParaRPr lang="en-US" sz="1600" dirty="0"/>
           </a:p>
-        </p:txBody>
-      </p:sp>
-      <p:sp>
-        <p:nvSpPr>
-          <p:cNvPr id="29" name="Shape 27"/>
+          <a:p>
+            <a:pPr algn="ctr" indent="0" marL="0">
+              <a:lnSpc>
+                <a:spcPct val="125000"/>
+              </a:lnSpc>
+              <a:buNone/>
+            </a:pPr>
+            <a:endParaRPr lang="en-US" sz="1600" dirty="0"/>
+          </a:p>
+          <a:p>
+            <a:pPr algn="ctr" indent="0" marL="0">
+              <a:lnSpc>
+                <a:spcPct val="125000"/>
+              </a:lnSpc>
+              <a:buNone/>
+            </a:pPr>
+            <a:r>
+              <a:rPr lang="en-US" sz="1400" dirty="0">
+                <a:solidFill>
+                  <a:srgbClr val="232323"/>
+                </a:solidFill>
+                <a:latin typeface="Malgun Gothic" pitchFamily="34" charset="0"/>
+                <a:ea typeface="Malgun Gothic" pitchFamily="34" charset="-122"/>
+                <a:cs typeface="Malgun Gothic" pitchFamily="34" charset="-120"/>
+              </a:rPr>
+              <a:t>자를 필요 없습니다.</a:t>
+            </a:r>
+            <a:endParaRPr lang="en-US" sz="1600" dirty="0"/>
+          </a:p>
+        </p:txBody>
+      </p:sp>
+      <p:sp>
+        <p:nvSpPr>
+          <p:cNvPr id="30" name="Shape 28"/>
           <p:cNvSpPr/>
           <p:nvPr/>
         </p:nvSpPr>
@@ -8337,7 +9096,7 @@
       </p:sp>
       <p:sp>
         <p:nvSpPr>
-          <p:cNvPr id="30" name="Text 28"/>
+          <p:cNvPr id="31" name="Text 29"/>
           <p:cNvSpPr txBox="1"/>
           <p:nvPr/>
         </p:nvSpPr>
@@ -8368,7 +9127,7 @@
                 <a:ea typeface="Malgun Gothic" pitchFamily="34" charset="-122"/>
                 <a:cs typeface="Malgun Gothic" pitchFamily="34" charset="-120"/>
               </a:rPr>
-              <a:t>⚠ 🔒 P03 대응 발길이 확정 전 CUT 보류</a:t>
+              <a:t>⚠ 🔒 단독 사용 권장 여부 대표 확인</a:t>
             </a:r>
             <a:endParaRPr lang="en-US" sz="900" dirty="0"/>
           </a:p>
@@ -8423,11 +9182,11 @@
             </a:avLst>
           </a:prstGeom>
           <a:solidFill>
-            <a:srgbClr val="FF6B3D"/>
+            <a:srgbClr val="0D0D0D"/>
           </a:solidFill>
           <a:ln w="12700">
             <a:solidFill>
-              <a:srgbClr val="FF6B3D"/>
+              <a:srgbClr val="0D0D0D"/>
             </a:solidFill>
             <a:prstDash val="solid"/>
           </a:ln>
@@ -8466,7 +9225,7 @@
                 <a:ea typeface="Malgun Gothic" pitchFamily="34" charset="-122"/>
                 <a:cs typeface="Malgun Gothic" pitchFamily="34" charset="-120"/>
               </a:rPr>
-              <a:t>공감</a:t>
+              <a:t>구매</a:t>
             </a:r>
             <a:endParaRPr lang="en-US" sz="1000" dirty="0"/>
           </a:p>
@@ -8505,7 +9264,7 @@
                 <a:ea typeface="Malgun Gothic" pitchFamily="34" charset="-122"/>
                 <a:cs typeface="Malgun Gothic" pitchFamily="34" charset="-120"/>
               </a:rPr>
-              <a:t>ICUT 12 / 14   이런 분께 + 워킹화엔 필요 없어요</a:t>
+              <a:t>ICUT 12 / 15   사이즈 M · L</a:t>
             </a:r>
             <a:endParaRPr lang="en-US" sz="1600" dirty="0"/>
           </a:p>
@@ -8880,7 +9639,7 @@
                 <a:ea typeface="Malgun Gothic" pitchFamily="34" charset="-122"/>
                 <a:cs typeface="Malgun Gothic" pitchFamily="34" charset="-120"/>
               </a:rPr>
-              <a:t>1페이지 마케팅</a:t>
+              <a:t>슈니엘</a:t>
             </a:r>
             <a:pPr indent="0" marL="0">
               <a:spcAft>
@@ -8897,7 +9656,7 @@
                 <a:ea typeface="Malgun Gothic" pitchFamily="34" charset="-122"/>
                 <a:cs typeface="Malgun Gothic" pitchFamily="34" charset="-120"/>
               </a:rPr>
-              <a:t>  ⑧ 교차판매</a:t>
+              <a:t>  사이즈표</a:t>
             </a:r>
             <a:endParaRPr lang="en-US" sz="1100" dirty="0"/>
           </a:p>
@@ -8917,7 +9676,7 @@
                 <a:ea typeface="Malgun Gothic" pitchFamily="34" charset="-122"/>
                 <a:cs typeface="Malgun Gothic" pitchFamily="34" charset="-120"/>
               </a:rPr>
-              <a:t>워킹화엔 깔창 필요 없음</a:t>
+              <a:t>발길이 범위 표</a:t>
             </a:r>
             <a:endParaRPr lang="en-US" sz="1100" dirty="0"/>
           </a:p>
@@ -8937,7 +9696,7 @@
                 <a:ea typeface="Malgun Gothic" pitchFamily="34" charset="-122"/>
                 <a:cs typeface="Malgun Gothic" pitchFamily="34" charset="-120"/>
               </a:rPr>
-              <a:t>→ 그래서 '다른 신발용'</a:t>
+              <a:t>→ M/L 2칸 표</a:t>
             </a:r>
             <a:endParaRPr lang="en-US" sz="1100" dirty="0"/>
           </a:p>
@@ -8976,7 +9735,7 @@
                 <a:ea typeface="Malgun Gothic" pitchFamily="34" charset="-122"/>
                 <a:cs typeface="Malgun Gothic" pitchFamily="34" charset="-120"/>
               </a:rPr>
-              <a:t>REF · 역설 메시지 (스레드 실측 반응 좋음)</a:t>
+              <a:t>REF · 슈니엘 #23 FAQ</a:t>
             </a:r>
             <a:endParaRPr lang="en-US" sz="1000" dirty="0"/>
           </a:p>
@@ -9015,12 +9774,251 @@
         </p:nvSpPr>
         <p:spPr>
           <a:xfrm>
-            <a:off x="4681728" y="2194560"/>
-            <a:ext cx="2286000" cy="411480"/>
+            <a:off x="4681728" y="2240280"/>
+            <a:ext cx="1097280" cy="1097280"/>
           </a:xfrm>
           <a:prstGeom prst="roundRect">
             <a:avLst>
-              <a:gd name="adj" fmla="val 6667"/>
+              <a:gd name="adj" fmla="val 2500"/>
+            </a:avLst>
+          </a:prstGeom>
+          <a:solidFill>
+            <a:srgbClr val="C6F432"/>
+          </a:solidFill>
+          <a:ln w="12700">
+            <a:solidFill>
+              <a:srgbClr val="C6F432"/>
+            </a:solidFill>
+            <a:prstDash val="solid"/>
+          </a:ln>
+        </p:spPr>
+      </p:sp>
+      <p:sp>
+        <p:nvSpPr>
+          <p:cNvPr id="20" name="Text 18"/>
+          <p:cNvSpPr txBox="1"/>
+          <p:nvPr/>
+        </p:nvSpPr>
+        <p:spPr>
+          <a:xfrm>
+            <a:off x="4718304" y="2240280"/>
+            <a:ext cx="1024128" cy="1097280"/>
+          </a:xfrm>
+          <a:prstGeom prst="rect">
+            <a:avLst/>
+          </a:prstGeom>
+          <a:noFill/>
+          <a:ln/>
+        </p:spPr>
+        <p:txBody>
+          <a:bodyPr wrap="square" lIns="0" tIns="0" rIns="0" bIns="0" rtlCol="0" anchor="ctr"/>
+          <a:lstStyle/>
+          <a:p>
+            <a:pPr algn="ctr" indent="0" marL="0">
+              <a:buNone/>
+            </a:pPr>
+            <a:r>
+              <a:rPr lang="en-US" sz="800" b="1" dirty="0">
+                <a:solidFill>
+                  <a:srgbClr val="232323"/>
+                </a:solidFill>
+                <a:latin typeface="Malgun Gothic" pitchFamily="34" charset="0"/>
+                <a:ea typeface="Malgun Gothic" pitchFamily="34" charset="-122"/>
+                <a:cs typeface="Malgun Gothic" pitchFamily="34" charset="-120"/>
+              </a:rPr>
+              <a:t>M</a:t>
+            </a:r>
+            <a:endParaRPr lang="en-US" sz="800" dirty="0"/>
+          </a:p>
+          <a:p>
+            <a:pPr algn="ctr" indent="0" marL="0">
+              <a:buNone/>
+            </a:pPr>
+            <a:r>
+              <a:rPr lang="en-US" sz="800" b="1" dirty="0">
+                <a:solidFill>
+                  <a:srgbClr val="232323"/>
+                </a:solidFill>
+                <a:latin typeface="Malgun Gothic" pitchFamily="34" charset="0"/>
+                <a:ea typeface="Malgun Gothic" pitchFamily="34" charset="-122"/>
+                <a:cs typeface="Malgun Gothic" pitchFamily="34" charset="-120"/>
+              </a:rPr>
+              <a:t>길이 15cm</a:t>
+            </a:r>
+            <a:endParaRPr lang="en-US" sz="800" dirty="0"/>
+          </a:p>
+          <a:p>
+            <a:pPr algn="ctr" indent="0" marL="0">
+              <a:buNone/>
+            </a:pPr>
+            <a:r>
+              <a:rPr lang="en-US" sz="800" b="1" dirty="0">
+                <a:solidFill>
+                  <a:srgbClr val="232323"/>
+                </a:solidFill>
+                <a:latin typeface="Malgun Gothic" pitchFamily="34" charset="0"/>
+                <a:ea typeface="Malgun Gothic" pitchFamily="34" charset="-122"/>
+                <a:cs typeface="Malgun Gothic" pitchFamily="34" charset="-120"/>
+              </a:rPr>
+              <a:t>신발 220~255</a:t>
+            </a:r>
+            <a:endParaRPr lang="en-US" sz="800" dirty="0"/>
+          </a:p>
+        </p:txBody>
+      </p:sp>
+      <p:sp>
+        <p:nvSpPr>
+          <p:cNvPr id="21" name="Shape 19"/>
+          <p:cNvSpPr/>
+          <p:nvPr/>
+        </p:nvSpPr>
+        <p:spPr>
+          <a:xfrm>
+            <a:off x="5870448" y="2240280"/>
+            <a:ext cx="1097280" cy="1097280"/>
+          </a:xfrm>
+          <a:prstGeom prst="roundRect">
+            <a:avLst>
+              <a:gd name="adj" fmla="val 2500"/>
+            </a:avLst>
+          </a:prstGeom>
+          <a:solidFill>
+            <a:srgbClr val="C6F432"/>
+          </a:solidFill>
+          <a:ln w="12700">
+            <a:solidFill>
+              <a:srgbClr val="C6F432"/>
+            </a:solidFill>
+            <a:prstDash val="solid"/>
+          </a:ln>
+        </p:spPr>
+      </p:sp>
+      <p:sp>
+        <p:nvSpPr>
+          <p:cNvPr id="22" name="Text 20"/>
+          <p:cNvSpPr txBox="1"/>
+          <p:nvPr/>
+        </p:nvSpPr>
+        <p:spPr>
+          <a:xfrm>
+            <a:off x="5907024" y="2240280"/>
+            <a:ext cx="1024128" cy="1097280"/>
+          </a:xfrm>
+          <a:prstGeom prst="rect">
+            <a:avLst/>
+          </a:prstGeom>
+          <a:noFill/>
+          <a:ln/>
+        </p:spPr>
+        <p:txBody>
+          <a:bodyPr wrap="square" lIns="0" tIns="0" rIns="0" bIns="0" rtlCol="0" anchor="ctr"/>
+          <a:lstStyle/>
+          <a:p>
+            <a:pPr algn="ctr" indent="0" marL="0">
+              <a:buNone/>
+            </a:pPr>
+            <a:r>
+              <a:rPr lang="en-US" sz="800" b="1" dirty="0">
+                <a:solidFill>
+                  <a:srgbClr val="232323"/>
+                </a:solidFill>
+                <a:latin typeface="Malgun Gothic" pitchFamily="34" charset="0"/>
+                <a:ea typeface="Malgun Gothic" pitchFamily="34" charset="-122"/>
+                <a:cs typeface="Malgun Gothic" pitchFamily="34" charset="-120"/>
+              </a:rPr>
+              <a:t>L</a:t>
+            </a:r>
+            <a:endParaRPr lang="en-US" sz="800" dirty="0"/>
+          </a:p>
+          <a:p>
+            <a:pPr algn="ctr" indent="0" marL="0">
+              <a:buNone/>
+            </a:pPr>
+            <a:r>
+              <a:rPr lang="en-US" sz="800" b="1" dirty="0">
+                <a:solidFill>
+                  <a:srgbClr val="232323"/>
+                </a:solidFill>
+                <a:latin typeface="Malgun Gothic" pitchFamily="34" charset="0"/>
+                <a:ea typeface="Malgun Gothic" pitchFamily="34" charset="-122"/>
+                <a:cs typeface="Malgun Gothic" pitchFamily="34" charset="-120"/>
+              </a:rPr>
+              <a:t>길이 17cm</a:t>
+            </a:r>
+            <a:endParaRPr lang="en-US" sz="800" dirty="0"/>
+          </a:p>
+          <a:p>
+            <a:pPr algn="ctr" indent="0" marL="0">
+              <a:buNone/>
+            </a:pPr>
+            <a:r>
+              <a:rPr lang="en-US" sz="800" b="1" dirty="0">
+                <a:solidFill>
+                  <a:srgbClr val="232323"/>
+                </a:solidFill>
+                <a:latin typeface="Malgun Gothic" pitchFamily="34" charset="0"/>
+                <a:ea typeface="Malgun Gothic" pitchFamily="34" charset="-122"/>
+                <a:cs typeface="Malgun Gothic" pitchFamily="34" charset="-120"/>
+              </a:rPr>
+              <a:t>신발 260~280</a:t>
+            </a:r>
+            <a:endParaRPr lang="en-US" sz="800" dirty="0"/>
+          </a:p>
+        </p:txBody>
+      </p:sp>
+      <p:sp>
+        <p:nvSpPr>
+          <p:cNvPr id="23" name="Text 21"/>
+          <p:cNvSpPr txBox="1"/>
+          <p:nvPr/>
+        </p:nvSpPr>
+        <p:spPr>
+          <a:xfrm>
+            <a:off x="4636008" y="3429000"/>
+            <a:ext cx="2377440" cy="320040"/>
+          </a:xfrm>
+          <a:prstGeom prst="rect">
+            <a:avLst/>
+          </a:prstGeom>
+          <a:noFill/>
+          <a:ln/>
+        </p:spPr>
+        <p:txBody>
+          <a:bodyPr wrap="square" lIns="0" tIns="0" rIns="0" bIns="0" rtlCol="0" anchor="ctr"/>
+          <a:lstStyle/>
+          <a:p>
+            <a:pPr algn="ctr" indent="0" marL="0">
+              <a:buNone/>
+            </a:pPr>
+            <a:r>
+              <a:rPr lang="en-US" sz="600" dirty="0">
+                <a:solidFill>
+                  <a:srgbClr val="8A8A8A"/>
+                </a:solidFill>
+                <a:latin typeface="Malgun Gothic" pitchFamily="34" charset="0"/>
+                <a:ea typeface="Malgun Gothic" pitchFamily="34" charset="-122"/>
+                <a:cs typeface="Malgun Gothic" pitchFamily="34" charset="-120"/>
+              </a:rPr>
+              <a:t>※ 사출 특성상 ±5% 편차가 있을 수 있습니다</a:t>
+            </a:r>
+            <a:endParaRPr lang="en-US" sz="600" dirty="0"/>
+          </a:p>
+        </p:txBody>
+      </p:sp>
+      <p:sp>
+        <p:nvSpPr>
+          <p:cNvPr id="24" name="Shape 22"/>
+          <p:cNvSpPr/>
+          <p:nvPr/>
+        </p:nvSpPr>
+        <p:spPr>
+          <a:xfrm>
+            <a:off x="4681728" y="3840480"/>
+            <a:ext cx="2286000" cy="384048"/>
+          </a:xfrm>
+          <a:prstGeom prst="roundRect">
+            <a:avLst>
+              <a:gd name="adj" fmla="val 7143"/>
             </a:avLst>
           </a:prstGeom>
           <a:solidFill>
@@ -9036,14 +10034,14 @@
       </p:sp>
       <p:sp>
         <p:nvSpPr>
-          <p:cNvPr id="20" name="Text 18"/>
+          <p:cNvPr id="25" name="Text 23"/>
           <p:cNvSpPr txBox="1"/>
           <p:nvPr/>
         </p:nvSpPr>
         <p:spPr>
           <a:xfrm>
-            <a:off x="4718304" y="2194560"/>
-            <a:ext cx="2212848" cy="411480"/>
+            <a:off x="4718304" y="3840480"/>
+            <a:ext cx="2212848" cy="384048"/>
           </a:xfrm>
           <a:prstGeom prst="rect">
             <a:avLst/>
@@ -9067,7 +10065,7 @@
                 <a:ea typeface="Malgun Gothic" pitchFamily="34" charset="-122"/>
                 <a:cs typeface="Malgun Gothic" pitchFamily="34" charset="-120"/>
               </a:rPr>
-              <a:t>✓ 오래 서 있거나 걷는 일이 많다</a:t>
+              <a:t>Q 경계 사이즈면?</a:t>
             </a:r>
             <a:endParaRPr lang="en-US" sz="800" dirty="0"/>
           </a:p>
@@ -9075,18 +10073,18 @@
       </p:sp>
       <p:sp>
         <p:nvSpPr>
-          <p:cNvPr id="21" name="Shape 19"/>
+          <p:cNvPr id="26" name="Shape 24"/>
           <p:cNvSpPr/>
           <p:nvPr/>
         </p:nvSpPr>
         <p:spPr>
           <a:xfrm>
-            <a:off x="4681728" y="2697480"/>
-            <a:ext cx="2286000" cy="411480"/>
+            <a:off x="4681728" y="4315968"/>
+            <a:ext cx="2286000" cy="384048"/>
           </a:xfrm>
           <a:prstGeom prst="roundRect">
             <a:avLst>
-              <a:gd name="adj" fmla="val 6667"/>
+              <a:gd name="adj" fmla="val 7143"/>
             </a:avLst>
           </a:prstGeom>
           <a:solidFill>
@@ -9102,14 +10100,14 @@
       </p:sp>
       <p:sp>
         <p:nvSpPr>
-          <p:cNvPr id="22" name="Text 20"/>
+          <p:cNvPr id="27" name="Text 25"/>
           <p:cNvSpPr txBox="1"/>
           <p:nvPr/>
         </p:nvSpPr>
         <p:spPr>
           <a:xfrm>
-            <a:off x="4718304" y="2697480"/>
-            <a:ext cx="2212848" cy="411480"/>
+            <a:off x="4718304" y="4315968"/>
+            <a:ext cx="2212848" cy="384048"/>
           </a:xfrm>
           <a:prstGeom prst="rect">
             <a:avLst/>
@@ -9133,7 +10131,7 @@
                 <a:ea typeface="Malgun Gothic" pitchFamily="34" charset="-122"/>
                 <a:cs typeface="Malgun Gothic" pitchFamily="34" charset="-120"/>
               </a:rPr>
-              <a:t>✓ 출근화 속을 바꿔보고 싶다</a:t>
+              <a:t>Q 물로 씻어도 되나요?</a:t>
             </a:r>
             <a:endParaRPr lang="en-US" sz="800" dirty="0"/>
           </a:p>
@@ -9141,18 +10139,188 @@
       </p:sp>
       <p:sp>
         <p:nvSpPr>
-          <p:cNvPr id="23" name="Shape 21"/>
+          <p:cNvPr id="28" name="Text 26"/>
+          <p:cNvSpPr txBox="1"/>
+          <p:nvPr/>
+        </p:nvSpPr>
+        <p:spPr>
+          <a:xfrm>
+            <a:off x="4178808" y="5687568"/>
+            <a:ext cx="3291840" cy="457200"/>
+          </a:xfrm>
+          <a:prstGeom prst="rect">
+            <a:avLst/>
+          </a:prstGeom>
+          <a:noFill/>
+          <a:ln/>
+        </p:spPr>
+        <p:txBody>
+          <a:bodyPr wrap="square" lIns="0" tIns="0" rIns="0" bIns="0" rtlCol="0" anchor="t"/>
+          <a:lstStyle/>
+          <a:p>
+            <a:pPr algn="ctr" indent="0" marL="0">
+              <a:buNone/>
+            </a:pPr>
+            <a:r>
+              <a:rPr lang="en-US" sz="1000" dirty="0">
+                <a:solidFill>
+                  <a:srgbClr val="8A8A8A"/>
+                </a:solidFill>
+                <a:latin typeface="Malgun Gothic" pitchFamily="34" charset="0"/>
+                <a:ea typeface="Malgun Gothic" pitchFamily="34" charset="-122"/>
+                <a:cs typeface="Malgun Gothic" pitchFamily="34" charset="-120"/>
+              </a:rPr>
+              <a:t>M/L 표 + 편차 고지</a:t>
+            </a:r>
+            <a:endParaRPr lang="en-US" sz="1000" dirty="0"/>
+          </a:p>
+        </p:txBody>
+      </p:sp>
+      <p:sp>
+        <p:nvSpPr>
+          <p:cNvPr id="29" name="Text 27"/>
+          <p:cNvSpPr txBox="1"/>
+          <p:nvPr/>
+        </p:nvSpPr>
+        <p:spPr>
+          <a:xfrm>
+            <a:off x="7845552" y="2011680"/>
+            <a:ext cx="3108960" cy="3291840"/>
+          </a:xfrm>
+          <a:prstGeom prst="rect">
+            <a:avLst/>
+          </a:prstGeom>
+          <a:noFill/>
+          <a:ln/>
+        </p:spPr>
+        <p:txBody>
+          <a:bodyPr wrap="square" lIns="0" tIns="0" rIns="0" bIns="0" rtlCol="0" anchor="ctr"/>
+          <a:lstStyle/>
+          <a:p>
+            <a:pPr algn="ctr" indent="0" marL="0">
+              <a:lnSpc>
+                <a:spcPct val="125000"/>
+              </a:lnSpc>
+              <a:buNone/>
+            </a:pPr>
+            <a:r>
+              <a:rPr lang="en-US" sz="1600" b="1" dirty="0">
+                <a:solidFill>
+                  <a:srgbClr val="232323"/>
+                </a:solidFill>
+                <a:latin typeface="Malgun Gothic" pitchFamily="34" charset="0"/>
+                <a:ea typeface="Malgun Gothic" pitchFamily="34" charset="-122"/>
+                <a:cs typeface="Malgun Gothic" pitchFamily="34" charset="-120"/>
+              </a:rPr>
+              <a:t>M · L</a:t>
+            </a:r>
+            <a:endParaRPr lang="en-US" sz="1600" dirty="0"/>
+          </a:p>
+          <a:p>
+            <a:pPr algn="ctr" indent="0" marL="0">
+              <a:lnSpc>
+                <a:spcPct val="125000"/>
+              </a:lnSpc>
+              <a:buNone/>
+            </a:pPr>
+            <a:r>
+              <a:rPr lang="en-US" sz="800" dirty="0">
+                <a:solidFill>
+                  <a:srgbClr val="232323"/>
+                </a:solidFill>
+                <a:latin typeface="Malgun Gothic" pitchFamily="34" charset="0"/>
+                <a:ea typeface="Malgun Gothic" pitchFamily="34" charset="-122"/>
+                <a:cs typeface="Malgun Gothic" pitchFamily="34" charset="-120"/>
+              </a:rPr>
+              <a:t> </a:t>
+            </a:r>
+            <a:endParaRPr lang="en-US" sz="1600" dirty="0"/>
+          </a:p>
+          <a:p>
+            <a:pPr algn="ctr" indent="0" marL="0">
+              <a:lnSpc>
+                <a:spcPct val="125000"/>
+              </a:lnSpc>
+              <a:buNone/>
+            </a:pPr>
+            <a:r>
+              <a:rPr lang="en-US" sz="1400" dirty="0">
+                <a:solidFill>
+                  <a:srgbClr val="232323"/>
+                </a:solidFill>
+                <a:latin typeface="Malgun Gothic" pitchFamily="34" charset="0"/>
+                <a:ea typeface="Malgun Gothic" pitchFamily="34" charset="-122"/>
+                <a:cs typeface="Malgun Gothic" pitchFamily="34" charset="-120"/>
+              </a:rPr>
+              <a:t>M 길이 15cm · 신발 220~255mm</a:t>
+            </a:r>
+            <a:endParaRPr lang="en-US" sz="1600" dirty="0"/>
+          </a:p>
+          <a:p>
+            <a:pPr algn="ctr" indent="0" marL="0">
+              <a:lnSpc>
+                <a:spcPct val="125000"/>
+              </a:lnSpc>
+              <a:buNone/>
+            </a:pPr>
+            <a:r>
+              <a:rPr lang="en-US" sz="1400" dirty="0">
+                <a:solidFill>
+                  <a:srgbClr val="232323"/>
+                </a:solidFill>
+                <a:latin typeface="Malgun Gothic" pitchFamily="34" charset="0"/>
+                <a:ea typeface="Malgun Gothic" pitchFamily="34" charset="-122"/>
+                <a:cs typeface="Malgun Gothic" pitchFamily="34" charset="-120"/>
+              </a:rPr>
+              <a:t>L 길이 17cm · 신발 260~280mm</a:t>
+            </a:r>
+            <a:endParaRPr lang="en-US" sz="1600" dirty="0"/>
+          </a:p>
+          <a:p>
+            <a:pPr algn="ctr" indent="0" marL="0">
+              <a:lnSpc>
+                <a:spcPct val="125000"/>
+              </a:lnSpc>
+              <a:buNone/>
+            </a:pPr>
+            <a:endParaRPr lang="en-US" sz="1600" dirty="0"/>
+          </a:p>
+          <a:p>
+            <a:pPr algn="ctr" indent="0" marL="0">
+              <a:lnSpc>
+                <a:spcPct val="125000"/>
+              </a:lnSpc>
+              <a:buNone/>
+            </a:pPr>
+            <a:r>
+              <a:rPr lang="en-US" sz="1400" dirty="0">
+                <a:solidFill>
+                  <a:srgbClr val="232323"/>
+                </a:solidFill>
+                <a:latin typeface="Malgun Gothic" pitchFamily="34" charset="0"/>
+                <a:ea typeface="Malgun Gothic" pitchFamily="34" charset="-122"/>
+                <a:cs typeface="Malgun Gothic" pitchFamily="34" charset="-120"/>
+              </a:rPr>
+              <a:t>※ 사출 특성상 ±5% 편차가 있을 수 있습니다.</a:t>
+            </a:r>
+            <a:endParaRPr lang="en-US" sz="1600" dirty="0"/>
+          </a:p>
+        </p:txBody>
+      </p:sp>
+      <p:sp>
+        <p:nvSpPr>
+          <p:cNvPr id="30" name="Shape 28"/>
           <p:cNvSpPr/>
           <p:nvPr/>
         </p:nvSpPr>
         <p:spPr>
           <a:xfrm>
-            <a:off x="4681728" y="3200400"/>
-            <a:ext cx="2286000" cy="411480"/>
+            <a:off x="7936992" y="5486400"/>
+            <a:ext cx="2926080" cy="566928"/>
           </a:xfrm>
           <a:prstGeom prst="roundRect">
             <a:avLst>
-              <a:gd name="adj" fmla="val 6667"/>
+              <a:gd name="adj" fmla="val 9677"/>
             </a:avLst>
           </a:prstGeom>
           <a:solidFill>
@@ -9160,7 +10328,7 @@
           </a:solidFill>
           <a:ln w="9525">
             <a:solidFill>
-              <a:srgbClr val="D9D6CF"/>
+              <a:srgbClr val="FF6B3D"/>
             </a:solidFill>
             <a:prstDash val="solid"/>
           </a:ln>
@@ -9168,14 +10336,14 @@
       </p:sp>
       <p:sp>
         <p:nvSpPr>
-          <p:cNvPr id="24" name="Text 22"/>
+          <p:cNvPr id="31" name="Text 29"/>
           <p:cNvSpPr txBox="1"/>
           <p:nvPr/>
         </p:nvSpPr>
         <p:spPr>
           <a:xfrm>
-            <a:off x="4718304" y="3200400"/>
-            <a:ext cx="2212848" cy="411480"/>
+            <a:off x="8046720" y="5486400"/>
+            <a:ext cx="2706624" cy="566928"/>
           </a:xfrm>
           <a:prstGeom prst="rect">
             <a:avLst/>
@@ -9187,311 +10355,21 @@
           <a:bodyPr wrap="square" lIns="0" tIns="0" rIns="0" bIns="0" rtlCol="0" anchor="ctr"/>
           <a:lstStyle/>
           <a:p>
-            <a:pPr algn="l" indent="0" marL="0">
-              <a:buNone/>
-            </a:pPr>
-            <a:r>
-              <a:rPr lang="en-US" sz="800" dirty="0">
-                <a:solidFill>
-                  <a:srgbClr val="232323"/>
-                </a:solidFill>
-                <a:latin typeface="Malgun Gothic" pitchFamily="34" charset="0"/>
-                <a:ea typeface="Malgun Gothic" pitchFamily="34" charset="-122"/>
-                <a:cs typeface="Malgun Gothic" pitchFamily="34" charset="-120"/>
-              </a:rPr>
-              <a:t>✓ 새 신발 대신 바닥만 바꾸고 싶다</a:t>
-            </a:r>
-            <a:endParaRPr lang="en-US" sz="800" dirty="0"/>
-          </a:p>
-        </p:txBody>
-      </p:sp>
-      <p:sp>
-        <p:nvSpPr>
-          <p:cNvPr id="25" name="Shape 23"/>
-          <p:cNvSpPr/>
-          <p:nvPr/>
-        </p:nvSpPr>
-        <p:spPr>
-          <a:xfrm>
-            <a:off x="4681728" y="3886200"/>
-            <a:ext cx="2286000" cy="1005840"/>
-          </a:xfrm>
-          <a:prstGeom prst="roundRect">
-            <a:avLst>
-              <a:gd name="adj" fmla="val 2727"/>
-            </a:avLst>
-          </a:prstGeom>
-          <a:solidFill>
-            <a:srgbClr val="232323"/>
-          </a:solidFill>
-          <a:ln w="12700">
-            <a:solidFill>
-              <a:srgbClr val="232323"/>
-            </a:solidFill>
-            <a:prstDash val="solid"/>
-          </a:ln>
-        </p:spPr>
-      </p:sp>
-      <p:sp>
-        <p:nvSpPr>
-          <p:cNvPr id="26" name="Text 24"/>
-          <p:cNvSpPr txBox="1"/>
-          <p:nvPr/>
-        </p:nvSpPr>
-        <p:spPr>
-          <a:xfrm>
-            <a:off x="4718304" y="3886200"/>
-            <a:ext cx="2212848" cy="1005840"/>
-          </a:xfrm>
-          <a:prstGeom prst="rect">
-            <a:avLst/>
-          </a:prstGeom>
-          <a:noFill/>
-          <a:ln/>
-        </p:spPr>
-        <p:txBody>
-          <a:bodyPr wrap="square" lIns="0" tIns="0" rIns="0" bIns="0" rtlCol="0" anchor="ctr"/>
-          <a:lstStyle/>
-          <a:p>
-            <a:pPr algn="ctr" indent="0" marL="0">
-              <a:buNone/>
-            </a:pPr>
-            <a:r>
-              <a:rPr lang="en-US" sz="700" dirty="0">
-                <a:solidFill>
-                  <a:srgbClr val="C6F432"/>
-                </a:solidFill>
-                <a:latin typeface="Malgun Gothic" pitchFamily="34" charset="0"/>
-                <a:ea typeface="Malgun Gothic" pitchFamily="34" charset="-122"/>
-                <a:cs typeface="Malgun Gothic" pitchFamily="34" charset="-120"/>
-              </a:rPr>
-              <a:t>라라슈 워킹화엔 필요 없어요</a:t>
-            </a:r>
-            <a:endParaRPr lang="en-US" sz="700" dirty="0"/>
-          </a:p>
-          <a:p>
-            <a:pPr algn="ctr" indent="0" marL="0">
-              <a:buNone/>
-            </a:pPr>
-            <a:r>
-              <a:rPr lang="en-US" sz="700" dirty="0">
-                <a:solidFill>
-                  <a:srgbClr val="C6F432"/>
-                </a:solidFill>
-                <a:latin typeface="Malgun Gothic" pitchFamily="34" charset="0"/>
-                <a:ea typeface="Malgun Gothic" pitchFamily="34" charset="-122"/>
-                <a:cs typeface="Malgun Gothic" pitchFamily="34" charset="-120"/>
-              </a:rPr>
-              <a:t>— 깔창 없는 일체형이니까</a:t>
-            </a:r>
-            <a:endParaRPr lang="en-US" sz="700" dirty="0"/>
-          </a:p>
-          <a:p>
-            <a:pPr algn="ctr" indent="0" marL="0">
-              <a:buNone/>
-            </a:pPr>
-            <a:r>
-              <a:rPr lang="en-US" sz="700" dirty="0">
-                <a:solidFill>
-                  <a:srgbClr val="C6F432"/>
-                </a:solidFill>
-                <a:latin typeface="Malgun Gothic" pitchFamily="34" charset="0"/>
-                <a:ea typeface="Malgun Gothic" pitchFamily="34" charset="-122"/>
-                <a:cs typeface="Malgun Gothic" pitchFamily="34" charset="-120"/>
-              </a:rPr>
-              <a:t>워킹화 보러 가기 →</a:t>
-            </a:r>
-            <a:endParaRPr lang="en-US" sz="700" dirty="0"/>
-          </a:p>
-        </p:txBody>
-      </p:sp>
-      <p:sp>
-        <p:nvSpPr>
-          <p:cNvPr id="27" name="Text 25"/>
-          <p:cNvSpPr txBox="1"/>
-          <p:nvPr/>
-        </p:nvSpPr>
-        <p:spPr>
-          <a:xfrm>
-            <a:off x="4178808" y="5687568"/>
-            <a:ext cx="3291840" cy="457200"/>
-          </a:xfrm>
-          <a:prstGeom prst="rect">
-            <a:avLst/>
-          </a:prstGeom>
-          <a:noFill/>
-          <a:ln/>
-        </p:spPr>
-        <p:txBody>
-          <a:bodyPr wrap="square" lIns="0" tIns="0" rIns="0" bIns="0" rtlCol="0" anchor="t"/>
-          <a:lstStyle/>
-          <a:p>
-            <a:pPr algn="ctr" indent="0" marL="0">
-              <a:buNone/>
-            </a:pPr>
-            <a:r>
-              <a:rPr lang="en-US" sz="1000" dirty="0">
-                <a:solidFill>
-                  <a:srgbClr val="8A8A8A"/>
-                </a:solidFill>
-                <a:latin typeface="Malgun Gothic" pitchFamily="34" charset="0"/>
-                <a:ea typeface="Malgun Gothic" pitchFamily="34" charset="-122"/>
-                <a:cs typeface="Malgun Gothic" pitchFamily="34" charset="-120"/>
-              </a:rPr>
-              <a:t>체크 3줄 + 하단 워킹화 배너</a:t>
-            </a:r>
-            <a:endParaRPr lang="en-US" sz="1000" dirty="0"/>
-          </a:p>
-        </p:txBody>
-      </p:sp>
-      <p:sp>
-        <p:nvSpPr>
-          <p:cNvPr id="28" name="Text 26"/>
-          <p:cNvSpPr txBox="1"/>
-          <p:nvPr/>
-        </p:nvSpPr>
-        <p:spPr>
-          <a:xfrm>
-            <a:off x="7845552" y="2011680"/>
-            <a:ext cx="3108960" cy="3291840"/>
-          </a:xfrm>
-          <a:prstGeom prst="rect">
-            <a:avLst/>
-          </a:prstGeom>
-          <a:noFill/>
-          <a:ln/>
-        </p:spPr>
-        <p:txBody>
-          <a:bodyPr wrap="square" lIns="0" tIns="0" rIns="0" bIns="0" rtlCol="0" anchor="ctr"/>
-          <a:lstStyle/>
-          <a:p>
-            <a:pPr algn="ctr" indent="0" marL="0">
-              <a:lnSpc>
-                <a:spcPct val="125000"/>
-              </a:lnSpc>
-              <a:buNone/>
-            </a:pPr>
-            <a:r>
-              <a:rPr lang="en-US" sz="1600" b="1" dirty="0">
-                <a:solidFill>
-                  <a:srgbClr val="232323"/>
-                </a:solidFill>
-                <a:latin typeface="Malgun Gothic" pitchFamily="34" charset="0"/>
-                <a:ea typeface="Malgun Gothic" pitchFamily="34" charset="-122"/>
-                <a:cs typeface="Malgun Gothic" pitchFamily="34" charset="-120"/>
-              </a:rPr>
-              <a:t>하나라도 해당되면</a:t>
-            </a:r>
-            <a:endParaRPr lang="en-US" sz="1600" dirty="0"/>
-          </a:p>
-          <a:p>
-            <a:pPr algn="ctr" indent="0" marL="0">
-              <a:lnSpc>
-                <a:spcPct val="125000"/>
-              </a:lnSpc>
-              <a:buNone/>
-            </a:pPr>
-            <a:r>
-              <a:rPr lang="en-US" sz="800" dirty="0">
-                <a:solidFill>
-                  <a:srgbClr val="232323"/>
-                </a:solidFill>
-                <a:latin typeface="Malgun Gothic" pitchFamily="34" charset="0"/>
-                <a:ea typeface="Malgun Gothic" pitchFamily="34" charset="-122"/>
-                <a:cs typeface="Malgun Gothic" pitchFamily="34" charset="-120"/>
-              </a:rPr>
-              <a:t> </a:t>
-            </a:r>
-            <a:endParaRPr lang="en-US" sz="1600" dirty="0"/>
-          </a:p>
-          <a:p>
-            <a:pPr algn="ctr" indent="0" marL="0">
-              <a:lnSpc>
-                <a:spcPct val="125000"/>
-              </a:lnSpc>
-              <a:buNone/>
-            </a:pPr>
-            <a:r>
-              <a:rPr lang="en-US" sz="1400" dirty="0">
-                <a:solidFill>
-                  <a:srgbClr val="232323"/>
-                </a:solidFill>
-                <a:latin typeface="Malgun Gothic" pitchFamily="34" charset="0"/>
-                <a:ea typeface="Malgun Gothic" pitchFamily="34" charset="-122"/>
-                <a:cs typeface="Malgun Gothic" pitchFamily="34" charset="-120"/>
-              </a:rPr>
-              <a:t>✓ 오래 서 있거나 걷는 일이 많다</a:t>
-            </a:r>
-            <a:endParaRPr lang="en-US" sz="1600" dirty="0"/>
-          </a:p>
-          <a:p>
-            <a:pPr algn="ctr" indent="0" marL="0">
-              <a:lnSpc>
-                <a:spcPct val="125000"/>
-              </a:lnSpc>
-              <a:buNone/>
-            </a:pPr>
-            <a:r>
-              <a:rPr lang="en-US" sz="1400" dirty="0">
-                <a:solidFill>
-                  <a:srgbClr val="232323"/>
-                </a:solidFill>
-                <a:latin typeface="Malgun Gothic" pitchFamily="34" charset="0"/>
-                <a:ea typeface="Malgun Gothic" pitchFamily="34" charset="-122"/>
-                <a:cs typeface="Malgun Gothic" pitchFamily="34" charset="-120"/>
-              </a:rPr>
-              <a:t>✓ 출근화 속을 바꿔보고 싶다</a:t>
-            </a:r>
-            <a:endParaRPr lang="en-US" sz="1600" dirty="0"/>
-          </a:p>
-          <a:p>
-            <a:pPr algn="ctr" indent="0" marL="0">
-              <a:lnSpc>
-                <a:spcPct val="125000"/>
-              </a:lnSpc>
-              <a:buNone/>
-            </a:pPr>
-            <a:r>
-              <a:rPr lang="en-US" sz="1400" dirty="0">
-                <a:solidFill>
-                  <a:srgbClr val="232323"/>
-                </a:solidFill>
-                <a:latin typeface="Malgun Gothic" pitchFamily="34" charset="0"/>
-                <a:ea typeface="Malgun Gothic" pitchFamily="34" charset="-122"/>
-                <a:cs typeface="Malgun Gothic" pitchFamily="34" charset="-120"/>
-              </a:rPr>
-              <a:t>✓ 새 신발 대신 바닥만 바꾸고 싶다</a:t>
-            </a:r>
-            <a:endParaRPr lang="en-US" sz="1600" dirty="0"/>
-          </a:p>
-          <a:p>
-            <a:pPr algn="ctr" indent="0" marL="0">
-              <a:lnSpc>
-                <a:spcPct val="125000"/>
-              </a:lnSpc>
-              <a:buNone/>
-            </a:pPr>
-            <a:endParaRPr lang="en-US" sz="1600" dirty="0"/>
-          </a:p>
-          <a:p>
-            <a:pPr algn="ctr" indent="0" marL="0">
-              <a:lnSpc>
-                <a:spcPct val="125000"/>
-              </a:lnSpc>
-              <a:buNone/>
-            </a:pPr>
-            <a:r>
-              <a:rPr lang="en-US" sz="1400" dirty="0">
-                <a:solidFill>
-                  <a:srgbClr val="232323"/>
-                </a:solidFill>
-                <a:latin typeface="Malgun Gothic" pitchFamily="34" charset="0"/>
-                <a:ea typeface="Malgun Gothic" pitchFamily="34" charset="-122"/>
-                <a:cs typeface="Malgun Gothic" pitchFamily="34" charset="-120"/>
-              </a:rPr>
-              <a:t>라라슈 워킹화엔 필요 없어요.</a:t>
-            </a:r>
-            <a:endParaRPr lang="en-US" sz="1600" dirty="0"/>
+            <a:pPr indent="0" marL="0">
+              <a:buNone/>
+            </a:pPr>
+            <a:r>
+              <a:rPr lang="en-US" sz="900" dirty="0">
+                <a:solidFill>
+                  <a:srgbClr val="232323"/>
+                </a:solidFill>
+                <a:latin typeface="Malgun Gothic" pitchFamily="34" charset="0"/>
+                <a:ea typeface="Malgun Gothic" pitchFamily="34" charset="-122"/>
+                <a:cs typeface="Malgun Gothic" pitchFamily="34" charset="-120"/>
+              </a:rPr>
+              <a:t>⚠ 경계 사이즈(255/260) 안내 문구 대표 확인</a:t>
+            </a:r>
+            <a:endParaRPr lang="en-US" sz="900" dirty="0"/>
           </a:p>
         </p:txBody>
       </p:sp>
@@ -9544,11 +10422,11 @@
             </a:avLst>
           </a:prstGeom>
           <a:solidFill>
-            <a:srgbClr val="0D0D0D"/>
+            <a:srgbClr val="FF6B3D"/>
           </a:solidFill>
           <a:ln w="12700">
             <a:solidFill>
-              <a:srgbClr val="0D0D0D"/>
+              <a:srgbClr val="FF6B3D"/>
             </a:solidFill>
             <a:prstDash val="solid"/>
           </a:ln>
@@ -9587,7 +10465,7 @@
                 <a:ea typeface="Malgun Gothic" pitchFamily="34" charset="-122"/>
                 <a:cs typeface="Malgun Gothic" pitchFamily="34" charset="-120"/>
               </a:rPr>
-              <a:t>구매</a:t>
+              <a:t>공감</a:t>
             </a:r>
             <a:endParaRPr lang="en-US" sz="1000" dirty="0"/>
           </a:p>
@@ -9626,7 +10504,7 @@
                 <a:ea typeface="Malgun Gothic" pitchFamily="34" charset="-122"/>
                 <a:cs typeface="Malgun Gothic" pitchFamily="34" charset="-120"/>
               </a:rPr>
-              <a:t>ICUT 13 / 14   스펙 · 주의 · 상품정보고시</a:t>
+              <a:t>ICUT 13 / 15   이런 분께 + 워킹화엔 필요 없어요</a:t>
             </a:r>
             <a:endParaRPr lang="en-US" sz="1600" dirty="0"/>
           </a:p>
@@ -10001,7 +10879,7 @@
                 <a:ea typeface="Malgun Gothic" pitchFamily="34" charset="-122"/>
                 <a:cs typeface="Malgun Gothic" pitchFamily="34" charset="-120"/>
               </a:rPr>
-              <a:t>고시</a:t>
+              <a:t>1페이지 마케팅</a:t>
             </a:r>
             <a:pPr indent="0" marL="0">
               <a:spcAft>
@@ -10018,7 +10896,7 @@
                 <a:ea typeface="Malgun Gothic" pitchFamily="34" charset="-122"/>
                 <a:cs typeface="Malgun Gothic" pitchFamily="34" charset="-120"/>
               </a:rPr>
-              <a:t>  구두/신발 + 패션잡화</a:t>
+              <a:t>  ⑧ 교차판매</a:t>
             </a:r>
             <a:endParaRPr lang="en-US" sz="1100" dirty="0"/>
           </a:p>
@@ -10038,7 +10916,7 @@
                 <a:ea typeface="Malgun Gothic" pitchFamily="34" charset="-122"/>
                 <a:cs typeface="Malgun Gothic" pitchFamily="34" charset="-120"/>
               </a:rPr>
-              <a:t>두 유형 모두 채움</a:t>
+              <a:t>워킹화엔 깔창 필요 없음</a:t>
             </a:r>
             <a:endParaRPr lang="en-US" sz="1100" dirty="0"/>
           </a:p>
@@ -10058,7 +10936,7 @@
                 <a:ea typeface="Malgun Gothic" pitchFamily="34" charset="-122"/>
                 <a:cs typeface="Malgun Gothic" pitchFamily="34" charset="-120"/>
               </a:rPr>
-              <a:t>→ 행택 품질표시와 1:1</a:t>
+              <a:t>→ 그래서 '다른 신발용'</a:t>
             </a:r>
             <a:endParaRPr lang="en-US" sz="1100" dirty="0"/>
           </a:p>
@@ -10097,7 +10975,7 @@
                 <a:ea typeface="Malgun Gothic" pitchFamily="34" charset="-122"/>
                 <a:cs typeface="Malgun Gothic" pitchFamily="34" charset="-120"/>
               </a:rPr>
-              <a:t>REF · content/insole-product-info-notice.md</a:t>
+              <a:t>REF · 역설 메시지 (스레드 실측 반응 좋음)</a:t>
             </a:r>
             <a:endParaRPr lang="en-US" sz="1000" dirty="0"/>
           </a:p>
@@ -10136,12 +11014,12 @@
         </p:nvSpPr>
         <p:spPr>
           <a:xfrm>
-            <a:off x="4681728" y="2103120"/>
-            <a:ext cx="2286000" cy="1371600"/>
+            <a:off x="4681728" y="2148840"/>
+            <a:ext cx="2286000" cy="384048"/>
           </a:xfrm>
           <a:prstGeom prst="roundRect">
             <a:avLst>
-              <a:gd name="adj" fmla="val 2000"/>
+              <a:gd name="adj" fmla="val 7143"/>
             </a:avLst>
           </a:prstGeom>
           <a:solidFill>
@@ -10163,8 +11041,8 @@
         </p:nvSpPr>
         <p:spPr>
           <a:xfrm>
-            <a:off x="4718304" y="2103120"/>
-            <a:ext cx="2212848" cy="1371600"/>
+            <a:off x="4718304" y="2148840"/>
+            <a:ext cx="2212848" cy="384048"/>
           </a:xfrm>
           <a:prstGeom prst="rect">
             <a:avLst/>
@@ -10180,85 +11058,17 @@
               <a:buNone/>
             </a:pPr>
             <a:r>
-              <a:rPr lang="en-US" sz="700" dirty="0">
-                <a:solidFill>
-                  <a:srgbClr val="232323"/>
-                </a:solidFill>
-                <a:latin typeface="Malgun Gothic" pitchFamily="34" charset="0"/>
-                <a:ea typeface="Malgun Gothic" pitchFamily="34" charset="-122"/>
-                <a:cs typeface="Malgun Gothic" pitchFamily="34" charset="-120"/>
-              </a:rPr>
-              <a:t>제품명 · 모델명 [K02]</a:t>
-            </a:r>
-            <a:endParaRPr lang="en-US" sz="700" dirty="0"/>
-          </a:p>
-          <a:p>
-            <a:pPr algn="l" indent="0" marL="0">
-              <a:buNone/>
-            </a:pPr>
-            <a:r>
-              <a:rPr lang="en-US" sz="700" dirty="0">
-                <a:solidFill>
-                  <a:srgbClr val="232323"/>
-                </a:solidFill>
-                <a:latin typeface="Malgun Gothic" pitchFamily="34" charset="0"/>
-                <a:ea typeface="Malgun Gothic" pitchFamily="34" charset="-122"/>
-                <a:cs typeface="Malgun Gothic" pitchFamily="34" charset="-120"/>
-              </a:rPr>
-              <a:t>소재: E-실리폴리렌 + 우드칩</a:t>
-            </a:r>
-            <a:endParaRPr lang="en-US" sz="700" dirty="0"/>
-          </a:p>
-          <a:p>
-            <a:pPr algn="l" indent="0" marL="0">
-              <a:buNone/>
-            </a:pPr>
-            <a:r>
-              <a:rPr lang="en-US" sz="700" dirty="0">
-                <a:solidFill>
-                  <a:srgbClr val="232323"/>
-                </a:solidFill>
-                <a:latin typeface="Malgun Gothic" pitchFamily="34" charset="0"/>
-                <a:ea typeface="Malgun Gothic" pitchFamily="34" charset="-122"/>
-                <a:cs typeface="Malgun Gothic" pitchFamily="34" charset="-120"/>
-              </a:rPr>
-              <a:t>사이즈 M · L · 색상 [ ]</a:t>
-            </a:r>
-            <a:endParaRPr lang="en-US" sz="700" dirty="0"/>
-          </a:p>
-          <a:p>
-            <a:pPr algn="l" indent="0" marL="0">
-              <a:buNone/>
-            </a:pPr>
-            <a:r>
-              <a:rPr lang="en-US" sz="700" dirty="0">
-                <a:solidFill>
-                  <a:srgbClr val="232323"/>
-                </a:solidFill>
-                <a:latin typeface="Malgun Gothic" pitchFamily="34" charset="0"/>
-                <a:ea typeface="Malgun Gothic" pitchFamily="34" charset="-122"/>
-                <a:cs typeface="Malgun Gothic" pitchFamily="34" charset="-120"/>
-              </a:rPr>
-              <a:t>제조국 대한민국 · ㈜알앤디메이커스</a:t>
-            </a:r>
-            <a:endParaRPr lang="en-US" sz="700" dirty="0"/>
-          </a:p>
-          <a:p>
-            <a:pPr algn="l" indent="0" marL="0">
-              <a:buNone/>
-            </a:pPr>
-            <a:r>
-              <a:rPr lang="en-US" sz="700" dirty="0">
-                <a:solidFill>
-                  <a:srgbClr val="232323"/>
-                </a:solidFill>
-                <a:latin typeface="Malgun Gothic" pitchFamily="34" charset="0"/>
-                <a:ea typeface="Malgun Gothic" pitchFamily="34" charset="-122"/>
-                <a:cs typeface="Malgun Gothic" pitchFamily="34" charset="-120"/>
-              </a:rPr>
-              <a:t>고객센터 0507-1317-2516</a:t>
-            </a:r>
-            <a:endParaRPr lang="en-US" sz="700" dirty="0"/>
+              <a:rPr lang="en-US" sz="800" dirty="0">
+                <a:solidFill>
+                  <a:srgbClr val="232323"/>
+                </a:solidFill>
+                <a:latin typeface="Malgun Gothic" pitchFamily="34" charset="0"/>
+                <a:ea typeface="Malgun Gothic" pitchFamily="34" charset="-122"/>
+                <a:cs typeface="Malgun Gothic" pitchFamily="34" charset="-120"/>
+              </a:rPr>
+              <a:t>✓ 오래 서 있거나 걷는 일이 많다</a:t>
+            </a:r>
+            <a:endParaRPr lang="en-US" sz="800" dirty="0"/>
           </a:p>
         </p:txBody>
       </p:sp>
@@ -10270,12 +11080,12 @@
         </p:nvSpPr>
         <p:spPr>
           <a:xfrm>
-            <a:off x="4681728" y="3611880"/>
-            <a:ext cx="2286000" cy="548640"/>
+            <a:off x="4681728" y="2606040"/>
+            <a:ext cx="2286000" cy="384048"/>
           </a:xfrm>
           <a:prstGeom prst="roundRect">
             <a:avLst>
-              <a:gd name="adj" fmla="val 5000"/>
+              <a:gd name="adj" fmla="val 7143"/>
             </a:avLst>
           </a:prstGeom>
           <a:solidFill>
@@ -10283,7 +11093,7 @@
           </a:solidFill>
           <a:ln w="9525">
             <a:solidFill>
-              <a:srgbClr val="FF6B3D"/>
+              <a:srgbClr val="D9D6CF"/>
             </a:solidFill>
             <a:prstDash val="solid"/>
           </a:ln>
@@ -10297,8 +11107,8 @@
         </p:nvSpPr>
         <p:spPr>
           <a:xfrm>
-            <a:off x="4718304" y="3611880"/>
-            <a:ext cx="2212848" cy="548640"/>
+            <a:off x="4718304" y="2606040"/>
+            <a:ext cx="2212848" cy="384048"/>
           </a:xfrm>
           <a:prstGeom prst="rect">
             <a:avLst/>
@@ -10310,38 +11120,21 @@
           <a:bodyPr wrap="square" lIns="0" tIns="0" rIns="0" bIns="0" rtlCol="0" anchor="ctr"/>
           <a:lstStyle/>
           <a:p>
-            <a:pPr algn="ctr" indent="0" marL="0">
-              <a:buNone/>
-            </a:pPr>
-            <a:r>
-              <a:rPr lang="en-US" sz="700" dirty="0">
-                <a:solidFill>
-                  <a:srgbClr val="232323"/>
-                </a:solidFill>
-                <a:latin typeface="Malgun Gothic" pitchFamily="34" charset="0"/>
-                <a:ea typeface="Malgun Gothic" pitchFamily="34" charset="-122"/>
-                <a:cs typeface="Malgun Gothic" pitchFamily="34" charset="-120"/>
-              </a:rPr>
-              <a:t>고온·직사광선 ✗ · 건조기·표백제 ✗</a:t>
-            </a:r>
-            <a:endParaRPr lang="en-US" sz="700" dirty="0"/>
-          </a:p>
-          <a:p>
-            <a:pPr algn="ctr" indent="0" marL="0">
-              <a:buNone/>
-            </a:pPr>
-            <a:r>
-              <a:rPr lang="en-US" sz="700" dirty="0">
-                <a:solidFill>
-                  <a:srgbClr val="232323"/>
-                </a:solidFill>
-                <a:latin typeface="Malgun Gothic" pitchFamily="34" charset="0"/>
-                <a:ea typeface="Malgun Gothic" pitchFamily="34" charset="-122"/>
-                <a:cs typeface="Malgun Gothic" pitchFamily="34" charset="-120"/>
-              </a:rPr>
-              <a:t>깔창 용도 외 사용 ✗</a:t>
-            </a:r>
-            <a:endParaRPr lang="en-US" sz="700" dirty="0"/>
+            <a:pPr algn="l" indent="0" marL="0">
+              <a:buNone/>
+            </a:pPr>
+            <a:r>
+              <a:rPr lang="en-US" sz="800" dirty="0">
+                <a:solidFill>
+                  <a:srgbClr val="232323"/>
+                </a:solidFill>
+                <a:latin typeface="Malgun Gothic" pitchFamily="34" charset="0"/>
+                <a:ea typeface="Malgun Gothic" pitchFamily="34" charset="-122"/>
+                <a:cs typeface="Malgun Gothic" pitchFamily="34" charset="-120"/>
+              </a:rPr>
+              <a:t>✓ 신을 때 신발이 헐겁게 빠진다</a:t>
+            </a:r>
+            <a:endParaRPr lang="en-US" sz="800" dirty="0"/>
           </a:p>
         </p:txBody>
       </p:sp>
@@ -10353,248 +11146,12 @@
         </p:nvSpPr>
         <p:spPr>
           <a:xfrm>
-            <a:off x="4681728" y="4297680"/>
-            <a:ext cx="2286000" cy="457200"/>
+            <a:off x="4681728" y="3063240"/>
+            <a:ext cx="2286000" cy="384048"/>
           </a:xfrm>
           <a:prstGeom prst="roundRect">
             <a:avLst>
-              <a:gd name="adj" fmla="val 6000"/>
-            </a:avLst>
-          </a:prstGeom>
-          <a:solidFill>
-            <a:srgbClr val="F1F1F1"/>
-          </a:solidFill>
-          <a:ln w="12700">
-            <a:solidFill>
-              <a:srgbClr val="F1F1F1"/>
-            </a:solidFill>
-            <a:prstDash val="solid"/>
-          </a:ln>
-        </p:spPr>
-      </p:sp>
-      <p:sp>
-        <p:nvSpPr>
-          <p:cNvPr id="24" name="Text 22"/>
-          <p:cNvSpPr txBox="1"/>
-          <p:nvPr/>
-        </p:nvSpPr>
-        <p:spPr>
-          <a:xfrm>
-            <a:off x="4718304" y="4297680"/>
-            <a:ext cx="2212848" cy="457200"/>
-          </a:xfrm>
-          <a:prstGeom prst="rect">
-            <a:avLst/>
-          </a:prstGeom>
-          <a:noFill/>
-          <a:ln/>
-        </p:spPr>
-        <p:txBody>
-          <a:bodyPr wrap="square" lIns="0" tIns="0" rIns="0" bIns="0" rtlCol="0" anchor="ctr"/>
-          <a:lstStyle/>
-          <a:p>
-            <a:pPr algn="ctr" indent="0" marL="0">
-              <a:buNone/>
-            </a:pPr>
-            <a:r>
-              <a:rPr lang="en-US" sz="700" b="1" dirty="0">
-                <a:solidFill>
-                  <a:srgbClr val="232323"/>
-                </a:solidFill>
-                <a:latin typeface="Malgun Gothic" pitchFamily="34" charset="0"/>
-                <a:ea typeface="Malgun Gothic" pitchFamily="34" charset="-122"/>
-                <a:cs typeface="Malgun Gothic" pitchFamily="34" charset="-120"/>
-              </a:rPr>
-              <a:t>본 제품은 의료기기가 아닙니다.</a:t>
-            </a:r>
-            <a:endParaRPr lang="en-US" sz="700" dirty="0"/>
-          </a:p>
-        </p:txBody>
-      </p:sp>
-      <p:sp>
-        <p:nvSpPr>
-          <p:cNvPr id="25" name="Text 23"/>
-          <p:cNvSpPr txBox="1"/>
-          <p:nvPr/>
-        </p:nvSpPr>
-        <p:spPr>
-          <a:xfrm>
-            <a:off x="4178808" y="5687568"/>
-            <a:ext cx="3291840" cy="457200"/>
-          </a:xfrm>
-          <a:prstGeom prst="rect">
-            <a:avLst/>
-          </a:prstGeom>
-          <a:noFill/>
-          <a:ln/>
-        </p:spPr>
-        <p:txBody>
-          <a:bodyPr wrap="square" lIns="0" tIns="0" rIns="0" bIns="0" rtlCol="0" anchor="t"/>
-          <a:lstStyle/>
-          <a:p>
-            <a:pPr algn="ctr" indent="0" marL="0">
-              <a:buNone/>
-            </a:pPr>
-            <a:r>
-              <a:rPr lang="en-US" sz="1000" dirty="0">
-                <a:solidFill>
-                  <a:srgbClr val="8A8A8A"/>
-                </a:solidFill>
-                <a:latin typeface="Malgun Gothic" pitchFamily="34" charset="0"/>
-                <a:ea typeface="Malgun Gothic" pitchFamily="34" charset="-122"/>
-                <a:cs typeface="Malgun Gothic" pitchFamily="34" charset="-120"/>
-              </a:rPr>
-              <a:t>스펙 표 + 주의 아이콘 + 의료기기 아님 고지</a:t>
-            </a:r>
-            <a:endParaRPr lang="en-US" sz="1000" dirty="0"/>
-          </a:p>
-        </p:txBody>
-      </p:sp>
-      <p:sp>
-        <p:nvSpPr>
-          <p:cNvPr id="26" name="Text 24"/>
-          <p:cNvSpPr txBox="1"/>
-          <p:nvPr/>
-        </p:nvSpPr>
-        <p:spPr>
-          <a:xfrm>
-            <a:off x="7845552" y="2011680"/>
-            <a:ext cx="3108960" cy="3291840"/>
-          </a:xfrm>
-          <a:prstGeom prst="rect">
-            <a:avLst/>
-          </a:prstGeom>
-          <a:noFill/>
-          <a:ln/>
-        </p:spPr>
-        <p:txBody>
-          <a:bodyPr wrap="square" lIns="0" tIns="0" rIns="0" bIns="0" rtlCol="0" anchor="ctr"/>
-          <a:lstStyle/>
-          <a:p>
-            <a:pPr algn="ctr" indent="0" marL="0">
-              <a:lnSpc>
-                <a:spcPct val="125000"/>
-              </a:lnSpc>
-              <a:buNone/>
-            </a:pPr>
-            <a:r>
-              <a:rPr lang="en-US" sz="1600" b="1" dirty="0">
-                <a:solidFill>
-                  <a:srgbClr val="232323"/>
-                </a:solidFill>
-                <a:latin typeface="Malgun Gothic" pitchFamily="34" charset="0"/>
-                <a:ea typeface="Malgun Gothic" pitchFamily="34" charset="-122"/>
-                <a:cs typeface="Malgun Gothic" pitchFamily="34" charset="-120"/>
-              </a:rPr>
-              <a:t>PRODUCT SPEC</a:t>
-            </a:r>
-            <a:endParaRPr lang="en-US" sz="1600" dirty="0"/>
-          </a:p>
-          <a:p>
-            <a:pPr algn="ctr" indent="0" marL="0">
-              <a:lnSpc>
-                <a:spcPct val="125000"/>
-              </a:lnSpc>
-              <a:buNone/>
-            </a:pPr>
-            <a:r>
-              <a:rPr lang="en-US" sz="800" dirty="0">
-                <a:solidFill>
-                  <a:srgbClr val="232323"/>
-                </a:solidFill>
-                <a:latin typeface="Malgun Gothic" pitchFamily="34" charset="0"/>
-                <a:ea typeface="Malgun Gothic" pitchFamily="34" charset="-122"/>
-                <a:cs typeface="Malgun Gothic" pitchFamily="34" charset="-120"/>
-              </a:rPr>
-              <a:t> </a:t>
-            </a:r>
-            <a:endParaRPr lang="en-US" sz="1600" dirty="0"/>
-          </a:p>
-          <a:p>
-            <a:pPr algn="ctr" indent="0" marL="0">
-              <a:lnSpc>
-                <a:spcPct val="125000"/>
-              </a:lnSpc>
-              <a:buNone/>
-            </a:pPr>
-            <a:r>
-              <a:rPr lang="en-US" sz="1400" dirty="0">
-                <a:solidFill>
-                  <a:srgbClr val="232323"/>
-                </a:solidFill>
-                <a:latin typeface="Malgun Gothic" pitchFamily="34" charset="0"/>
-                <a:ea typeface="Malgun Gothic" pitchFamily="34" charset="-122"/>
-                <a:cs typeface="Malgun Gothic" pitchFamily="34" charset="-120"/>
-              </a:rPr>
-              <a:t>소재 · 사이즈 · 제조국 · 제조자</a:t>
-            </a:r>
-            <a:endParaRPr lang="en-US" sz="1600" dirty="0"/>
-          </a:p>
-          <a:p>
-            <a:pPr algn="ctr" indent="0" marL="0">
-              <a:lnSpc>
-                <a:spcPct val="125000"/>
-              </a:lnSpc>
-              <a:buNone/>
-            </a:pPr>
-            <a:endParaRPr lang="en-US" sz="1600" dirty="0"/>
-          </a:p>
-          <a:p>
-            <a:pPr algn="ctr" indent="0" marL="0">
-              <a:lnSpc>
-                <a:spcPct val="125000"/>
-              </a:lnSpc>
-              <a:buNone/>
-            </a:pPr>
-            <a:r>
-              <a:rPr lang="en-US" sz="1400" dirty="0">
-                <a:solidFill>
-                  <a:srgbClr val="232323"/>
-                </a:solidFill>
-                <a:latin typeface="Malgun Gothic" pitchFamily="34" charset="0"/>
-                <a:ea typeface="Malgun Gothic" pitchFamily="34" charset="-122"/>
-                <a:cs typeface="Malgun Gothic" pitchFamily="34" charset="-120"/>
-              </a:rPr>
-              <a:t>고온 · 건조기 · 표백제 주의</a:t>
-            </a:r>
-            <a:endParaRPr lang="en-US" sz="1600" dirty="0"/>
-          </a:p>
-          <a:p>
-            <a:pPr algn="ctr" indent="0" marL="0">
-              <a:lnSpc>
-                <a:spcPct val="125000"/>
-              </a:lnSpc>
-              <a:buNone/>
-            </a:pPr>
-            <a:r>
-              <a:rPr lang="en-US" sz="1400" dirty="0">
-                <a:solidFill>
-                  <a:srgbClr val="232323"/>
-                </a:solidFill>
-                <a:latin typeface="Malgun Gothic" pitchFamily="34" charset="0"/>
-                <a:ea typeface="Malgun Gothic" pitchFamily="34" charset="-122"/>
-                <a:cs typeface="Malgun Gothic" pitchFamily="34" charset="-120"/>
-              </a:rPr>
-              <a:t>본 제품은 의료기기가 아닙니다.</a:t>
-            </a:r>
-            <a:endParaRPr lang="en-US" sz="1600" dirty="0"/>
-          </a:p>
-        </p:txBody>
-      </p:sp>
-      <p:sp>
-        <p:nvSpPr>
-          <p:cNvPr id="27" name="Shape 25"/>
-          <p:cNvSpPr/>
-          <p:nvPr/>
-        </p:nvSpPr>
-        <p:spPr>
-          <a:xfrm>
-            <a:off x="7936992" y="5486400"/>
-            <a:ext cx="2926080" cy="566928"/>
-          </a:xfrm>
-          <a:prstGeom prst="roundRect">
-            <a:avLst>
-              <a:gd name="adj" fmla="val 9677"/>
+              <a:gd name="adj" fmla="val 7143"/>
             </a:avLst>
           </a:prstGeom>
           <a:solidFill>
@@ -10602,7 +11159,7 @@
           </a:solidFill>
           <a:ln w="9525">
             <a:solidFill>
-              <a:srgbClr val="FF6B3D"/>
+              <a:srgbClr val="D9D6CF"/>
             </a:solidFill>
             <a:prstDash val="solid"/>
           </a:ln>
@@ -10610,14 +11167,146 @@
       </p:sp>
       <p:sp>
         <p:nvSpPr>
+          <p:cNvPr id="24" name="Text 22"/>
+          <p:cNvSpPr txBox="1"/>
+          <p:nvPr/>
+        </p:nvSpPr>
+        <p:spPr>
+          <a:xfrm>
+            <a:off x="4718304" y="3063240"/>
+            <a:ext cx="2212848" cy="384048"/>
+          </a:xfrm>
+          <a:prstGeom prst="rect">
+            <a:avLst/>
+          </a:prstGeom>
+          <a:noFill/>
+          <a:ln/>
+        </p:spPr>
+        <p:txBody>
+          <a:bodyPr wrap="square" lIns="0" tIns="0" rIns="0" bIns="0" rtlCol="0" anchor="ctr"/>
+          <a:lstStyle/>
+          <a:p>
+            <a:pPr algn="l" indent="0" marL="0">
+              <a:buNone/>
+            </a:pPr>
+            <a:r>
+              <a:rPr lang="en-US" sz="800" dirty="0">
+                <a:solidFill>
+                  <a:srgbClr val="232323"/>
+                </a:solidFill>
+                <a:latin typeface="Malgun Gothic" pitchFamily="34" charset="0"/>
+                <a:ea typeface="Malgun Gothic" pitchFamily="34" charset="-122"/>
+                <a:cs typeface="Malgun Gothic" pitchFamily="34" charset="-120"/>
+              </a:rPr>
+              <a:t>✓ 쓰던 깔창은 그대로 두고 싶다</a:t>
+            </a:r>
+            <a:endParaRPr lang="en-US" sz="800" dirty="0"/>
+          </a:p>
+        </p:txBody>
+      </p:sp>
+      <p:sp>
+        <p:nvSpPr>
+          <p:cNvPr id="25" name="Shape 23"/>
+          <p:cNvSpPr/>
+          <p:nvPr/>
+        </p:nvSpPr>
+        <p:spPr>
+          <a:xfrm>
+            <a:off x="4681728" y="3520440"/>
+            <a:ext cx="2286000" cy="384048"/>
+          </a:xfrm>
+          <a:prstGeom prst="roundRect">
+            <a:avLst>
+              <a:gd name="adj" fmla="val 7143"/>
+            </a:avLst>
+          </a:prstGeom>
+          <a:solidFill>
+            <a:srgbClr val="FFFFFF"/>
+          </a:solidFill>
+          <a:ln w="9525">
+            <a:solidFill>
+              <a:srgbClr val="D9D6CF"/>
+            </a:solidFill>
+            <a:prstDash val="solid"/>
+          </a:ln>
+        </p:spPr>
+      </p:sp>
+      <p:sp>
+        <p:nvSpPr>
+          <p:cNvPr id="26" name="Text 24"/>
+          <p:cNvSpPr txBox="1"/>
+          <p:nvPr/>
+        </p:nvSpPr>
+        <p:spPr>
+          <a:xfrm>
+            <a:off x="4718304" y="3520440"/>
+            <a:ext cx="2212848" cy="384048"/>
+          </a:xfrm>
+          <a:prstGeom prst="rect">
+            <a:avLst/>
+          </a:prstGeom>
+          <a:noFill/>
+          <a:ln/>
+        </p:spPr>
+        <p:txBody>
+          <a:bodyPr wrap="square" lIns="0" tIns="0" rIns="0" bIns="0" rtlCol="0" anchor="ctr"/>
+          <a:lstStyle/>
+          <a:p>
+            <a:pPr algn="l" indent="0" marL="0">
+              <a:buNone/>
+            </a:pPr>
+            <a:r>
+              <a:rPr lang="en-US" sz="800" dirty="0">
+                <a:solidFill>
+                  <a:srgbClr val="232323"/>
+                </a:solidFill>
+                <a:latin typeface="Malgun Gothic" pitchFamily="34" charset="0"/>
+                <a:ea typeface="Malgun Gothic" pitchFamily="34" charset="-122"/>
+                <a:cs typeface="Malgun Gothic" pitchFamily="34" charset="-120"/>
+              </a:rPr>
+              <a:t>✓ 새 신발 대신 바닥만 바꾸고 싶다</a:t>
+            </a:r>
+            <a:endParaRPr lang="en-US" sz="800" dirty="0"/>
+          </a:p>
+        </p:txBody>
+      </p:sp>
+      <p:sp>
+        <p:nvSpPr>
+          <p:cNvPr id="27" name="Shape 25"/>
+          <p:cNvSpPr/>
+          <p:nvPr/>
+        </p:nvSpPr>
+        <p:spPr>
+          <a:xfrm>
+            <a:off x="4681728" y="4069080"/>
+            <a:ext cx="2286000" cy="868680"/>
+          </a:xfrm>
+          <a:prstGeom prst="roundRect">
+            <a:avLst>
+              <a:gd name="adj" fmla="val 3158"/>
+            </a:avLst>
+          </a:prstGeom>
+          <a:solidFill>
+            <a:srgbClr val="232323"/>
+          </a:solidFill>
+          <a:ln w="12700">
+            <a:solidFill>
+              <a:srgbClr val="232323"/>
+            </a:solidFill>
+            <a:prstDash val="solid"/>
+          </a:ln>
+        </p:spPr>
+      </p:sp>
+      <p:sp>
+        <p:nvSpPr>
           <p:cNvPr id="28" name="Text 26"/>
           <p:cNvSpPr txBox="1"/>
           <p:nvPr/>
         </p:nvSpPr>
         <p:spPr>
           <a:xfrm>
-            <a:off x="8046720" y="5486400"/>
-            <a:ext cx="2706624" cy="566928"/>
+            <a:off x="4718304" y="4069080"/>
+            <a:ext cx="2212848" cy="868680"/>
           </a:xfrm>
           <a:prstGeom prst="rect">
             <a:avLst/>
@@ -10629,21 +11318,265 @@
           <a:bodyPr wrap="square" lIns="0" tIns="0" rIns="0" bIns="0" rtlCol="0" anchor="ctr"/>
           <a:lstStyle/>
           <a:p>
-            <a:pPr indent="0" marL="0">
-              <a:buNone/>
-            </a:pPr>
-            <a:r>
-              <a:rPr lang="en-US" sz="900" dirty="0">
-                <a:solidFill>
-                  <a:srgbClr val="232323"/>
-                </a:solidFill>
-                <a:latin typeface="Malgun Gothic" pitchFamily="34" charset="0"/>
-                <a:ea typeface="Malgun Gothic" pitchFamily="34" charset="-122"/>
-                <a:cs typeface="Malgun Gothic" pitchFamily="34" charset="-120"/>
-              </a:rPr>
-              <a:t>⚠ 🔴 고시 빈칸(모델명·색상·mm·보증일수·CS시간) 채운 뒤 확정</a:t>
-            </a:r>
-            <a:endParaRPr lang="en-US" sz="900" dirty="0"/>
+            <a:pPr algn="ctr" indent="0" marL="0">
+              <a:buNone/>
+            </a:pPr>
+            <a:r>
+              <a:rPr lang="en-US" sz="700" dirty="0">
+                <a:solidFill>
+                  <a:srgbClr val="C6F432"/>
+                </a:solidFill>
+                <a:latin typeface="Malgun Gothic" pitchFamily="34" charset="0"/>
+                <a:ea typeface="Malgun Gothic" pitchFamily="34" charset="-122"/>
+                <a:cs typeface="Malgun Gothic" pitchFamily="34" charset="-120"/>
+              </a:rPr>
+              <a:t>라라슈 워킹화엔 필요 없어요</a:t>
+            </a:r>
+            <a:endParaRPr lang="en-US" sz="700" dirty="0"/>
+          </a:p>
+          <a:p>
+            <a:pPr algn="ctr" indent="0" marL="0">
+              <a:buNone/>
+            </a:pPr>
+            <a:r>
+              <a:rPr lang="en-US" sz="700" dirty="0">
+                <a:solidFill>
+                  <a:srgbClr val="C6F432"/>
+                </a:solidFill>
+                <a:latin typeface="Malgun Gothic" pitchFamily="34" charset="0"/>
+                <a:ea typeface="Malgun Gothic" pitchFamily="34" charset="-122"/>
+                <a:cs typeface="Malgun Gothic" pitchFamily="34" charset="-120"/>
+              </a:rPr>
+              <a:t>— 깔창 없는 일체형이니까</a:t>
+            </a:r>
+            <a:endParaRPr lang="en-US" sz="700" dirty="0"/>
+          </a:p>
+          <a:p>
+            <a:pPr algn="ctr" indent="0" marL="0">
+              <a:buNone/>
+            </a:pPr>
+            <a:r>
+              <a:rPr lang="en-US" sz="700" dirty="0">
+                <a:solidFill>
+                  <a:srgbClr val="C6F432"/>
+                </a:solidFill>
+                <a:latin typeface="Malgun Gothic" pitchFamily="34" charset="0"/>
+                <a:ea typeface="Malgun Gothic" pitchFamily="34" charset="-122"/>
+                <a:cs typeface="Malgun Gothic" pitchFamily="34" charset="-120"/>
+              </a:rPr>
+              <a:t>워킹화 보러 가기 →</a:t>
+            </a:r>
+            <a:endParaRPr lang="en-US" sz="700" dirty="0"/>
+          </a:p>
+        </p:txBody>
+      </p:sp>
+      <p:sp>
+        <p:nvSpPr>
+          <p:cNvPr id="29" name="Text 27"/>
+          <p:cNvSpPr txBox="1"/>
+          <p:nvPr/>
+        </p:nvSpPr>
+        <p:spPr>
+          <a:xfrm>
+            <a:off x="4178808" y="5687568"/>
+            <a:ext cx="3291840" cy="457200"/>
+          </a:xfrm>
+          <a:prstGeom prst="rect">
+            <a:avLst/>
+          </a:prstGeom>
+          <a:noFill/>
+          <a:ln/>
+        </p:spPr>
+        <p:txBody>
+          <a:bodyPr wrap="square" lIns="0" tIns="0" rIns="0" bIns="0" rtlCol="0" anchor="t"/>
+          <a:lstStyle/>
+          <a:p>
+            <a:pPr algn="ctr" indent="0" marL="0">
+              <a:buNone/>
+            </a:pPr>
+            <a:r>
+              <a:rPr lang="en-US" sz="1000" dirty="0">
+                <a:solidFill>
+                  <a:srgbClr val="8A8A8A"/>
+                </a:solidFill>
+                <a:latin typeface="Malgun Gothic" pitchFamily="34" charset="0"/>
+                <a:ea typeface="Malgun Gothic" pitchFamily="34" charset="-122"/>
+                <a:cs typeface="Malgun Gothic" pitchFamily="34" charset="-120"/>
+              </a:rPr>
+              <a:t>체크 4줄 + 하단 워킹화 배너</a:t>
+            </a:r>
+            <a:endParaRPr lang="en-US" sz="1000" dirty="0"/>
+          </a:p>
+        </p:txBody>
+      </p:sp>
+      <p:sp>
+        <p:nvSpPr>
+          <p:cNvPr id="30" name="Text 28"/>
+          <p:cNvSpPr txBox="1"/>
+          <p:nvPr/>
+        </p:nvSpPr>
+        <p:spPr>
+          <a:xfrm>
+            <a:off x="7845552" y="2011680"/>
+            <a:ext cx="3108960" cy="3291840"/>
+          </a:xfrm>
+          <a:prstGeom prst="rect">
+            <a:avLst/>
+          </a:prstGeom>
+          <a:noFill/>
+          <a:ln/>
+        </p:spPr>
+        <p:txBody>
+          <a:bodyPr wrap="square" lIns="0" tIns="0" rIns="0" bIns="0" rtlCol="0" anchor="ctr"/>
+          <a:lstStyle/>
+          <a:p>
+            <a:pPr algn="ctr" indent="0" marL="0">
+              <a:lnSpc>
+                <a:spcPct val="125000"/>
+              </a:lnSpc>
+              <a:buNone/>
+            </a:pPr>
+            <a:r>
+              <a:rPr lang="en-US" sz="1600" b="1" dirty="0">
+                <a:solidFill>
+                  <a:srgbClr val="232323"/>
+                </a:solidFill>
+                <a:latin typeface="Malgun Gothic" pitchFamily="34" charset="0"/>
+                <a:ea typeface="Malgun Gothic" pitchFamily="34" charset="-122"/>
+                <a:cs typeface="Malgun Gothic" pitchFamily="34" charset="-120"/>
+              </a:rPr>
+              <a:t>하나라도 해당되면</a:t>
+            </a:r>
+            <a:endParaRPr lang="en-US" sz="1600" dirty="0"/>
+          </a:p>
+          <a:p>
+            <a:pPr algn="ctr" indent="0" marL="0">
+              <a:lnSpc>
+                <a:spcPct val="125000"/>
+              </a:lnSpc>
+              <a:buNone/>
+            </a:pPr>
+            <a:r>
+              <a:rPr lang="en-US" sz="800" dirty="0">
+                <a:solidFill>
+                  <a:srgbClr val="232323"/>
+                </a:solidFill>
+                <a:latin typeface="Malgun Gothic" pitchFamily="34" charset="0"/>
+                <a:ea typeface="Malgun Gothic" pitchFamily="34" charset="-122"/>
+                <a:cs typeface="Malgun Gothic" pitchFamily="34" charset="-120"/>
+              </a:rPr>
+              <a:t> </a:t>
+            </a:r>
+            <a:endParaRPr lang="en-US" sz="1600" dirty="0"/>
+          </a:p>
+          <a:p>
+            <a:pPr algn="ctr" indent="0" marL="0">
+              <a:lnSpc>
+                <a:spcPct val="125000"/>
+              </a:lnSpc>
+              <a:buNone/>
+            </a:pPr>
+            <a:r>
+              <a:rPr lang="en-US" sz="1400" dirty="0">
+                <a:solidFill>
+                  <a:srgbClr val="232323"/>
+                </a:solidFill>
+                <a:latin typeface="Malgun Gothic" pitchFamily="34" charset="0"/>
+                <a:ea typeface="Malgun Gothic" pitchFamily="34" charset="-122"/>
+                <a:cs typeface="Malgun Gothic" pitchFamily="34" charset="-120"/>
+              </a:rPr>
+              <a:t>✓ 오래 서 있거나 걷는 일이 많다</a:t>
+            </a:r>
+            <a:endParaRPr lang="en-US" sz="1600" dirty="0"/>
+          </a:p>
+          <a:p>
+            <a:pPr algn="ctr" indent="0" marL="0">
+              <a:lnSpc>
+                <a:spcPct val="125000"/>
+              </a:lnSpc>
+              <a:buNone/>
+            </a:pPr>
+            <a:r>
+              <a:rPr lang="en-US" sz="1400" dirty="0">
+                <a:solidFill>
+                  <a:srgbClr val="232323"/>
+                </a:solidFill>
+                <a:latin typeface="Malgun Gothic" pitchFamily="34" charset="0"/>
+                <a:ea typeface="Malgun Gothic" pitchFamily="34" charset="-122"/>
+                <a:cs typeface="Malgun Gothic" pitchFamily="34" charset="-120"/>
+              </a:rPr>
+              <a:t>✓ 신을 때 신발이 헐겁게 빠진다</a:t>
+            </a:r>
+            <a:endParaRPr lang="en-US" sz="1600" dirty="0"/>
+          </a:p>
+          <a:p>
+            <a:pPr algn="ctr" indent="0" marL="0">
+              <a:lnSpc>
+                <a:spcPct val="125000"/>
+              </a:lnSpc>
+              <a:buNone/>
+            </a:pPr>
+            <a:r>
+              <a:rPr lang="en-US" sz="1400" dirty="0">
+                <a:solidFill>
+                  <a:srgbClr val="232323"/>
+                </a:solidFill>
+                <a:latin typeface="Malgun Gothic" pitchFamily="34" charset="0"/>
+                <a:ea typeface="Malgun Gothic" pitchFamily="34" charset="-122"/>
+                <a:cs typeface="Malgun Gothic" pitchFamily="34" charset="-120"/>
+              </a:rPr>
+              <a:t>✓ 쓰던 깔창은 그대로 두고 싶다</a:t>
+            </a:r>
+            <a:endParaRPr lang="en-US" sz="1600" dirty="0"/>
+          </a:p>
+          <a:p>
+            <a:pPr algn="ctr" indent="0" marL="0">
+              <a:lnSpc>
+                <a:spcPct val="125000"/>
+              </a:lnSpc>
+              <a:buNone/>
+            </a:pPr>
+            <a:r>
+              <a:rPr lang="en-US" sz="1400" dirty="0">
+                <a:solidFill>
+                  <a:srgbClr val="232323"/>
+                </a:solidFill>
+                <a:latin typeface="Malgun Gothic" pitchFamily="34" charset="0"/>
+                <a:ea typeface="Malgun Gothic" pitchFamily="34" charset="-122"/>
+                <a:cs typeface="Malgun Gothic" pitchFamily="34" charset="-120"/>
+              </a:rPr>
+              <a:t>✓ 새 신발 대신 바닥만 바꾸고 싶다</a:t>
+            </a:r>
+            <a:endParaRPr lang="en-US" sz="1600" dirty="0"/>
+          </a:p>
+          <a:p>
+            <a:pPr algn="ctr" indent="0" marL="0">
+              <a:lnSpc>
+                <a:spcPct val="125000"/>
+              </a:lnSpc>
+              <a:buNone/>
+            </a:pPr>
+            <a:endParaRPr lang="en-US" sz="1600" dirty="0"/>
+          </a:p>
+          <a:p>
+            <a:pPr algn="ctr" indent="0" marL="0">
+              <a:lnSpc>
+                <a:spcPct val="125000"/>
+              </a:lnSpc>
+              <a:buNone/>
+            </a:pPr>
+            <a:r>
+              <a:rPr lang="en-US" sz="1400" dirty="0">
+                <a:solidFill>
+                  <a:srgbClr val="232323"/>
+                </a:solidFill>
+                <a:latin typeface="Malgun Gothic" pitchFamily="34" charset="0"/>
+                <a:ea typeface="Malgun Gothic" pitchFamily="34" charset="-122"/>
+                <a:cs typeface="Malgun Gothic" pitchFamily="34" charset="-120"/>
+              </a:rPr>
+              <a:t>라라슈 워킹화엔 필요 없어요.</a:t>
+            </a:r>
+            <a:endParaRPr lang="en-US" sz="1600" dirty="0"/>
           </a:p>
         </p:txBody>
       </p:sp>
@@ -10778,7 +11711,1179 @@
                 <a:ea typeface="Malgun Gothic" pitchFamily="34" charset="-122"/>
                 <a:cs typeface="Malgun Gothic" pitchFamily="34" charset="-120"/>
               </a:rPr>
-              <a:t>ICUT 14 / 14   구성 · 엔딩 — Made for Standing.</a:t>
+              <a:t>ICUT 14 / 15   스펙 · 주의 · 상품정보고시</a:t>
+            </a:r>
+            <a:endParaRPr lang="en-US" sz="1600" dirty="0"/>
+          </a:p>
+        </p:txBody>
+      </p:sp>
+      <p:sp>
+        <p:nvSpPr>
+          <p:cNvPr id="5" name="Text 3"/>
+          <p:cNvSpPr txBox="1"/>
+          <p:nvPr/>
+        </p:nvSpPr>
+        <p:spPr>
+          <a:xfrm>
+            <a:off x="7498080" y="859536"/>
+            <a:ext cx="3639312" cy="274320"/>
+          </a:xfrm>
+          <a:prstGeom prst="rect">
+            <a:avLst/>
+          </a:prstGeom>
+          <a:noFill/>
+          <a:ln/>
+        </p:spPr>
+        <p:txBody>
+          <a:bodyPr wrap="square" lIns="0" tIns="0" rIns="0" bIns="0" rtlCol="0" anchor="ctr"/>
+          <a:lstStyle/>
+          <a:p>
+            <a:pPr algn="r" indent="0" marL="0">
+              <a:buNone/>
+            </a:pPr>
+            <a:r>
+              <a:rPr lang="en-US" sz="900" dirty="0">
+                <a:solidFill>
+                  <a:srgbClr val="8A8A8A"/>
+                </a:solidFill>
+                <a:latin typeface="Malgun Gothic" pitchFamily="34" charset="0"/>
+                <a:ea typeface="Malgun Gothic" pitchFamily="34" charset="-122"/>
+                <a:cs typeface="Malgun Gothic" pitchFamily="34" charset="-120"/>
+              </a:rPr>
+              <a:t>라라슈 쿼드그립 아치가득 인솔 · 스마트스토어/와디즈</a:t>
+            </a:r>
+            <a:endParaRPr lang="en-US" sz="900" dirty="0"/>
+          </a:p>
+        </p:txBody>
+      </p:sp>
+      <p:sp>
+        <p:nvSpPr>
+          <p:cNvPr id="6" name="Shape 4"/>
+          <p:cNvSpPr/>
+          <p:nvPr/>
+        </p:nvSpPr>
+        <p:spPr>
+          <a:xfrm>
+            <a:off x="512064" y="1280160"/>
+            <a:ext cx="3474720" cy="429768"/>
+          </a:xfrm>
+          <a:prstGeom prst="rect">
+            <a:avLst/>
+          </a:prstGeom>
+          <a:solidFill>
+            <a:srgbClr val="A8CF8A"/>
+          </a:solidFill>
+          <a:ln w="12700">
+            <a:solidFill>
+              <a:srgbClr val="A8CF8A"/>
+            </a:solidFill>
+            <a:prstDash val="solid"/>
+          </a:ln>
+        </p:spPr>
+      </p:sp>
+      <p:sp>
+        <p:nvSpPr>
+          <p:cNvPr id="7" name="Text 5"/>
+          <p:cNvSpPr txBox="1"/>
+          <p:nvPr/>
+        </p:nvSpPr>
+        <p:spPr>
+          <a:xfrm>
+            <a:off x="512064" y="1280160"/>
+            <a:ext cx="3474720" cy="429768"/>
+          </a:xfrm>
+          <a:prstGeom prst="rect">
+            <a:avLst/>
+          </a:prstGeom>
+          <a:noFill/>
+          <a:ln/>
+        </p:spPr>
+        <p:txBody>
+          <a:bodyPr wrap="square" lIns="0" tIns="0" rIns="0" bIns="0" rtlCol="0" anchor="ctr"/>
+          <a:lstStyle/>
+          <a:p>
+            <a:pPr algn="ctr" indent="0" marL="0">
+              <a:buNone/>
+            </a:pPr>
+            <a:r>
+              <a:rPr lang="en-US" sz="1800" dirty="0">
+                <a:solidFill>
+                  <a:srgbClr val="FFFFFF"/>
+                </a:solidFill>
+                <a:latin typeface="Malgun Gothic" pitchFamily="34" charset="0"/>
+                <a:ea typeface="Malgun Gothic" pitchFamily="34" charset="-122"/>
+                <a:cs typeface="Malgun Gothic" pitchFamily="34" charset="-120"/>
+              </a:rPr>
+              <a:t>레퍼런스</a:t>
+            </a:r>
+            <a:endParaRPr lang="en-US" sz="1800" dirty="0"/>
+          </a:p>
+        </p:txBody>
+      </p:sp>
+      <p:sp>
+        <p:nvSpPr>
+          <p:cNvPr id="8" name="Shape 6"/>
+          <p:cNvSpPr/>
+          <p:nvPr/>
+        </p:nvSpPr>
+        <p:spPr>
+          <a:xfrm>
+            <a:off x="512064" y="1709928"/>
+            <a:ext cx="3474720" cy="4663440"/>
+          </a:xfrm>
+          <a:prstGeom prst="rect">
+            <a:avLst/>
+          </a:prstGeom>
+          <a:solidFill>
+            <a:srgbClr val="F1F1F1"/>
+          </a:solidFill>
+          <a:ln w="12700">
+            <a:solidFill>
+              <a:srgbClr val="F1F1F1"/>
+            </a:solidFill>
+            <a:prstDash val="solid"/>
+          </a:ln>
+        </p:spPr>
+      </p:sp>
+      <p:sp>
+        <p:nvSpPr>
+          <p:cNvPr id="9" name="Shape 7"/>
+          <p:cNvSpPr/>
+          <p:nvPr/>
+        </p:nvSpPr>
+        <p:spPr>
+          <a:xfrm>
+            <a:off x="4087368" y="1280160"/>
+            <a:ext cx="3474720" cy="429768"/>
+          </a:xfrm>
+          <a:prstGeom prst="rect">
+            <a:avLst/>
+          </a:prstGeom>
+          <a:solidFill>
+            <a:srgbClr val="C2F0B8"/>
+          </a:solidFill>
+          <a:ln w="12700">
+            <a:solidFill>
+              <a:srgbClr val="C2F0B8"/>
+            </a:solidFill>
+            <a:prstDash val="solid"/>
+          </a:ln>
+        </p:spPr>
+      </p:sp>
+      <p:sp>
+        <p:nvSpPr>
+          <p:cNvPr id="10" name="Text 8"/>
+          <p:cNvSpPr txBox="1"/>
+          <p:nvPr/>
+        </p:nvSpPr>
+        <p:spPr>
+          <a:xfrm>
+            <a:off x="4087368" y="1280160"/>
+            <a:ext cx="3474720" cy="429768"/>
+          </a:xfrm>
+          <a:prstGeom prst="rect">
+            <a:avLst/>
+          </a:prstGeom>
+          <a:noFill/>
+          <a:ln/>
+        </p:spPr>
+        <p:txBody>
+          <a:bodyPr wrap="square" lIns="0" tIns="0" rIns="0" bIns="0" rtlCol="0" anchor="ctr"/>
+          <a:lstStyle/>
+          <a:p>
+            <a:pPr algn="ctr" indent="0" marL="0">
+              <a:buNone/>
+            </a:pPr>
+            <a:r>
+              <a:rPr lang="en-US" sz="1800" dirty="0">
+                <a:solidFill>
+                  <a:srgbClr val="232323"/>
+                </a:solidFill>
+                <a:latin typeface="Malgun Gothic" pitchFamily="34" charset="0"/>
+                <a:ea typeface="Malgun Gothic" pitchFamily="34" charset="-122"/>
+                <a:cs typeface="Malgun Gothic" pitchFamily="34" charset="-120"/>
+              </a:rPr>
+              <a:t>구성레이아웃</a:t>
+            </a:r>
+            <a:endParaRPr lang="en-US" sz="1800" dirty="0"/>
+          </a:p>
+        </p:txBody>
+      </p:sp>
+      <p:sp>
+        <p:nvSpPr>
+          <p:cNvPr id="11" name="Shape 9"/>
+          <p:cNvSpPr/>
+          <p:nvPr/>
+        </p:nvSpPr>
+        <p:spPr>
+          <a:xfrm>
+            <a:off x="4087368" y="1709928"/>
+            <a:ext cx="3474720" cy="4663440"/>
+          </a:xfrm>
+          <a:prstGeom prst="rect">
+            <a:avLst/>
+          </a:prstGeom>
+          <a:solidFill>
+            <a:srgbClr val="F1F1F1"/>
+          </a:solidFill>
+          <a:ln w="12700">
+            <a:solidFill>
+              <a:srgbClr val="F1F1F1"/>
+            </a:solidFill>
+            <a:prstDash val="solid"/>
+          </a:ln>
+        </p:spPr>
+      </p:sp>
+      <p:sp>
+        <p:nvSpPr>
+          <p:cNvPr id="12" name="Shape 10"/>
+          <p:cNvSpPr/>
+          <p:nvPr/>
+        </p:nvSpPr>
+        <p:spPr>
+          <a:xfrm>
+            <a:off x="7662672" y="1280160"/>
+            <a:ext cx="3474720" cy="429768"/>
+          </a:xfrm>
+          <a:prstGeom prst="rect">
+            <a:avLst/>
+          </a:prstGeom>
+          <a:solidFill>
+            <a:srgbClr val="0D0D0D"/>
+          </a:solidFill>
+          <a:ln w="12700">
+            <a:solidFill>
+              <a:srgbClr val="0D0D0D"/>
+            </a:solidFill>
+            <a:prstDash val="solid"/>
+          </a:ln>
+        </p:spPr>
+      </p:sp>
+      <p:sp>
+        <p:nvSpPr>
+          <p:cNvPr id="13" name="Text 11"/>
+          <p:cNvSpPr txBox="1"/>
+          <p:nvPr/>
+        </p:nvSpPr>
+        <p:spPr>
+          <a:xfrm>
+            <a:off x="7662672" y="1280160"/>
+            <a:ext cx="3474720" cy="429768"/>
+          </a:xfrm>
+          <a:prstGeom prst="rect">
+            <a:avLst/>
+          </a:prstGeom>
+          <a:noFill/>
+          <a:ln/>
+        </p:spPr>
+        <p:txBody>
+          <a:bodyPr wrap="square" lIns="0" tIns="0" rIns="0" bIns="0" rtlCol="0" anchor="ctr"/>
+          <a:lstStyle/>
+          <a:p>
+            <a:pPr algn="ctr" indent="0" marL="0">
+              <a:buNone/>
+            </a:pPr>
+            <a:r>
+              <a:rPr lang="en-US" sz="1800" dirty="0">
+                <a:solidFill>
+                  <a:srgbClr val="FFFFFF"/>
+                </a:solidFill>
+                <a:latin typeface="Malgun Gothic" pitchFamily="34" charset="0"/>
+                <a:ea typeface="Malgun Gothic" pitchFamily="34" charset="-122"/>
+                <a:cs typeface="Malgun Gothic" pitchFamily="34" charset="-120"/>
+              </a:rPr>
+              <a:t>기획안멘트</a:t>
+            </a:r>
+            <a:endParaRPr lang="en-US" sz="1800" dirty="0"/>
+          </a:p>
+        </p:txBody>
+      </p:sp>
+      <p:sp>
+        <p:nvSpPr>
+          <p:cNvPr id="14" name="Shape 12"/>
+          <p:cNvSpPr/>
+          <p:nvPr/>
+        </p:nvSpPr>
+        <p:spPr>
+          <a:xfrm>
+            <a:off x="7662672" y="1709928"/>
+            <a:ext cx="3474720" cy="4663440"/>
+          </a:xfrm>
+          <a:prstGeom prst="rect">
+            <a:avLst/>
+          </a:prstGeom>
+          <a:solidFill>
+            <a:srgbClr val="F1F1F1"/>
+          </a:solidFill>
+          <a:ln w="12700">
+            <a:solidFill>
+              <a:srgbClr val="F1F1F1"/>
+            </a:solidFill>
+            <a:prstDash val="solid"/>
+          </a:ln>
+        </p:spPr>
+      </p:sp>
+      <p:sp>
+        <p:nvSpPr>
+          <p:cNvPr id="15" name="Shape 13"/>
+          <p:cNvSpPr/>
+          <p:nvPr/>
+        </p:nvSpPr>
+        <p:spPr>
+          <a:xfrm>
+            <a:off x="694944" y="1965960"/>
+            <a:ext cx="3108960" cy="1143000"/>
+          </a:xfrm>
+          <a:prstGeom prst="roundRect">
+            <a:avLst>
+              <a:gd name="adj" fmla="val 4800"/>
+            </a:avLst>
+          </a:prstGeom>
+          <a:solidFill>
+            <a:srgbClr val="FFFFFF"/>
+          </a:solidFill>
+          <a:ln w="9525">
+            <a:solidFill>
+              <a:srgbClr val="D9D6CF"/>
+            </a:solidFill>
+            <a:prstDash val="solid"/>
+          </a:ln>
+        </p:spPr>
+      </p:sp>
+      <p:sp>
+        <p:nvSpPr>
+          <p:cNvPr id="16" name="Text 14"/>
+          <p:cNvSpPr txBox="1"/>
+          <p:nvPr/>
+        </p:nvSpPr>
+        <p:spPr>
+          <a:xfrm>
+            <a:off x="832104" y="2039112"/>
+            <a:ext cx="2834640" cy="996696"/>
+          </a:xfrm>
+          <a:prstGeom prst="rect">
+            <a:avLst/>
+          </a:prstGeom>
+          <a:noFill/>
+          <a:ln/>
+        </p:spPr>
+        <p:txBody>
+          <a:bodyPr wrap="square" lIns="0" tIns="0" rIns="0" bIns="0" rtlCol="0" anchor="ctr"/>
+          <a:lstStyle/>
+          <a:p>
+            <a:pPr indent="0" marL="0">
+              <a:spcAft>
+                <a:spcPts val="200"/>
+              </a:spcAft>
+              <a:buNone/>
+            </a:pPr>
+            <a:r>
+              <a:rPr lang="en-US" sz="1100" b="1" dirty="0">
+                <a:solidFill>
+                  <a:srgbClr val="232323"/>
+                </a:solidFill>
+                <a:latin typeface="Malgun Gothic" pitchFamily="34" charset="0"/>
+                <a:ea typeface="Malgun Gothic" pitchFamily="34" charset="-122"/>
+                <a:cs typeface="Malgun Gothic" pitchFamily="34" charset="-120"/>
+              </a:rPr>
+              <a:t>고시</a:t>
+            </a:r>
+            <a:pPr indent="0" marL="0">
+              <a:spcAft>
+                <a:spcPts val="200"/>
+              </a:spcAft>
+              <a:buNone/>
+            </a:pPr>
+            <a:r>
+              <a:rPr lang="en-US" sz="900" dirty="0">
+                <a:solidFill>
+                  <a:srgbClr val="8A8A8A"/>
+                </a:solidFill>
+                <a:latin typeface="Malgun Gothic" pitchFamily="34" charset="0"/>
+                <a:ea typeface="Malgun Gothic" pitchFamily="34" charset="-122"/>
+                <a:cs typeface="Malgun Gothic" pitchFamily="34" charset="-120"/>
+              </a:rPr>
+              <a:t>  구두/신발 + 패션잡화</a:t>
+            </a:r>
+            <a:endParaRPr lang="en-US" sz="1100" dirty="0"/>
+          </a:p>
+          <a:p>
+            <a:pPr indent="0" marL="0">
+              <a:spcAft>
+                <a:spcPts val="200"/>
+              </a:spcAft>
+              <a:buNone/>
+            </a:pPr>
+            <a:r>
+              <a:rPr lang="en-US" sz="1000" dirty="0">
+                <a:solidFill>
+                  <a:srgbClr val="232323"/>
+                </a:solidFill>
+                <a:latin typeface="Malgun Gothic" pitchFamily="34" charset="0"/>
+                <a:ea typeface="Malgun Gothic" pitchFamily="34" charset="-122"/>
+                <a:cs typeface="Malgun Gothic" pitchFamily="34" charset="-120"/>
+              </a:rPr>
+              <a:t>두 유형 모두 채움</a:t>
+            </a:r>
+            <a:endParaRPr lang="en-US" sz="1100" dirty="0"/>
+          </a:p>
+          <a:p>
+            <a:pPr indent="0" marL="0">
+              <a:spcAft>
+                <a:spcPts val="200"/>
+              </a:spcAft>
+              <a:buNone/>
+            </a:pPr>
+            <a:r>
+              <a:rPr lang="en-US" sz="1000" b="1" dirty="0">
+                <a:solidFill>
+                  <a:srgbClr val="3D4A12"/>
+                </a:solidFill>
+                <a:latin typeface="Malgun Gothic" pitchFamily="34" charset="0"/>
+                <a:ea typeface="Malgun Gothic" pitchFamily="34" charset="-122"/>
+                <a:cs typeface="Malgun Gothic" pitchFamily="34" charset="-120"/>
+              </a:rPr>
+              <a:t>→ 박스·행택 표기와 1:1</a:t>
+            </a:r>
+            <a:endParaRPr lang="en-US" sz="1100" dirty="0"/>
+          </a:p>
+        </p:txBody>
+      </p:sp>
+      <p:sp>
+        <p:nvSpPr>
+          <p:cNvPr id="17" name="Text 15"/>
+          <p:cNvSpPr txBox="1"/>
+          <p:nvPr/>
+        </p:nvSpPr>
+        <p:spPr>
+          <a:xfrm>
+            <a:off x="603504" y="5687568"/>
+            <a:ext cx="3291840" cy="457200"/>
+          </a:xfrm>
+          <a:prstGeom prst="rect">
+            <a:avLst/>
+          </a:prstGeom>
+          <a:noFill/>
+          <a:ln/>
+        </p:spPr>
+        <p:txBody>
+          <a:bodyPr wrap="square" lIns="0" tIns="0" rIns="0" bIns="0" rtlCol="0" anchor="t"/>
+          <a:lstStyle/>
+          <a:p>
+            <a:pPr algn="ctr" indent="0" marL="0">
+              <a:buNone/>
+            </a:pPr>
+            <a:r>
+              <a:rPr lang="en-US" sz="1000" dirty="0">
+                <a:solidFill>
+                  <a:srgbClr val="8A8A8A"/>
+                </a:solidFill>
+                <a:latin typeface="Malgun Gothic" pitchFamily="34" charset="0"/>
+                <a:ea typeface="Malgun Gothic" pitchFamily="34" charset="-122"/>
+                <a:cs typeface="Malgun Gothic" pitchFamily="34" charset="-120"/>
+              </a:rPr>
+              <a:t>REF · content/insole-product-info-notice.md</a:t>
+            </a:r>
+            <a:endParaRPr lang="en-US" sz="1000" dirty="0"/>
+          </a:p>
+        </p:txBody>
+      </p:sp>
+      <p:sp>
+        <p:nvSpPr>
+          <p:cNvPr id="18" name="Shape 16"/>
+          <p:cNvSpPr/>
+          <p:nvPr/>
+        </p:nvSpPr>
+        <p:spPr>
+          <a:xfrm>
+            <a:off x="4544568" y="1965960"/>
+            <a:ext cx="2560320" cy="3520440"/>
+          </a:xfrm>
+          <a:prstGeom prst="rect">
+            <a:avLst/>
+          </a:prstGeom>
+          <a:solidFill>
+            <a:srgbClr val="F5F2EC"/>
+          </a:solidFill>
+          <a:ln w="9525">
+            <a:solidFill>
+              <a:srgbClr val="D9D6CF"/>
+            </a:solidFill>
+            <a:prstDash val="solid"/>
+          </a:ln>
+        </p:spPr>
+      </p:sp>
+      <p:sp>
+        <p:nvSpPr>
+          <p:cNvPr id="19" name="Shape 17"/>
+          <p:cNvSpPr/>
+          <p:nvPr/>
+        </p:nvSpPr>
+        <p:spPr>
+          <a:xfrm>
+            <a:off x="4681728" y="2103120"/>
+            <a:ext cx="2286000" cy="1417320"/>
+          </a:xfrm>
+          <a:prstGeom prst="roundRect">
+            <a:avLst>
+              <a:gd name="adj" fmla="val 1935"/>
+            </a:avLst>
+          </a:prstGeom>
+          <a:solidFill>
+            <a:srgbClr val="FFFFFF"/>
+          </a:solidFill>
+          <a:ln w="9525">
+            <a:solidFill>
+              <a:srgbClr val="D9D6CF"/>
+            </a:solidFill>
+            <a:prstDash val="solid"/>
+          </a:ln>
+        </p:spPr>
+      </p:sp>
+      <p:sp>
+        <p:nvSpPr>
+          <p:cNvPr id="20" name="Text 18"/>
+          <p:cNvSpPr txBox="1"/>
+          <p:nvPr/>
+        </p:nvSpPr>
+        <p:spPr>
+          <a:xfrm>
+            <a:off x="4718304" y="2103120"/>
+            <a:ext cx="2212848" cy="1417320"/>
+          </a:xfrm>
+          <a:prstGeom prst="rect">
+            <a:avLst/>
+          </a:prstGeom>
+          <a:noFill/>
+          <a:ln/>
+        </p:spPr>
+        <p:txBody>
+          <a:bodyPr wrap="square" lIns="0" tIns="0" rIns="0" bIns="0" rtlCol="0" anchor="ctr"/>
+          <a:lstStyle/>
+          <a:p>
+            <a:pPr algn="l" indent="0" marL="0">
+              <a:buNone/>
+            </a:pPr>
+            <a:r>
+              <a:rPr lang="en-US" sz="700" dirty="0">
+                <a:solidFill>
+                  <a:srgbClr val="232323"/>
+                </a:solidFill>
+                <a:latin typeface="Malgun Gothic" pitchFamily="34" charset="0"/>
+                <a:ea typeface="Malgun Gothic" pitchFamily="34" charset="-122"/>
+                <a:cs typeface="Malgun Gothic" pitchFamily="34" charset="-120"/>
+              </a:rPr>
+              <a:t>라라슈 쿼드그립 아치가득 인솔 (반굽)</a:t>
+            </a:r>
+            <a:endParaRPr lang="en-US" sz="700" dirty="0"/>
+          </a:p>
+          <a:p>
+            <a:pPr algn="l" indent="0" marL="0">
+              <a:buNone/>
+            </a:pPr>
+            <a:r>
+              <a:rPr lang="en-US" sz="700" dirty="0">
+                <a:solidFill>
+                  <a:srgbClr val="232323"/>
+                </a:solidFill>
+                <a:latin typeface="Malgun Gothic" pitchFamily="34" charset="0"/>
+                <a:ea typeface="Malgun Gothic" pitchFamily="34" charset="-122"/>
+                <a:cs typeface="Malgun Gothic" pitchFamily="34" charset="-120"/>
+              </a:rPr>
+              <a:t>재질: 합성수지(E-실리폴리렌), 목분(우드칩)</a:t>
+            </a:r>
+            <a:endParaRPr lang="en-US" sz="700" dirty="0"/>
+          </a:p>
+          <a:p>
+            <a:pPr algn="l" indent="0" marL="0">
+              <a:buNone/>
+            </a:pPr>
+            <a:r>
+              <a:rPr lang="en-US" sz="700" dirty="0">
+                <a:solidFill>
+                  <a:srgbClr val="232323"/>
+                </a:solidFill>
+                <a:latin typeface="Malgun Gothic" pitchFamily="34" charset="0"/>
+                <a:ea typeface="Malgun Gothic" pitchFamily="34" charset="-122"/>
+                <a:cs typeface="Malgun Gothic" pitchFamily="34" charset="-120"/>
+              </a:rPr>
+              <a:t>M 15cm · L 17cm (±5%) · 그레이 / 모카무스</a:t>
+            </a:r>
+            <a:endParaRPr lang="en-US" sz="700" dirty="0"/>
+          </a:p>
+          <a:p>
+            <a:pPr algn="l" indent="0" marL="0">
+              <a:buNone/>
+            </a:pPr>
+            <a:r>
+              <a:rPr lang="en-US" sz="700" dirty="0">
+                <a:solidFill>
+                  <a:srgbClr val="232323"/>
+                </a:solidFill>
+                <a:latin typeface="Malgun Gothic" pitchFamily="34" charset="0"/>
+                <a:ea typeface="Malgun Gothic" pitchFamily="34" charset="-122"/>
+                <a:cs typeface="Malgun Gothic" pitchFamily="34" charset="-120"/>
+              </a:rPr>
+              <a:t>제조국 대한민국 · ㈜알앤디메이커스</a:t>
+            </a:r>
+            <a:endParaRPr lang="en-US" sz="700" dirty="0"/>
+          </a:p>
+          <a:p>
+            <a:pPr algn="l" indent="0" marL="0">
+              <a:buNone/>
+            </a:pPr>
+            <a:r>
+              <a:rPr lang="en-US" sz="700" dirty="0">
+                <a:solidFill>
+                  <a:srgbClr val="232323"/>
+                </a:solidFill>
+                <a:latin typeface="Malgun Gothic" pitchFamily="34" charset="0"/>
+                <a:ea typeface="Malgun Gothic" pitchFamily="34" charset="-122"/>
+                <a:cs typeface="Malgun Gothic" pitchFamily="34" charset="-120"/>
+              </a:rPr>
+              <a:t>고객센터 0507-1317-2516</a:t>
+            </a:r>
+            <a:endParaRPr lang="en-US" sz="700" dirty="0"/>
+          </a:p>
+        </p:txBody>
+      </p:sp>
+      <p:sp>
+        <p:nvSpPr>
+          <p:cNvPr id="21" name="Shape 19"/>
+          <p:cNvSpPr/>
+          <p:nvPr/>
+        </p:nvSpPr>
+        <p:spPr>
+          <a:xfrm>
+            <a:off x="4681728" y="3657600"/>
+            <a:ext cx="2286000" cy="548640"/>
+          </a:xfrm>
+          <a:prstGeom prst="roundRect">
+            <a:avLst>
+              <a:gd name="adj" fmla="val 5000"/>
+            </a:avLst>
+          </a:prstGeom>
+          <a:solidFill>
+            <a:srgbClr val="FFFFFF"/>
+          </a:solidFill>
+          <a:ln w="9525">
+            <a:solidFill>
+              <a:srgbClr val="FF6B3D"/>
+            </a:solidFill>
+            <a:prstDash val="solid"/>
+          </a:ln>
+        </p:spPr>
+      </p:sp>
+      <p:sp>
+        <p:nvSpPr>
+          <p:cNvPr id="22" name="Text 20"/>
+          <p:cNvSpPr txBox="1"/>
+          <p:nvPr/>
+        </p:nvSpPr>
+        <p:spPr>
+          <a:xfrm>
+            <a:off x="4718304" y="3657600"/>
+            <a:ext cx="2212848" cy="548640"/>
+          </a:xfrm>
+          <a:prstGeom prst="rect">
+            <a:avLst/>
+          </a:prstGeom>
+          <a:noFill/>
+          <a:ln/>
+        </p:spPr>
+        <p:txBody>
+          <a:bodyPr wrap="square" lIns="0" tIns="0" rIns="0" bIns="0" rtlCol="0" anchor="ctr"/>
+          <a:lstStyle/>
+          <a:p>
+            <a:pPr algn="ctr" indent="0" marL="0">
+              <a:buNone/>
+            </a:pPr>
+            <a:r>
+              <a:rPr lang="en-US" sz="700" dirty="0">
+                <a:solidFill>
+                  <a:srgbClr val="232323"/>
+                </a:solidFill>
+                <a:latin typeface="Malgun Gothic" pitchFamily="34" charset="0"/>
+                <a:ea typeface="Malgun Gothic" pitchFamily="34" charset="-122"/>
+                <a:cs typeface="Malgun Gothic" pitchFamily="34" charset="-120"/>
+              </a:rPr>
+              <a:t>고온·직사광선 ✗ · 건조기·표백제 ✗</a:t>
+            </a:r>
+            <a:endParaRPr lang="en-US" sz="700" dirty="0"/>
+          </a:p>
+          <a:p>
+            <a:pPr algn="ctr" indent="0" marL="0">
+              <a:buNone/>
+            </a:pPr>
+            <a:r>
+              <a:rPr lang="en-US" sz="700" dirty="0">
+                <a:solidFill>
+                  <a:srgbClr val="232323"/>
+                </a:solidFill>
+                <a:latin typeface="Malgun Gothic" pitchFamily="34" charset="0"/>
+                <a:ea typeface="Malgun Gothic" pitchFamily="34" charset="-122"/>
+                <a:cs typeface="Malgun Gothic" pitchFamily="34" charset="-120"/>
+              </a:rPr>
+              <a:t>깔창 용도 외 사용 ✗</a:t>
+            </a:r>
+            <a:endParaRPr lang="en-US" sz="700" dirty="0"/>
+          </a:p>
+        </p:txBody>
+      </p:sp>
+      <p:sp>
+        <p:nvSpPr>
+          <p:cNvPr id="23" name="Shape 21"/>
+          <p:cNvSpPr/>
+          <p:nvPr/>
+        </p:nvSpPr>
+        <p:spPr>
+          <a:xfrm>
+            <a:off x="4681728" y="4343400"/>
+            <a:ext cx="2286000" cy="457200"/>
+          </a:xfrm>
+          <a:prstGeom prst="roundRect">
+            <a:avLst>
+              <a:gd name="adj" fmla="val 6000"/>
+            </a:avLst>
+          </a:prstGeom>
+          <a:solidFill>
+            <a:srgbClr val="F1F1F1"/>
+          </a:solidFill>
+          <a:ln w="12700">
+            <a:solidFill>
+              <a:srgbClr val="F1F1F1"/>
+            </a:solidFill>
+            <a:prstDash val="solid"/>
+          </a:ln>
+        </p:spPr>
+      </p:sp>
+      <p:sp>
+        <p:nvSpPr>
+          <p:cNvPr id="24" name="Text 22"/>
+          <p:cNvSpPr txBox="1"/>
+          <p:nvPr/>
+        </p:nvSpPr>
+        <p:spPr>
+          <a:xfrm>
+            <a:off x="4718304" y="4343400"/>
+            <a:ext cx="2212848" cy="457200"/>
+          </a:xfrm>
+          <a:prstGeom prst="rect">
+            <a:avLst/>
+          </a:prstGeom>
+          <a:noFill/>
+          <a:ln/>
+        </p:spPr>
+        <p:txBody>
+          <a:bodyPr wrap="square" lIns="0" tIns="0" rIns="0" bIns="0" rtlCol="0" anchor="ctr"/>
+          <a:lstStyle/>
+          <a:p>
+            <a:pPr algn="ctr" indent="0" marL="0">
+              <a:buNone/>
+            </a:pPr>
+            <a:r>
+              <a:rPr lang="en-US" sz="700" b="1" dirty="0">
+                <a:solidFill>
+                  <a:srgbClr val="232323"/>
+                </a:solidFill>
+                <a:latin typeface="Malgun Gothic" pitchFamily="34" charset="0"/>
+                <a:ea typeface="Malgun Gothic" pitchFamily="34" charset="-122"/>
+                <a:cs typeface="Malgun Gothic" pitchFamily="34" charset="-120"/>
+              </a:rPr>
+              <a:t>본 제품은 의료기기가 아닙니다.</a:t>
+            </a:r>
+            <a:endParaRPr lang="en-US" sz="700" dirty="0"/>
+          </a:p>
+        </p:txBody>
+      </p:sp>
+      <p:sp>
+        <p:nvSpPr>
+          <p:cNvPr id="25" name="Text 23"/>
+          <p:cNvSpPr txBox="1"/>
+          <p:nvPr/>
+        </p:nvSpPr>
+        <p:spPr>
+          <a:xfrm>
+            <a:off x="4178808" y="5687568"/>
+            <a:ext cx="3291840" cy="457200"/>
+          </a:xfrm>
+          <a:prstGeom prst="rect">
+            <a:avLst/>
+          </a:prstGeom>
+          <a:noFill/>
+          <a:ln/>
+        </p:spPr>
+        <p:txBody>
+          <a:bodyPr wrap="square" lIns="0" tIns="0" rIns="0" bIns="0" rtlCol="0" anchor="t"/>
+          <a:lstStyle/>
+          <a:p>
+            <a:pPr algn="ctr" indent="0" marL="0">
+              <a:buNone/>
+            </a:pPr>
+            <a:r>
+              <a:rPr lang="en-US" sz="1000" dirty="0">
+                <a:solidFill>
+                  <a:srgbClr val="8A8A8A"/>
+                </a:solidFill>
+                <a:latin typeface="Malgun Gothic" pitchFamily="34" charset="0"/>
+                <a:ea typeface="Malgun Gothic" pitchFamily="34" charset="-122"/>
+                <a:cs typeface="Malgun Gothic" pitchFamily="34" charset="-120"/>
+              </a:rPr>
+              <a:t>스펙 표 + 주의 + 의료기기 아님 고지</a:t>
+            </a:r>
+            <a:endParaRPr lang="en-US" sz="1000" dirty="0"/>
+          </a:p>
+        </p:txBody>
+      </p:sp>
+      <p:sp>
+        <p:nvSpPr>
+          <p:cNvPr id="26" name="Text 24"/>
+          <p:cNvSpPr txBox="1"/>
+          <p:nvPr/>
+        </p:nvSpPr>
+        <p:spPr>
+          <a:xfrm>
+            <a:off x="7845552" y="2011680"/>
+            <a:ext cx="3108960" cy="3291840"/>
+          </a:xfrm>
+          <a:prstGeom prst="rect">
+            <a:avLst/>
+          </a:prstGeom>
+          <a:noFill/>
+          <a:ln/>
+        </p:spPr>
+        <p:txBody>
+          <a:bodyPr wrap="square" lIns="0" tIns="0" rIns="0" bIns="0" rtlCol="0" anchor="ctr"/>
+          <a:lstStyle/>
+          <a:p>
+            <a:pPr algn="ctr" indent="0" marL="0">
+              <a:lnSpc>
+                <a:spcPct val="125000"/>
+              </a:lnSpc>
+              <a:buNone/>
+            </a:pPr>
+            <a:r>
+              <a:rPr lang="en-US" sz="1600" b="1" dirty="0">
+                <a:solidFill>
+                  <a:srgbClr val="232323"/>
+                </a:solidFill>
+                <a:latin typeface="Malgun Gothic" pitchFamily="34" charset="0"/>
+                <a:ea typeface="Malgun Gothic" pitchFamily="34" charset="-122"/>
+                <a:cs typeface="Malgun Gothic" pitchFamily="34" charset="-120"/>
+              </a:rPr>
+              <a:t>PRODUCT SPEC</a:t>
+            </a:r>
+            <a:endParaRPr lang="en-US" sz="1600" dirty="0"/>
+          </a:p>
+          <a:p>
+            <a:pPr algn="ctr" indent="0" marL="0">
+              <a:lnSpc>
+                <a:spcPct val="125000"/>
+              </a:lnSpc>
+              <a:buNone/>
+            </a:pPr>
+            <a:r>
+              <a:rPr lang="en-US" sz="800" dirty="0">
+                <a:solidFill>
+                  <a:srgbClr val="232323"/>
+                </a:solidFill>
+                <a:latin typeface="Malgun Gothic" pitchFamily="34" charset="0"/>
+                <a:ea typeface="Malgun Gothic" pitchFamily="34" charset="-122"/>
+                <a:cs typeface="Malgun Gothic" pitchFamily="34" charset="-120"/>
+              </a:rPr>
+              <a:t> </a:t>
+            </a:r>
+            <a:endParaRPr lang="en-US" sz="1600" dirty="0"/>
+          </a:p>
+          <a:p>
+            <a:pPr algn="ctr" indent="0" marL="0">
+              <a:lnSpc>
+                <a:spcPct val="125000"/>
+              </a:lnSpc>
+              <a:buNone/>
+            </a:pPr>
+            <a:r>
+              <a:rPr lang="en-US" sz="1400" dirty="0">
+                <a:solidFill>
+                  <a:srgbClr val="232323"/>
+                </a:solidFill>
+                <a:latin typeface="Malgun Gothic" pitchFamily="34" charset="0"/>
+                <a:ea typeface="Malgun Gothic" pitchFamily="34" charset="-122"/>
+                <a:cs typeface="Malgun Gothic" pitchFamily="34" charset="-120"/>
+              </a:rPr>
+              <a:t>합성수지(E-실리폴리렌), 목분(우드칩)</a:t>
+            </a:r>
+            <a:endParaRPr lang="en-US" sz="1600" dirty="0"/>
+          </a:p>
+          <a:p>
+            <a:pPr algn="ctr" indent="0" marL="0">
+              <a:lnSpc>
+                <a:spcPct val="125000"/>
+              </a:lnSpc>
+              <a:buNone/>
+            </a:pPr>
+            <a:r>
+              <a:rPr lang="en-US" sz="1400" dirty="0">
+                <a:solidFill>
+                  <a:srgbClr val="232323"/>
+                </a:solidFill>
+                <a:latin typeface="Malgun Gothic" pitchFamily="34" charset="0"/>
+                <a:ea typeface="Malgun Gothic" pitchFamily="34" charset="-122"/>
+                <a:cs typeface="Malgun Gothic" pitchFamily="34" charset="-120"/>
+              </a:rPr>
+              <a:t>M 15cm · L 17cm (±5%)</a:t>
+            </a:r>
+            <a:endParaRPr lang="en-US" sz="1600" dirty="0"/>
+          </a:p>
+          <a:p>
+            <a:pPr algn="ctr" indent="0" marL="0">
+              <a:lnSpc>
+                <a:spcPct val="125000"/>
+              </a:lnSpc>
+              <a:buNone/>
+            </a:pPr>
+            <a:r>
+              <a:rPr lang="en-US" sz="1400" dirty="0">
+                <a:solidFill>
+                  <a:srgbClr val="232323"/>
+                </a:solidFill>
+                <a:latin typeface="Malgun Gothic" pitchFamily="34" charset="0"/>
+                <a:ea typeface="Malgun Gothic" pitchFamily="34" charset="-122"/>
+                <a:cs typeface="Malgun Gothic" pitchFamily="34" charset="-120"/>
+              </a:rPr>
+              <a:t>그레이 / 모카무스 · 대한민국</a:t>
+            </a:r>
+            <a:endParaRPr lang="en-US" sz="1600" dirty="0"/>
+          </a:p>
+          <a:p>
+            <a:pPr algn="ctr" indent="0" marL="0">
+              <a:lnSpc>
+                <a:spcPct val="125000"/>
+              </a:lnSpc>
+              <a:buNone/>
+            </a:pPr>
+            <a:endParaRPr lang="en-US" sz="1600" dirty="0"/>
+          </a:p>
+          <a:p>
+            <a:pPr algn="ctr" indent="0" marL="0">
+              <a:lnSpc>
+                <a:spcPct val="125000"/>
+              </a:lnSpc>
+              <a:buNone/>
+            </a:pPr>
+            <a:r>
+              <a:rPr lang="en-US" sz="1400" dirty="0">
+                <a:solidFill>
+                  <a:srgbClr val="232323"/>
+                </a:solidFill>
+                <a:latin typeface="Malgun Gothic" pitchFamily="34" charset="0"/>
+                <a:ea typeface="Malgun Gothic" pitchFamily="34" charset="-122"/>
+                <a:cs typeface="Malgun Gothic" pitchFamily="34" charset="-120"/>
+              </a:rPr>
+              <a:t>본 제품은 의료기기가 아닙니다.</a:t>
+            </a:r>
+            <a:endParaRPr lang="en-US" sz="1600" dirty="0"/>
+          </a:p>
+        </p:txBody>
+      </p:sp>
+      <p:sp>
+        <p:nvSpPr>
+          <p:cNvPr id="27" name="Shape 25"/>
+          <p:cNvSpPr/>
+          <p:nvPr/>
+        </p:nvSpPr>
+        <p:spPr>
+          <a:xfrm>
+            <a:off x="7936992" y="5486400"/>
+            <a:ext cx="2926080" cy="566928"/>
+          </a:xfrm>
+          <a:prstGeom prst="roundRect">
+            <a:avLst>
+              <a:gd name="adj" fmla="val 9677"/>
+            </a:avLst>
+          </a:prstGeom>
+          <a:solidFill>
+            <a:srgbClr val="FFFFFF"/>
+          </a:solidFill>
+          <a:ln w="9525">
+            <a:solidFill>
+              <a:srgbClr val="FF6B3D"/>
+            </a:solidFill>
+            <a:prstDash val="solid"/>
+          </a:ln>
+        </p:spPr>
+      </p:sp>
+      <p:sp>
+        <p:nvSpPr>
+          <p:cNvPr id="28" name="Text 26"/>
+          <p:cNvSpPr txBox="1"/>
+          <p:nvPr/>
+        </p:nvSpPr>
+        <p:spPr>
+          <a:xfrm>
+            <a:off x="8046720" y="5486400"/>
+            <a:ext cx="2706624" cy="566928"/>
+          </a:xfrm>
+          <a:prstGeom prst="rect">
+            <a:avLst/>
+          </a:prstGeom>
+          <a:noFill/>
+          <a:ln/>
+        </p:spPr>
+        <p:txBody>
+          <a:bodyPr wrap="square" lIns="0" tIns="0" rIns="0" bIns="0" rtlCol="0" anchor="ctr"/>
+          <a:lstStyle/>
+          <a:p>
+            <a:pPr indent="0" marL="0">
+              <a:buNone/>
+            </a:pPr>
+            <a:r>
+              <a:rPr lang="en-US" sz="900" dirty="0">
+                <a:solidFill>
+                  <a:srgbClr val="232323"/>
+                </a:solidFill>
+                <a:latin typeface="Malgun Gothic" pitchFamily="34" charset="0"/>
+                <a:ea typeface="Malgun Gothic" pitchFamily="34" charset="-122"/>
+                <a:cs typeface="Malgun Gothic" pitchFamily="34" charset="-120"/>
+              </a:rPr>
+              <a:t>⚠ 🔴 고시 빈칸(모델명·보증 일수·CS 시간) 채운 뒤 확정</a:t>
+            </a:r>
+            <a:endParaRPr lang="en-US" sz="900" dirty="0"/>
+          </a:p>
+        </p:txBody>
+      </p:sp>
+    </p:spTree>
+  </p:cSld>
+  <p:clrMapOvr>
+    <a:masterClrMapping/>
+  </p:clrMapOvr>
+</p:sld>
+</file>
+
+<file path=ppt/slides/slide18.xml><?xml version="1.0" encoding="utf-8"?>
+<p:sld xmlns:a="http://schemas.openxmlformats.org/drawingml/2006/main" xmlns:r="http://schemas.openxmlformats.org/officeDocument/2006/relationships" xmlns:p="http://schemas.openxmlformats.org/presentationml/2006/main">
+  <p:cSld name="Slide 18">
+    <p:bg>
+      <p:bgPr>
+        <a:solidFill>
+          <a:srgbClr val="FFFFFF"/>
+        </a:solidFill>
+      </p:bgPr>
+    </p:bg>
+    <p:spTree>
+      <p:nvGrpSpPr>
+        <p:cNvPr id="1" name=""/>
+        <p:cNvGrpSpPr/>
+        <p:nvPr/>
+      </p:nvGrpSpPr>
+      <p:grpSpPr>
+        <a:xfrm>
+          <a:off x="0" y="0"/>
+          <a:ext cx="0" cy="0"/>
+          <a:chOff x="0" y="0"/>
+          <a:chExt cx="0" cy="0"/>
+        </a:xfrm>
+      </p:grpSpPr>
+      <p:sp>
+        <p:nvSpPr>
+          <p:cNvPr id="2" name="Shape 0"/>
+          <p:cNvSpPr/>
+          <p:nvPr/>
+        </p:nvSpPr>
+        <p:spPr>
+          <a:xfrm>
+            <a:off x="512064" y="859536"/>
+            <a:ext cx="566928" cy="274320"/>
+          </a:xfrm>
+          <a:prstGeom prst="roundRect">
+            <a:avLst>
+              <a:gd name="adj" fmla="val 16667"/>
+            </a:avLst>
+          </a:prstGeom>
+          <a:solidFill>
+            <a:srgbClr val="0D0D0D"/>
+          </a:solidFill>
+          <a:ln w="12700">
+            <a:solidFill>
+              <a:srgbClr val="0D0D0D"/>
+            </a:solidFill>
+            <a:prstDash val="solid"/>
+          </a:ln>
+        </p:spPr>
+      </p:sp>
+      <p:sp>
+        <p:nvSpPr>
+          <p:cNvPr id="3" name="Text 1"/>
+          <p:cNvSpPr txBox="1"/>
+          <p:nvPr/>
+        </p:nvSpPr>
+        <p:spPr>
+          <a:xfrm>
+            <a:off x="512064" y="859536"/>
+            <a:ext cx="566928" cy="274320"/>
+          </a:xfrm>
+          <a:prstGeom prst="rect">
+            <a:avLst/>
+          </a:prstGeom>
+          <a:noFill/>
+          <a:ln/>
+        </p:spPr>
+        <p:txBody>
+          <a:bodyPr wrap="square" lIns="0" tIns="0" rIns="0" bIns="0" rtlCol="0" anchor="ctr"/>
+          <a:lstStyle/>
+          <a:p>
+            <a:pPr algn="ctr" indent="0" marL="0">
+              <a:buNone/>
+            </a:pPr>
+            <a:r>
+              <a:rPr lang="en-US" sz="1000" b="1" dirty="0">
+                <a:solidFill>
+                  <a:srgbClr val="FFFFFF"/>
+                </a:solidFill>
+                <a:latin typeface="Malgun Gothic" pitchFamily="34" charset="0"/>
+                <a:ea typeface="Malgun Gothic" pitchFamily="34" charset="-122"/>
+                <a:cs typeface="Malgun Gothic" pitchFamily="34" charset="-120"/>
+              </a:rPr>
+              <a:t>구매</a:t>
+            </a:r>
+            <a:endParaRPr lang="en-US" sz="1000" dirty="0"/>
+          </a:p>
+        </p:txBody>
+      </p:sp>
+      <p:sp>
+        <p:nvSpPr>
+          <p:cNvPr id="4" name="Text 2"/>
+          <p:cNvSpPr txBox="1"/>
+          <p:nvPr/>
+        </p:nvSpPr>
+        <p:spPr>
+          <a:xfrm>
+            <a:off x="1188720" y="822960"/>
+            <a:ext cx="7680960" cy="347472"/>
+          </a:xfrm>
+          <a:prstGeom prst="rect">
+            <a:avLst/>
+          </a:prstGeom>
+          <a:noFill/>
+          <a:ln/>
+        </p:spPr>
+        <p:txBody>
+          <a:bodyPr wrap="square" lIns="0" tIns="0" rIns="0" bIns="0" rtlCol="0" anchor="ctr"/>
+          <a:lstStyle/>
+          <a:p>
+            <a:pPr indent="0" marL="0">
+              <a:buNone/>
+            </a:pPr>
+            <a:r>
+              <a:rPr lang="en-US" sz="1600" b="1" dirty="0">
+                <a:solidFill>
+                  <a:srgbClr val="232323"/>
+                </a:solidFill>
+                <a:latin typeface="Malgun Gothic" pitchFamily="34" charset="0"/>
+                <a:ea typeface="Malgun Gothic" pitchFamily="34" charset="-122"/>
+                <a:cs typeface="Malgun Gothic" pitchFamily="34" charset="-120"/>
+              </a:rPr>
+              <a:t>ICUT 15 / 15   구성 · 엔딩 — Made for Standing.</a:t>
             </a:r>
             <a:endParaRPr lang="en-US" sz="1600" dirty="0"/>
           </a:p>
@@ -11892,7 +13997,7 @@
                 <a:ea typeface="Malgun Gothic" pitchFamily="34" charset="-122"/>
                 <a:cs typeface="Malgun Gothic" pitchFamily="34" charset="-120"/>
               </a:rPr>
-              <a:t>상세페이지 14 CUT</a:t>
+              <a:t>상세페이지 15 CUT</a:t>
             </a:r>
             <a:endParaRPr lang="en-US" sz="3400" dirty="0"/>
           </a:p>
@@ -11973,7 +14078,7 @@
                 <a:ea typeface="Malgun Gothic" pitchFamily="34" charset="-122"/>
                 <a:cs typeface="Malgun Gothic" pitchFamily="34" charset="-120"/>
               </a:rPr>
-              <a:t>흐름  후킹(01~02) → 구조 4가지(03~07) → 소재·전문의(08~09) → 사용·사이즈(10~11) → 구매(12~14)</a:t>
+              <a:t>흐름  후킹·전문의 배지(01~02) → 구조 5가지(03~08, 08 반굽) → 소재·전문의(09~10) → 사용·사이즈(11~12) → 구매(13~15)</a:t>
             </a:r>
             <a:endParaRPr lang="en-US" sz="1200" dirty="0"/>
           </a:p>
@@ -13984,7 +16089,7 @@
                           <a:ea typeface="Malgun Gothic" pitchFamily="34" charset="-122"/>
                           <a:cs typeface="Malgun Gothic" pitchFamily="34" charset="-120"/>
                         </a:rPr>
-                        <a:t>원장 검수 + 히어로 노출 동의 시</a:t>
+                        <a:t>✅ 첫 화면 배지로 사용 (대표 10/15) · 원장 검수</a:t>
                       </a:r>
                       <a:endParaRPr lang="en-US" sz="1200" dirty="0">
                         <a:latin typeface="Malgun Gothic" charset="0"/>
@@ -14806,7 +16911,7 @@
                           <a:ea typeface="Malgun Gothic" pitchFamily="34" charset="-122"/>
                           <a:cs typeface="Malgun Gothic" pitchFamily="34" charset="-120"/>
                         </a:rPr>
-                        <a:t>우드칩 배합 확인 후</a:t>
+                        <a:t>OK (우드칩 확인 10/15)</a:t>
                       </a:r>
                       <a:endParaRPr lang="en-US" sz="1200" dirty="0">
                         <a:latin typeface="Malgun Gothic" charset="0"/>
@@ -15350,7 +17455,7 @@
                 <a:ea typeface="Malgun Gothic" pitchFamily="34" charset="-122"/>
                 <a:cs typeface="Malgun Gothic" pitchFamily="34" charset="-120"/>
               </a:rPr>
-              <a:t>ICUT 01 / 14   첫 화면 — 오후 4시 (확정 10/15)</a:t>
+              <a:t>ICUT 01 / 15   첫 화면 — 오후 4시 + 전문의 자문 배지</a:t>
             </a:r>
             <a:endParaRPr lang="en-US" sz="1600" dirty="0"/>
           </a:p>
@@ -15790,7 +17895,133 @@
       </p:sp>
       <p:sp>
         <p:nvSpPr>
-          <p:cNvPr id="17" name="Text 15"/>
+          <p:cNvPr id="17" name="Shape 15"/>
+          <p:cNvSpPr/>
+          <p:nvPr/>
+        </p:nvSpPr>
+        <p:spPr>
+          <a:xfrm>
+            <a:off x="694944" y="3218688"/>
+            <a:ext cx="3108960" cy="1143000"/>
+          </a:xfrm>
+          <a:prstGeom prst="roundRect">
+            <a:avLst>
+              <a:gd name="adj" fmla="val 4800"/>
+            </a:avLst>
+          </a:prstGeom>
+          <a:solidFill>
+            <a:srgbClr val="FFFFFF"/>
+          </a:solidFill>
+          <a:ln w="9525">
+            <a:solidFill>
+              <a:srgbClr val="D9D6CF"/>
+            </a:solidFill>
+            <a:prstDash val="solid"/>
+          </a:ln>
+        </p:spPr>
+      </p:sp>
+      <p:sp>
+        <p:nvSpPr>
+          <p:cNvPr id="18" name="Text 16"/>
+          <p:cNvSpPr txBox="1"/>
+          <p:nvPr/>
+        </p:nvSpPr>
+        <p:spPr>
+          <a:xfrm>
+            <a:off x="832104" y="3291840"/>
+            <a:ext cx="2834640" cy="996696"/>
+          </a:xfrm>
+          <a:prstGeom prst="rect">
+            <a:avLst/>
+          </a:prstGeom>
+          <a:noFill/>
+          <a:ln/>
+        </p:spPr>
+        <p:txBody>
+          <a:bodyPr wrap="square" lIns="0" tIns="0" rIns="0" bIns="0" rtlCol="0" anchor="ctr"/>
+          <a:lstStyle/>
+          <a:p>
+            <a:pPr indent="0" marL="0">
+              <a:spcAft>
+                <a:spcPts val="200"/>
+              </a:spcAft>
+              <a:buNone/>
+            </a:pPr>
+            <a:r>
+              <a:rPr lang="en-US" sz="1100" b="1" dirty="0">
+                <a:solidFill>
+                  <a:srgbClr val="232323"/>
+                </a:solidFill>
+                <a:latin typeface="Malgun Gothic" pitchFamily="34" charset="0"/>
+                <a:ea typeface="Malgun Gothic" pitchFamily="34" charset="-122"/>
+                <a:cs typeface="Malgun Gothic" pitchFamily="34" charset="-120"/>
+              </a:rPr>
+              <a:t>대표 10/15</a:t>
+            </a:r>
+            <a:pPr indent="0" marL="0">
+              <a:spcAft>
+                <a:spcPts val="200"/>
+              </a:spcAft>
+              <a:buNone/>
+            </a:pPr>
+            <a:r>
+              <a:rPr lang="en-US" sz="900" dirty="0">
+                <a:solidFill>
+                  <a:srgbClr val="8A8A8A"/>
+                </a:solidFill>
+                <a:latin typeface="Malgun Gothic" pitchFamily="34" charset="0"/>
+                <a:ea typeface="Malgun Gothic" pitchFamily="34" charset="-122"/>
+                <a:cs typeface="Malgun Gothic" pitchFamily="34" charset="-120"/>
+              </a:rPr>
+              <a:t>  첫 화면 노출 OK</a:t>
+            </a:r>
+            <a:endParaRPr lang="en-US" sz="1100" dirty="0"/>
+          </a:p>
+          <a:p>
+            <a:pPr indent="0" marL="0">
+              <a:spcAft>
+                <a:spcPts val="200"/>
+              </a:spcAft>
+              <a:buNone/>
+            </a:pPr>
+            <a:r>
+              <a:rPr lang="en-US" sz="1000" dirty="0">
+                <a:solidFill>
+                  <a:srgbClr val="232323"/>
+                </a:solidFill>
+                <a:latin typeface="Malgun Gothic" pitchFamily="34" charset="0"/>
+                <a:ea typeface="Malgun Gothic" pitchFamily="34" charset="-122"/>
+                <a:cs typeface="Malgun Gothic" pitchFamily="34" charset="-120"/>
+              </a:rPr>
+              <a:t>원장 설계 자문 배지</a:t>
+            </a:r>
+            <a:endParaRPr lang="en-US" sz="1100" dirty="0"/>
+          </a:p>
+          <a:p>
+            <a:pPr indent="0" marL="0">
+              <a:spcAft>
+                <a:spcPts val="200"/>
+              </a:spcAft>
+              <a:buNone/>
+            </a:pPr>
+            <a:r>
+              <a:rPr lang="en-US" sz="1000" b="1" dirty="0">
+                <a:solidFill>
+                  <a:srgbClr val="3D4A12"/>
+                </a:solidFill>
+                <a:latin typeface="Malgun Gothic" pitchFamily="34" charset="0"/>
+                <a:ea typeface="Malgun Gothic" pitchFamily="34" charset="-122"/>
+                <a:cs typeface="Malgun Gothic" pitchFamily="34" charset="-120"/>
+              </a:rPr>
+              <a:t>→ 효능 문구와 분리 · 대가 표기</a:t>
+            </a:r>
+            <a:endParaRPr lang="en-US" sz="1100" dirty="0"/>
+          </a:p>
+        </p:txBody>
+      </p:sp>
+      <p:sp>
+        <p:nvSpPr>
+          <p:cNvPr id="19" name="Text 17"/>
           <p:cNvSpPr txBox="1"/>
           <p:nvPr/>
         </p:nvSpPr>
@@ -15821,7 +18052,7 @@
                 <a:ea typeface="Malgun Gothic" pitchFamily="34" charset="-122"/>
                 <a:cs typeface="Malgun Gothic" pitchFamily="34" charset="-120"/>
               </a:rPr>
-              <a:t>REF · 워킹화 CUT 01 다크 렌더와 톤 통일</a:t>
+              <a:t>REF · 워킹화 CUT 01 다크 톤 통일 · BARC 전문의 배지</a:t>
             </a:r>
             <a:endParaRPr lang="en-US" sz="1000" dirty="0"/>
           </a:p>
@@ -15829,7 +18060,7 @@
       </p:sp>
       <p:sp>
         <p:nvSpPr>
-          <p:cNvPr id="18" name="Shape 16"/>
+          <p:cNvPr id="20" name="Shape 18"/>
           <p:cNvSpPr/>
           <p:nvPr/>
         </p:nvSpPr>
@@ -15854,13 +18085,13 @@
       </p:sp>
       <p:sp>
         <p:nvSpPr>
-          <p:cNvPr id="19" name="Text 17"/>
+          <p:cNvPr id="21" name="Text 19"/>
           <p:cNvSpPr txBox="1"/>
           <p:nvPr/>
         </p:nvSpPr>
         <p:spPr>
           <a:xfrm>
-            <a:off x="4681728" y="2148840"/>
+            <a:off x="4681728" y="2103120"/>
             <a:ext cx="2286000" cy="457200"/>
           </a:xfrm>
           <a:prstGeom prst="rect">
@@ -15910,13 +18141,13 @@
       </p:sp>
       <p:sp>
         <p:nvSpPr>
-          <p:cNvPr id="20" name="Text 18"/>
+          <p:cNvPr id="22" name="Text 20"/>
           <p:cNvSpPr txBox="1"/>
           <p:nvPr/>
         </p:nvSpPr>
         <p:spPr>
           <a:xfrm>
-            <a:off x="4681728" y="2624328"/>
+            <a:off x="4681728" y="2578608"/>
             <a:ext cx="2286000" cy="182880"/>
           </a:xfrm>
           <a:prstGeom prst="rect">
@@ -15949,18 +18180,18 @@
       </p:sp>
       <p:sp>
         <p:nvSpPr>
-          <p:cNvPr id="21" name="Shape 19"/>
+          <p:cNvPr id="23" name="Shape 21"/>
           <p:cNvSpPr/>
           <p:nvPr/>
         </p:nvSpPr>
         <p:spPr>
           <a:xfrm>
-            <a:off x="4818888" y="2834640"/>
-            <a:ext cx="2011680" cy="1554480"/>
+            <a:off x="4818888" y="2807208"/>
+            <a:ext cx="2011680" cy="1371600"/>
           </a:xfrm>
           <a:prstGeom prst="roundRect">
             <a:avLst>
-              <a:gd name="adj" fmla="val 1765"/>
+              <a:gd name="adj" fmla="val 2000"/>
             </a:avLst>
           </a:prstGeom>
           <a:solidFill>
@@ -15976,14 +18207,14 @@
       </p:sp>
       <p:sp>
         <p:nvSpPr>
-          <p:cNvPr id="22" name="Text 20"/>
+          <p:cNvPr id="24" name="Text 22"/>
           <p:cNvSpPr txBox="1"/>
           <p:nvPr/>
         </p:nvSpPr>
         <p:spPr>
           <a:xfrm>
-            <a:off x="4855464" y="2834640"/>
-            <a:ext cx="1938528" cy="1554480"/>
+            <a:off x="4855464" y="2807208"/>
+            <a:ext cx="1938528" cy="1371600"/>
           </a:xfrm>
           <a:prstGeom prst="rect">
             <a:avLst/>
@@ -16049,18 +18280,84 @@
       </p:sp>
       <p:sp>
         <p:nvSpPr>
-          <p:cNvPr id="23" name="Shape 21"/>
+          <p:cNvPr id="25" name="Shape 23"/>
           <p:cNvSpPr/>
           <p:nvPr/>
         </p:nvSpPr>
         <p:spPr>
           <a:xfrm>
-            <a:off x="5001768" y="4572000"/>
-            <a:ext cx="1645920" cy="292608"/>
+            <a:off x="4818888" y="4270248"/>
+            <a:ext cx="2011680" cy="384048"/>
           </a:xfrm>
           <a:prstGeom prst="roundRect">
             <a:avLst>
-              <a:gd name="adj" fmla="val 9375"/>
+              <a:gd name="adj" fmla="val 7143"/>
+            </a:avLst>
+          </a:prstGeom>
+          <a:solidFill>
+            <a:srgbClr val="FFFFFF"/>
+          </a:solidFill>
+          <a:ln w="12700">
+            <a:solidFill>
+              <a:srgbClr val="FFFFFF"/>
+            </a:solidFill>
+            <a:prstDash val="solid"/>
+          </a:ln>
+        </p:spPr>
+      </p:sp>
+      <p:sp>
+        <p:nvSpPr>
+          <p:cNvPr id="26" name="Text 24"/>
+          <p:cNvSpPr txBox="1"/>
+          <p:nvPr/>
+        </p:nvSpPr>
+        <p:spPr>
+          <a:xfrm>
+            <a:off x="4855464" y="4270248"/>
+            <a:ext cx="1938528" cy="384048"/>
+          </a:xfrm>
+          <a:prstGeom prst="rect">
+            <a:avLst/>
+          </a:prstGeom>
+          <a:noFill/>
+          <a:ln/>
+        </p:spPr>
+        <p:txBody>
+          <a:bodyPr wrap="square" lIns="0" tIns="0" rIns="0" bIns="0" rtlCol="0" anchor="ctr"/>
+          <a:lstStyle/>
+          <a:p>
+            <a:pPr algn="ctr" indent="0" marL="0">
+              <a:buNone/>
+            </a:pPr>
+            <a:r>
+              <a:rPr lang="en-US" sz="700" b="1" dirty="0">
+                <a:solidFill>
+                  <a:srgbClr val="232323"/>
+                </a:solidFill>
+                <a:latin typeface="Malgun Gothic" pitchFamily="34" charset="0"/>
+                <a:ea typeface="Malgun Gothic" pitchFamily="34" charset="-122"/>
+                <a:cs typeface="Malgun Gothic" pitchFamily="34" charset="-120"/>
+              </a:rPr>
+              <a:t>정형외과 전문의 이문훈 설계 자문</a:t>
+            </a:r>
+            <a:endParaRPr lang="en-US" sz="700" dirty="0"/>
+          </a:p>
+        </p:txBody>
+      </p:sp>
+      <p:sp>
+        <p:nvSpPr>
+          <p:cNvPr id="27" name="Shape 25"/>
+          <p:cNvSpPr/>
+          <p:nvPr/>
+        </p:nvSpPr>
+        <p:spPr>
+          <a:xfrm>
+            <a:off x="5001768" y="4727448"/>
+            <a:ext cx="1645920" cy="256032"/>
+          </a:xfrm>
+          <a:prstGeom prst="roundRect">
+            <a:avLst>
+              <a:gd name="adj" fmla="val 10714"/>
             </a:avLst>
           </a:prstGeom>
           <a:solidFill>
@@ -16076,14 +18373,14 @@
       </p:sp>
       <p:sp>
         <p:nvSpPr>
-          <p:cNvPr id="24" name="Text 22"/>
+          <p:cNvPr id="28" name="Text 26"/>
           <p:cNvSpPr txBox="1"/>
           <p:nvPr/>
         </p:nvSpPr>
         <p:spPr>
           <a:xfrm>
-            <a:off x="5038344" y="4572000"/>
-            <a:ext cx="1572768" cy="292608"/>
+            <a:off x="5038344" y="4727448"/>
+            <a:ext cx="1572768" cy="256032"/>
           </a:xfrm>
           <a:prstGeom prst="rect">
             <a:avLst/>
@@ -16115,7 +18412,46 @@
       </p:sp>
       <p:sp>
         <p:nvSpPr>
-          <p:cNvPr id="25" name="Text 23"/>
+          <p:cNvPr id="29" name="Text 27"/>
+          <p:cNvSpPr txBox="1"/>
+          <p:nvPr/>
+        </p:nvSpPr>
+        <p:spPr>
+          <a:xfrm>
+            <a:off x="4636008" y="5029200"/>
+            <a:ext cx="2377440" cy="274320"/>
+          </a:xfrm>
+          <a:prstGeom prst="rect">
+            <a:avLst/>
+          </a:prstGeom>
+          <a:noFill/>
+          <a:ln/>
+        </p:spPr>
+        <p:txBody>
+          <a:bodyPr wrap="square" lIns="0" tIns="0" rIns="0" bIns="0" rtlCol="0" anchor="ctr"/>
+          <a:lstStyle/>
+          <a:p>
+            <a:pPr algn="ctr" indent="0" marL="0">
+              <a:buNone/>
+            </a:pPr>
+            <a:r>
+              <a:rPr lang="en-US" sz="500" dirty="0">
+                <a:solidFill>
+                  <a:srgbClr val="8A8A8A"/>
+                </a:solidFill>
+                <a:latin typeface="Malgun Gothic" pitchFamily="34" charset="0"/>
+                <a:ea typeface="Malgun Gothic" pitchFamily="34" charset="-122"/>
+                <a:cs typeface="Malgun Gothic" pitchFamily="34" charset="-120"/>
+              </a:rPr>
+              <a:t>이문훈 원장은 ㈜알앤디메이커스 제품 설계 자문에 참여하고 자문료를 받았습니다.</a:t>
+            </a:r>
+            <a:endParaRPr lang="en-US" sz="500" dirty="0"/>
+          </a:p>
+        </p:txBody>
+      </p:sp>
+      <p:sp>
+        <p:nvSpPr>
+          <p:cNvPr id="30" name="Text 28"/>
           <p:cNvSpPr txBox="1"/>
           <p:nvPr/>
         </p:nvSpPr>
@@ -16146,7 +18482,7 @@
                 <a:ea typeface="Malgun Gothic" pitchFamily="34" charset="-122"/>
                 <a:cs typeface="Malgun Gothic" pitchFamily="34" charset="-120"/>
               </a:rPr>
-              <a:t>오후 4시 장면 · 인솔은 ICUT 02 끝에 등장</a:t>
+              <a:t>오후 4시 장면 + 하단 전문의 배지</a:t>
             </a:r>
             <a:endParaRPr lang="en-US" sz="1000" dirty="0"/>
           </a:p>
@@ -16154,7 +18490,7 @@
       </p:sp>
       <p:sp>
         <p:nvSpPr>
-          <p:cNvPr id="26" name="Text 24"/>
+          <p:cNvPr id="31" name="Text 29"/>
           <p:cNvSpPr txBox="1"/>
           <p:nvPr/>
         </p:nvSpPr>
@@ -16277,6 +18613,26 @@
                 <a:ea typeface="Malgun Gothic" pitchFamily="34" charset="-122"/>
                 <a:cs typeface="Malgun Gothic" pitchFamily="34" charset="-120"/>
               </a:rPr>
+              <a:t>정형외과 전문의 이문훈 설계 자문</a:t>
+            </a:r>
+            <a:endParaRPr lang="en-US" sz="1600" dirty="0"/>
+          </a:p>
+          <a:p>
+            <a:pPr algn="ctr" indent="0" marL="0">
+              <a:lnSpc>
+                <a:spcPct val="125000"/>
+              </a:lnSpc>
+              <a:buNone/>
+            </a:pPr>
+            <a:r>
+              <a:rPr lang="en-US" sz="1400" dirty="0">
+                <a:solidFill>
+                  <a:srgbClr val="232323"/>
+                </a:solidFill>
+                <a:latin typeface="Malgun Gothic" pitchFamily="34" charset="0"/>
+                <a:ea typeface="Malgun Gothic" pitchFamily="34" charset="-122"/>
+                <a:cs typeface="Malgun Gothic" pitchFamily="34" charset="-120"/>
+              </a:rPr>
               <a:t>RS 쿼드그립 아치가득 인솔</a:t>
             </a:r>
             <a:endParaRPr lang="en-US" sz="1600" dirty="0"/>
@@ -16285,7 +18641,7 @@
       </p:sp>
       <p:sp>
         <p:nvSpPr>
-          <p:cNvPr id="27" name="Shape 25"/>
+          <p:cNvPr id="32" name="Shape 30"/>
           <p:cNvSpPr/>
           <p:nvPr/>
         </p:nvSpPr>
@@ -16312,7 +18668,7 @@
       </p:sp>
       <p:sp>
         <p:nvSpPr>
-          <p:cNvPr id="28" name="Text 26"/>
+          <p:cNvPr id="33" name="Text 31"/>
           <p:cNvSpPr txBox="1"/>
           <p:nvPr/>
         </p:nvSpPr>
@@ -16343,7 +18699,7 @@
                 <a:ea typeface="Malgun Gothic" pitchFamily="34" charset="-122"/>
                 <a:cs typeface="Malgun Gothic" pitchFamily="34" charset="-120"/>
               </a:rPr>
-              <a:t>⚠ 확정(대표 10/15) · 평발·교정·피로감소 금칙</a:t>
+              <a:t>⚠ 배지는 '설계 자문'만 · 추천·인정 ✗ · 대가 표기 같은 화면</a:t>
             </a:r>
             <a:endParaRPr lang="en-US" sz="900" dirty="0"/>
           </a:p>
@@ -16480,7 +18836,7 @@
                 <a:ea typeface="Malgun Gothic" pitchFamily="34" charset="-122"/>
                 <a:cs typeface="Malgun Gothic" pitchFamily="34" charset="-120"/>
               </a:rPr>
-              <a:t>ICUT 02 / 14   공감 — 신발이 아니라, 바닥이 납작해서</a:t>
+              <a:t>ICUT 02 / 15   공감 — 신발이 아니라, 바닥이 납작해서</a:t>
             </a:r>
             <a:endParaRPr lang="en-US" sz="1600" dirty="0"/>
           </a:p>
@@ -17181,7 +19537,7 @@
                 <a:ea typeface="Malgun Gothic" pitchFamily="34" charset="-122"/>
                 <a:cs typeface="Malgun Gothic" pitchFamily="34" charset="-120"/>
               </a:rPr>
-              <a:t>하루 종일</a:t>
+              <a:t>헐거워진</a:t>
             </a:r>
             <a:endParaRPr lang="en-US" sz="800" dirty="0"/>
           </a:p>
@@ -17198,7 +19554,7 @@
                 <a:ea typeface="Malgun Gothic" pitchFamily="34" charset="-122"/>
                 <a:cs typeface="Malgun Gothic" pitchFamily="34" charset="-120"/>
               </a:rPr>
-              <a:t>출근화</a:t>
+              <a:t>슬립온</a:t>
             </a:r>
             <a:endParaRPr lang="en-US" sz="800" dirty="0"/>
           </a:p>
@@ -17312,17 +19668,17 @@
               <a:buNone/>
             </a:pPr>
             <a:r>
-              <a:rPr lang="en-US" sz="800" dirty="0">
-                <a:solidFill>
-                  <a:srgbClr val="8A8A8A"/>
-                </a:solidFill>
-                <a:latin typeface="Malgun Gothic" pitchFamily="34" charset="0"/>
-                <a:ea typeface="Malgun Gothic" pitchFamily="34" charset="-122"/>
-                <a:cs typeface="Malgun Gothic" pitchFamily="34" charset="-120"/>
-              </a:rPr>
-              <a:t>새 신발을 사기엔 아깝고</a:t>
-            </a:r>
-            <a:endParaRPr lang="en-US" sz="800" dirty="0"/>
+              <a:rPr lang="en-US" sz="900" b="1" dirty="0">
+                <a:solidFill>
+                  <a:srgbClr val="3D4A12"/>
+                </a:solidFill>
+                <a:latin typeface="Malgun Gothic" pitchFamily="34" charset="0"/>
+                <a:ea typeface="Malgun Gothic" pitchFamily="34" charset="-122"/>
+                <a:cs typeface="Malgun Gothic" pitchFamily="34" charset="-120"/>
+              </a:rPr>
+              <a:t>그래서, 바닥만 새로.</a:t>
+            </a:r>
+            <a:endParaRPr lang="en-US" sz="900" dirty="0"/>
           </a:p>
         </p:txBody>
       </p:sp>
@@ -17481,7 +19837,7 @@
                 <a:ea typeface="Malgun Gothic" pitchFamily="34" charset="-122"/>
                 <a:cs typeface="Malgun Gothic" pitchFamily="34" charset="-120"/>
               </a:rPr>
-              <a:t>하루 종일 신는 출근화,</a:t>
+              <a:t>신을 때마다 헐거운 신발,</a:t>
             </a:r>
             <a:endParaRPr lang="en-US" sz="1600" dirty="0"/>
           </a:p>
@@ -17667,7 +20023,7 @@
                 <a:ea typeface="Malgun Gothic" pitchFamily="34" charset="-122"/>
                 <a:cs typeface="Malgun Gothic" pitchFamily="34" charset="-120"/>
               </a:rPr>
-              <a:t>ICUT 03 / 14   제품 등장 — 4가지 구조</a:t>
+              <a:t>ICUT 03 / 15   제품 등장 — 5가지 구조</a:t>
             </a:r>
             <a:endParaRPr lang="en-US" sz="1600" dirty="0"/>
           </a:p>
@@ -18059,7 +20415,7 @@
                 <a:ea typeface="Malgun Gothic" pitchFamily="34" charset="-122"/>
                 <a:cs typeface="Malgun Gothic" pitchFamily="34" charset="-120"/>
               </a:rPr>
-              <a:t>  아이콘 4</a:t>
+              <a:t>  아이콘</a:t>
             </a:r>
             <a:endParaRPr lang="en-US" sz="1100" dirty="0"/>
           </a:p>
@@ -18099,7 +20455,7 @@
                 <a:ea typeface="Malgun Gothic" pitchFamily="34" charset="-122"/>
                 <a:cs typeface="Malgun Gothic" pitchFamily="34" charset="-120"/>
               </a:rPr>
-              <a:t>→ 상세·행택 아이콘 통일</a:t>
+              <a:t>→ + 반굽 길이 추가</a:t>
             </a:r>
             <a:endParaRPr lang="en-US" sz="1100" dirty="0"/>
           </a:p>
@@ -18138,7 +20494,7 @@
                 <a:ea typeface="Malgun Gothic" pitchFamily="34" charset="-122"/>
                 <a:cs typeface="Malgun Gothic" pitchFamily="34" charset="-120"/>
               </a:rPr>
-              <a:t>REF · 행택 앞표지 아이콘 4종 그대로</a:t>
+              <a:t>REF · 행택 앞표지 아이콘 + 반굽</a:t>
             </a:r>
             <a:endParaRPr lang="en-US" sz="1000" dirty="0"/>
           </a:p>
@@ -18216,12 +20572,12 @@
         </p:nvSpPr>
         <p:spPr>
           <a:xfrm>
-            <a:off x="5367528" y="2514600"/>
-            <a:ext cx="914400" cy="1828800"/>
+            <a:off x="5413248" y="3017520"/>
+            <a:ext cx="822960" cy="1371600"/>
           </a:xfrm>
           <a:prstGeom prst="roundRect">
             <a:avLst>
-              <a:gd name="adj" fmla="val 30000"/>
+              <a:gd name="adj" fmla="val 33333"/>
             </a:avLst>
           </a:prstGeom>
           <a:solidFill>
@@ -18243,8 +20599,8 @@
         </p:nvSpPr>
         <p:spPr>
           <a:xfrm>
-            <a:off x="5404104" y="2514600"/>
-            <a:ext cx="841248" cy="1828800"/>
+            <a:off x="5449824" y="3017520"/>
+            <a:ext cx="749808" cy="1371600"/>
           </a:xfrm>
           <a:prstGeom prst="rect">
             <a:avLst/>
@@ -18268,24 +20624,24 @@
                 <a:ea typeface="Malgun Gothic" pitchFamily="34" charset="-122"/>
                 <a:cs typeface="Malgun Gothic" pitchFamily="34" charset="-120"/>
               </a:rPr>
+              <a:t>반굽</a:t>
+            </a:r>
+            <a:endParaRPr lang="en-US" sz="800" dirty="0"/>
+          </a:p>
+          <a:p>
+            <a:pPr algn="ctr" indent="0" marL="0">
+              <a:buNone/>
+            </a:pPr>
+            <a:r>
+              <a:rPr lang="en-US" sz="800" dirty="0">
+                <a:solidFill>
+                  <a:srgbClr val="232323"/>
+                </a:solidFill>
+                <a:latin typeface="Malgun Gothic" pitchFamily="34" charset="0"/>
+                <a:ea typeface="Malgun Gothic" pitchFamily="34" charset="-122"/>
+                <a:cs typeface="Malgun Gothic" pitchFamily="34" charset="-120"/>
+              </a:rPr>
               <a:t>인솔</a:t>
-            </a:r>
-            <a:endParaRPr lang="en-US" sz="800" dirty="0"/>
-          </a:p>
-          <a:p>
-            <a:pPr algn="ctr" indent="0" marL="0">
-              <a:buNone/>
-            </a:pPr>
-            <a:r>
-              <a:rPr lang="en-US" sz="800" dirty="0">
-                <a:solidFill>
-                  <a:srgbClr val="232323"/>
-                </a:solidFill>
-                <a:latin typeface="Malgun Gothic" pitchFamily="34" charset="0"/>
-                <a:ea typeface="Malgun Gothic" pitchFamily="34" charset="-122"/>
-                <a:cs typeface="Malgun Gothic" pitchFamily="34" charset="-120"/>
-              </a:rPr>
-              <a:t>탑뷰</a:t>
             </a:r>
             <a:endParaRPr lang="en-US" sz="800" dirty="0"/>
           </a:p>
@@ -18299,7 +20655,7 @@
         </p:nvSpPr>
         <p:spPr>
           <a:xfrm>
-            <a:off x="4636008" y="2697480"/>
+            <a:off x="4636008" y="2514600"/>
             <a:ext cx="548640" cy="548640"/>
           </a:xfrm>
           <a:prstGeom prst="ellipse">
@@ -18324,7 +20680,7 @@
         </p:nvSpPr>
         <p:spPr>
           <a:xfrm>
-            <a:off x="4636008" y="2697480"/>
+            <a:off x="4636008" y="2514600"/>
             <a:ext cx="548640" cy="548640"/>
           </a:xfrm>
           <a:prstGeom prst="rect">
@@ -18380,7 +20736,7 @@
         </p:nvSpPr>
         <p:spPr>
           <a:xfrm>
-            <a:off x="6464808" y="2697480"/>
+            <a:off x="6464808" y="2514600"/>
             <a:ext cx="548640" cy="548640"/>
           </a:xfrm>
           <a:prstGeom prst="ellipse">
@@ -18405,7 +20761,7 @@
         </p:nvSpPr>
         <p:spPr>
           <a:xfrm>
-            <a:off x="6464808" y="2697480"/>
+            <a:off x="6464808" y="2514600"/>
             <a:ext cx="548640" cy="548640"/>
           </a:xfrm>
           <a:prstGeom prst="rect">
@@ -18430,7 +20786,7 @@
                 <a:ea typeface="Malgun Gothic" pitchFamily="34" charset="-122"/>
                 <a:cs typeface="Malgun Gothic" pitchFamily="34" charset="-120"/>
               </a:rPr>
-              <a:t>4점</a:t>
+              <a:t>반굽</a:t>
             </a:r>
             <a:endParaRPr lang="en-US" sz="700" dirty="0"/>
           </a:p>
@@ -18444,7 +20800,7 @@
         </p:nvSpPr>
         <p:spPr>
           <a:xfrm>
-            <a:off x="4636008" y="3611880"/>
+            <a:off x="4636008" y="3337560"/>
             <a:ext cx="548640" cy="548640"/>
           </a:xfrm>
           <a:prstGeom prst="ellipse">
@@ -18469,7 +20825,7 @@
         </p:nvSpPr>
         <p:spPr>
           <a:xfrm>
-            <a:off x="4636008" y="3611880"/>
+            <a:off x="4636008" y="3337560"/>
             <a:ext cx="548640" cy="548640"/>
           </a:xfrm>
           <a:prstGeom prst="rect">
@@ -18525,7 +20881,7 @@
         </p:nvSpPr>
         <p:spPr>
           <a:xfrm>
-            <a:off x="6464808" y="3611880"/>
+            <a:off x="6464808" y="3337560"/>
             <a:ext cx="548640" cy="548640"/>
           </a:xfrm>
           <a:prstGeom prst="ellipse">
@@ -18550,7 +20906,7 @@
         </p:nvSpPr>
         <p:spPr>
           <a:xfrm>
-            <a:off x="6464808" y="3611880"/>
+            <a:off x="6464808" y="3337560"/>
             <a:ext cx="548640" cy="548640"/>
           </a:xfrm>
           <a:prstGeom prst="rect">
@@ -18575,6 +20931,70 @@
                 <a:ea typeface="Malgun Gothic" pitchFamily="34" charset="-122"/>
                 <a:cs typeface="Malgun Gothic" pitchFamily="34" charset="-120"/>
               </a:rPr>
+              <a:t>4점</a:t>
+            </a:r>
+            <a:endParaRPr lang="en-US" sz="700" dirty="0"/>
+          </a:p>
+        </p:txBody>
+      </p:sp>
+      <p:sp>
+        <p:nvSpPr>
+          <p:cNvPr id="30" name="Shape 28"/>
+          <p:cNvSpPr/>
+          <p:nvPr/>
+        </p:nvSpPr>
+        <p:spPr>
+          <a:xfrm>
+            <a:off x="5550408" y="4480560"/>
+            <a:ext cx="548640" cy="548640"/>
+          </a:xfrm>
+          <a:prstGeom prst="ellipse">
+            <a:avLst/>
+          </a:prstGeom>
+          <a:solidFill>
+            <a:srgbClr val="C6F432"/>
+          </a:solidFill>
+          <a:ln w="12700">
+            <a:solidFill>
+              <a:srgbClr val="C6F432"/>
+            </a:solidFill>
+            <a:prstDash val="solid"/>
+          </a:ln>
+        </p:spPr>
+      </p:sp>
+      <p:sp>
+        <p:nvSpPr>
+          <p:cNvPr id="31" name="Text 29"/>
+          <p:cNvSpPr txBox="1"/>
+          <p:nvPr/>
+        </p:nvSpPr>
+        <p:spPr>
+          <a:xfrm>
+            <a:off x="5550408" y="4480560"/>
+            <a:ext cx="548640" cy="548640"/>
+          </a:xfrm>
+          <a:prstGeom prst="rect">
+            <a:avLst/>
+          </a:prstGeom>
+          <a:noFill/>
+          <a:ln/>
+        </p:spPr>
+        <p:txBody>
+          <a:bodyPr wrap="square" lIns="0" tIns="0" rIns="0" bIns="0" rtlCol="0" anchor="ctr"/>
+          <a:lstStyle/>
+          <a:p>
+            <a:pPr algn="ctr" indent="0" marL="0">
+              <a:buNone/>
+            </a:pPr>
+            <a:r>
+              <a:rPr lang="en-US" sz="700" b="1" dirty="0">
+                <a:solidFill>
+                  <a:srgbClr val="232323"/>
+                </a:solidFill>
+                <a:latin typeface="Malgun Gothic" pitchFamily="34" charset="0"/>
+                <a:ea typeface="Malgun Gothic" pitchFamily="34" charset="-122"/>
+                <a:cs typeface="Malgun Gothic" pitchFamily="34" charset="-120"/>
+              </a:rPr>
               <a:t>통기</a:t>
             </a:r>
             <a:endParaRPr lang="en-US" sz="700" dirty="0"/>
@@ -18600,7 +21020,7 @@
       </p:sp>
       <p:sp>
         <p:nvSpPr>
-          <p:cNvPr id="30" name="Text 28"/>
+          <p:cNvPr id="32" name="Text 30"/>
           <p:cNvSpPr txBox="1"/>
           <p:nvPr/>
         </p:nvSpPr>
@@ -18631,7 +21051,7 @@
                 <a:ea typeface="Malgun Gothic" pitchFamily="34" charset="-122"/>
                 <a:cs typeface="Malgun Gothic" pitchFamily="34" charset="-120"/>
               </a:rPr>
-              <a:t>인솔 탑뷰 + 아이콘 4</a:t>
+              <a:t>반굽 인솔 탑뷰 + 아이콘 5</a:t>
             </a:r>
             <a:endParaRPr lang="en-US" sz="1000" dirty="0"/>
           </a:p>
@@ -18639,7 +21059,7 @@
       </p:sp>
       <p:sp>
         <p:nvSpPr>
-          <p:cNvPr id="31" name="Text 29"/>
+          <p:cNvPr id="33" name="Text 31"/>
           <p:cNvSpPr txBox="1"/>
           <p:nvPr/>
         </p:nvSpPr>
@@ -18673,7 +21093,7 @@
                 <a:ea typeface="Malgun Gothic" pitchFamily="34" charset="-122"/>
                 <a:cs typeface="Malgun Gothic" pitchFamily="34" charset="-120"/>
               </a:rPr>
-              <a:t>네 가지를</a:t>
+              <a:t>다섯 가지를</a:t>
             </a:r>
             <a:endParaRPr lang="en-US" sz="1600" dirty="0"/>
           </a:p>
@@ -18753,7 +21173,7 @@
                 <a:ea typeface="Malgun Gothic" pitchFamily="34" charset="-122"/>
                 <a:cs typeface="Malgun Gothic" pitchFamily="34" charset="-120"/>
               </a:rPr>
-              <a:t>쿼드그립 4점</a:t>
+              <a:t>반굽 길이 — 쓰던 깔창 밑에도</a:t>
             </a:r>
             <a:endParaRPr lang="en-US" sz="1600" dirty="0"/>
           </a:p>
@@ -18774,6 +21194,26 @@
                 <a:cs typeface="Malgun Gothic" pitchFamily="34" charset="-120"/>
               </a:rPr>
               <a:t>뒤꿈치 컵</a:t>
+            </a:r>
+            <a:endParaRPr lang="en-US" sz="1600" dirty="0"/>
+          </a:p>
+          <a:p>
+            <a:pPr algn="ctr" indent="0" marL="0">
+              <a:lnSpc>
+                <a:spcPct val="125000"/>
+              </a:lnSpc>
+              <a:buNone/>
+            </a:pPr>
+            <a:r>
+              <a:rPr lang="en-US" sz="1400" dirty="0">
+                <a:solidFill>
+                  <a:srgbClr val="232323"/>
+                </a:solidFill>
+                <a:latin typeface="Malgun Gothic" pitchFamily="34" charset="0"/>
+                <a:ea typeface="Malgun Gothic" pitchFamily="34" charset="-122"/>
+                <a:cs typeface="Malgun Gothic" pitchFamily="34" charset="-120"/>
+              </a:rPr>
+              <a:t>쿼드그립 4점</a:t>
             </a:r>
             <a:endParaRPr lang="en-US" sz="1600" dirty="0"/>
           </a:p>
@@ -18930,7 +21370,7 @@
                 <a:ea typeface="Malgun Gothic" pitchFamily="34" charset="-122"/>
                 <a:cs typeface="Malgun Gothic" pitchFamily="34" charset="-120"/>
               </a:rPr>
-              <a:t>ICUT 04 / 14   POINT 01 · 아치 라인을 따라 가득</a:t>
+              <a:t>ICUT 04 / 15   POINT 01 · 아치 아래 빈 공간, 가득</a:t>
             </a:r>
             <a:endParaRPr lang="en-US" sz="1600" dirty="0"/>
           </a:p>
@@ -19531,7 +21971,7 @@
                 <a:ea typeface="Malgun Gothic" pitchFamily="34" charset="-122"/>
                 <a:cs typeface="Malgun Gothic" pitchFamily="34" charset="-120"/>
               </a:rPr>
-              <a:t>아치 라인을 따라 가득</a:t>
+              <a:t>아치 아래 빈 공간, 가득</a:t>
             </a:r>
             <a:endParaRPr lang="en-US" sz="900" dirty="0"/>
           </a:p>
@@ -20040,7 +22480,7 @@
                 <a:ea typeface="Malgun Gothic" pitchFamily="34" charset="-122"/>
                 <a:cs typeface="Malgun Gothic" pitchFamily="34" charset="-120"/>
               </a:rPr>
-              <a:t>ICUT 05 / 14   POINT 02 · 쿼드그립 4점</a:t>
+              <a:t>ICUT 05 / 15   POINT 02 · 쿼드그립 4점</a:t>
             </a:r>
             <a:endParaRPr lang="en-US" sz="1600" dirty="0"/>
           </a:p>
@@ -20655,12 +23095,12 @@
         </p:nvSpPr>
         <p:spPr>
           <a:xfrm>
-            <a:off x="5367528" y="2788920"/>
-            <a:ext cx="914400" cy="1920240"/>
+            <a:off x="5413248" y="2880360"/>
+            <a:ext cx="822960" cy="1645920"/>
           </a:xfrm>
           <a:prstGeom prst="roundRect">
             <a:avLst>
-              <a:gd name="adj" fmla="val 30000"/>
+              <a:gd name="adj" fmla="val 33333"/>
             </a:avLst>
           </a:prstGeom>
           <a:solidFill>
@@ -20682,7 +23122,7 @@
         </p:nvSpPr>
         <p:spPr>
           <a:xfrm>
-            <a:off x="5596128" y="4343400"/>
+            <a:off x="5596128" y="4160520"/>
             <a:ext cx="228600" cy="228600"/>
           </a:xfrm>
           <a:prstGeom prst="ellipse">
@@ -20707,7 +23147,7 @@
         </p:nvSpPr>
         <p:spPr>
           <a:xfrm>
-            <a:off x="5824728" y="3840480"/>
+            <a:off x="5824728" y="3749040"/>
             <a:ext cx="228600" cy="228600"/>
           </a:xfrm>
           <a:prstGeom prst="ellipse">
@@ -20757,7 +23197,7 @@
         </p:nvSpPr>
         <p:spPr>
           <a:xfrm>
-            <a:off x="5504688" y="3063240"/>
+            <a:off x="5550408" y="3017520"/>
             <a:ext cx="228600" cy="228600"/>
           </a:xfrm>
           <a:prstGeom prst="ellipse">
@@ -20995,7 +23435,7 @@
                 <a:ea typeface="Malgun Gothic" pitchFamily="34" charset="-122"/>
                 <a:cs typeface="Malgun Gothic" pitchFamily="34" charset="-120"/>
               </a:rPr>
-              <a:t>⚠ 🔒 인솔 4점 실제 구조·패드 재질 확인 후 문구 확정</a:t>
+              <a:t>⚠ 🔒 반굽 인솔 4점 실제 위치·패드 재질 확인 후 문구 확정</a:t>
             </a:r>
             <a:endParaRPr lang="en-US" sz="900" dirty="0"/>
           </a:p>
@@ -21132,7 +23572,7 @@
                 <a:ea typeface="Malgun Gothic" pitchFamily="34" charset="-122"/>
                 <a:cs typeface="Malgun Gothic" pitchFamily="34" charset="-120"/>
               </a:rPr>
-              <a:t>ICUT 06 / 14   POINT 03 · 뒤꿈치 컵</a:t>
+              <a:t>ICUT 06 / 15   POINT 03 · 뒤꿈치 컵</a:t>
             </a:r>
             <a:endParaRPr lang="en-US" sz="1600" dirty="0"/>
           </a:p>

--- a/launch/rs/design/detail-handoff/rs-insole-detail-v1.pptx
+++ b/launch/rs/design/detail-handoff/rs-insole-detail-v1.pptx
@@ -124,12 +124,12 @@
   <p:extLst>
     <p:ext uri="{521415D9-36F7-43E2-AB2F-B90AF26B5E84}">
       <p14:sectionLst xmlns:p14="http://schemas.microsoft.com/office/powerpoint/2010/main">
-        <p14:section name="개요" id="{1ccef353-70d2-c7b2-39c1-54bf92202857}">
+        <p14:section name="개요" id="{f845ae7f-0cc2-37bf-2036-d017335759ac}">
           <p14:sldIdLst>
             <p14:sldId id="256"/>
           </p14:sldIdLst>
         </p14:section>
-        <p14:section name="인솔" id="{9c03f4ee-15a4-561a-2603-067a642f2728}">
+        <p14:section name="인솔" id="{ad98d673-583a-c642-0622-97bf917e4269}">
           <p14:sldIdLst>
             <p14:sldId id="257"/>
             <p14:sldId id="258"/>
@@ -7450,7 +7450,7 @@
                 <a:ea typeface="Malgun Gothic" pitchFamily="34" charset="-122"/>
                 <a:cs typeface="Malgun Gothic" pitchFamily="34" charset="-120"/>
               </a:rPr>
-              <a:t>— 정형외과 전문의 이문훈</a:t>
+              <a:t>— 정형외과 전문의 이문홍</a:t>
             </a:r>
             <a:endParaRPr lang="en-US" sz="700" dirty="0"/>
           </a:p>
@@ -7489,7 +7489,7 @@
                 <a:ea typeface="Malgun Gothic" pitchFamily="34" charset="-122"/>
                 <a:cs typeface="Malgun Gothic" pitchFamily="34" charset="-120"/>
               </a:rPr>
-              <a:t>이문훈 원장은 ㈜알앤디메이커스 제품 설계 자문에 참여하고 자문료를 받았습니다.</a:t>
+              <a:t>이문홍 원장은 ㈜알앤디메이커스 제품 설계 자문에 참여하고 자문료를 받았습니다.</a:t>
             </a:r>
             <a:endParaRPr lang="en-US" sz="500" dirty="0"/>
           </a:p>
@@ -7719,7 +7719,7 @@
                 <a:ea typeface="Malgun Gothic" pitchFamily="34" charset="-122"/>
                 <a:cs typeface="Malgun Gothic" pitchFamily="34" charset="-120"/>
               </a:rPr>
-              <a:t>— 정형외과 전문의 이문훈</a:t>
+              <a:t>— 정형외과 전문의 이문홍</a:t>
             </a:r>
             <a:endParaRPr lang="en-US" sz="1600" dirty="0"/>
           </a:p>
@@ -18338,7 +18338,7 @@
                 <a:ea typeface="Malgun Gothic" pitchFamily="34" charset="-122"/>
                 <a:cs typeface="Malgun Gothic" pitchFamily="34" charset="-120"/>
               </a:rPr>
-              <a:t>정형외과 전문의 이문훈 설계 자문</a:t>
+              <a:t>정형외과 전문의 이문홍 설계 자문</a:t>
             </a:r>
             <a:endParaRPr lang="en-US" sz="700" dirty="0"/>
           </a:p>
@@ -18443,7 +18443,7 @@
                 <a:ea typeface="Malgun Gothic" pitchFamily="34" charset="-122"/>
                 <a:cs typeface="Malgun Gothic" pitchFamily="34" charset="-120"/>
               </a:rPr>
-              <a:t>이문훈 원장은 ㈜알앤디메이커스 제품 설계 자문에 참여하고 자문료를 받았습니다.</a:t>
+              <a:t>이문홍 원장은 ㈜알앤디메이커스 제품 설계 자문에 참여하고 자문료를 받았습니다.</a:t>
             </a:r>
             <a:endParaRPr lang="en-US" sz="500" dirty="0"/>
           </a:p>
@@ -18613,7 +18613,7 @@
                 <a:ea typeface="Malgun Gothic" pitchFamily="34" charset="-122"/>
                 <a:cs typeface="Malgun Gothic" pitchFamily="34" charset="-120"/>
               </a:rPr>
-              <a:t>정형외과 전문의 이문훈 설계 자문</a:t>
+              <a:t>정형외과 전문의 이문홍 설계 자문</a:t>
             </a:r>
             <a:endParaRPr lang="en-US" sz="1600" dirty="0"/>
           </a:p>
